--- a/output/wordlabs-review-3day.pptx
+++ b/output/wordlabs-review-3day.pptx
@@ -4240,7 +4240,7 @@
                 <a:ea typeface="Calibri" pitchFamily="34" charset="-122"/>
                 <a:cs typeface="Calibri" pitchFamily="34" charset="-120"/>
               </a:rPr>
-              <a:t>"look at again, examine"</a:t>
+              <a:t>"look at again carefully"</a:t>
             </a:r>
             <a:endParaRPr lang="en-US" sz="2200" dirty="0"/>
           </a:p>
@@ -5288,7 +5288,7 @@
                 <a:ea typeface="Calibri" pitchFamily="34" charset="-122"/>
                 <a:cs typeface="Calibri" pitchFamily="34" charset="-120"/>
               </a:rPr>
-              <a:t>Word Labs  •  wordlabs.app  •  Root: 'review' = look at again, examine</a:t>
+              <a:t>Word Labs  •  wordlabs.app  •  Root: 'review' = look at again carefully</a:t>
             </a:r>
             <a:endParaRPr lang="en-US" sz="800" dirty="0"/>
           </a:p>
@@ -5622,7 +5622,7 @@
                 <a:ea typeface="Trebuchet MS" pitchFamily="34" charset="-122"/>
                 <a:cs typeface="Trebuchet MS" pitchFamily="34" charset="-120"/>
               </a:rPr>
-              <a:t>0</a:t>
+              <a:t>1</a:t>
             </a:r>
             <a:pPr algn="ctr" indent="0" marL="0">
               <a:buNone/>
@@ -5928,7 +5928,7 @@
                 <a:ea typeface="Calibri" pitchFamily="34" charset="-122"/>
                 <a:cs typeface="Calibri" pitchFamily="34" charset="-120"/>
               </a:rPr>
-              <a:t>Word Labs  •  wordlabs.app  •  Root: 'review' = look at again, examine</a:t>
+              <a:t>Word Labs  •  wordlabs.app  •  Root: 'review' = look at again carefully</a:t>
             </a:r>
             <a:endParaRPr lang="en-US" sz="800" dirty="0"/>
           </a:p>
@@ -6071,7 +6071,7 @@
                 <a:ea typeface="Calibri" pitchFamily="34" charset="-122"/>
                 <a:cs typeface="Calibri" pitchFamily="34" charset="-120"/>
               </a:rPr>
-              <a:t> carefully </a:t>
+              <a:t> gave a detailed report, and the class enjoyed </a:t>
             </a:r>
             <a:pPr algn="l" indent="0" marL="0">
               <a:buNone/>
@@ -6088,7 +6088,7 @@
                 <a:ea typeface="Calibri" pitchFamily="34" charset="-122"/>
                 <a:cs typeface="Calibri" pitchFamily="34" charset="-120"/>
               </a:rPr>
-              <a:t>reviewed</a:t>
+              <a:t>reviewing</a:t>
             </a:r>
             <a:pPr algn="l" indent="0" marL="0">
               <a:buNone/>
@@ -6102,7 +6102,7 @@
                 <a:ea typeface="Calibri" pitchFamily="34" charset="-122"/>
                 <a:cs typeface="Calibri" pitchFamily="34" charset="-120"/>
               </a:rPr>
-              <a:t> the student's science project and gave helpful feedback.</a:t>
+              <a:t> their work together.</a:t>
             </a:r>
             <a:endParaRPr lang="en-US" sz="1800" dirty="0"/>
           </a:p>
@@ -6385,7 +6385,7 @@
                 <a:ea typeface="Trebuchet MS" pitchFamily="34" charset="-122"/>
                 <a:cs typeface="Trebuchet MS" pitchFamily="34" charset="-120"/>
               </a:rPr>
-              <a:t>reviewed</a:t>
+              <a:t>reviewing</a:t>
             </a:r>
             <a:endParaRPr lang="en-US" sz="1400" dirty="0"/>
           </a:p>
@@ -6716,7 +6716,7 @@
                 <a:ea typeface="Calibri" pitchFamily="34" charset="-122"/>
                 <a:cs typeface="Calibri" pitchFamily="34" charset="-120"/>
               </a:rPr>
-              <a:t>Word Labs  •  wordlabs.app  •  Root: 'review' = look at again, examine</a:t>
+              <a:t>Word Labs  •  wordlabs.app  •  Root: 'review' = look at again carefully</a:t>
             </a:r>
             <a:endParaRPr lang="en-US" sz="800" dirty="0"/>
           </a:p>
@@ -7543,7 +7543,7 @@
                 <a:ea typeface="Calibri" pitchFamily="34" charset="-122"/>
                 <a:cs typeface="Calibri" pitchFamily="34" charset="-120"/>
               </a:rPr>
-              <a:t>Word Labs  •  wordlabs.app  •  Root: 'review' = look at again, examine</a:t>
+              <a:t>Word Labs  •  wordlabs.app  •  Root: 'review' = look at again carefully</a:t>
             </a:r>
             <a:endParaRPr lang="en-US" sz="800" dirty="0"/>
           </a:p>
@@ -7762,7 +7762,7 @@
         </p:nvSpPr>
         <p:spPr>
           <a:xfrm>
-            <a:off x="2938272" y="2258568"/>
+            <a:off x="2221992" y="2258568"/>
             <a:ext cx="1828800" cy="292608"/>
           </a:xfrm>
           <a:prstGeom prst="rect">
@@ -7771,11 +7771,11 @@
             </a:avLst>
           </a:prstGeom>
           <a:solidFill>
-            <a:srgbClr val="CCFBF1"/>
+            <a:srgbClr val="DDD6FE"/>
           </a:solidFill>
           <a:ln w="19050">
             <a:solidFill>
-              <a:srgbClr val="0D9488"/>
+              <a:srgbClr val="7C3AED"/>
             </a:solidFill>
             <a:prstDash val="solid"/>
           </a:ln>
@@ -7796,7 +7796,7 @@
         </p:nvSpPr>
         <p:spPr>
           <a:xfrm>
-            <a:off x="2938272" y="2258568"/>
+            <a:off x="2221992" y="2258568"/>
             <a:ext cx="1828800" cy="292608"/>
           </a:xfrm>
           <a:prstGeom prst="rect">
@@ -7815,13 +7815,13 @@
             <a:r>
               <a:rPr lang="en-US" sz="1300" b="1" dirty="0">
                 <a:solidFill>
-                  <a:srgbClr val="0F766E"/>
+                  <a:srgbClr val="4C1D95"/>
                 </a:solidFill>
                 <a:latin typeface="Trebuchet MS" pitchFamily="34" charset="0"/>
                 <a:ea typeface="Trebuchet MS" pitchFamily="34" charset="-122"/>
                 <a:cs typeface="Trebuchet MS" pitchFamily="34" charset="-120"/>
               </a:rPr>
-              <a:t>review</a:t>
+              <a:t>re</a:t>
             </a:r>
             <a:endParaRPr lang="en-US" sz="1300" dirty="0"/>
           </a:p>
@@ -7835,7 +7835,7 @@
         </p:nvSpPr>
         <p:spPr>
           <a:xfrm>
-            <a:off x="2938272" y="2569464"/>
+            <a:off x="2221992" y="2569464"/>
             <a:ext cx="1828800" cy="201168"/>
           </a:xfrm>
           <a:prstGeom prst="rect">
@@ -7860,7 +7860,7 @@
                 <a:ea typeface="Calibri" pitchFamily="34" charset="-122"/>
                 <a:cs typeface="Calibri" pitchFamily="34" charset="-120"/>
               </a:rPr>
-              <a:t>look at again</a:t>
+              <a:t>again</a:t>
             </a:r>
             <a:endParaRPr lang="en-US" sz="850" dirty="0"/>
           </a:p>
@@ -7874,7 +7874,7 @@
         </p:nvSpPr>
         <p:spPr>
           <a:xfrm>
-            <a:off x="5803392" y="2258568"/>
+            <a:off x="4370832" y="2258568"/>
             <a:ext cx="1828800" cy="292608"/>
           </a:xfrm>
           <a:prstGeom prst="rect">
@@ -7908,7 +7908,7 @@
         </p:nvSpPr>
         <p:spPr>
           <a:xfrm>
-            <a:off x="5803392" y="2258568"/>
+            <a:off x="4370832" y="2258568"/>
             <a:ext cx="1828800" cy="292608"/>
           </a:xfrm>
           <a:prstGeom prst="rect">
@@ -7933,7 +7933,7 @@
                 <a:ea typeface="Trebuchet MS" pitchFamily="34" charset="-122"/>
                 <a:cs typeface="Trebuchet MS" pitchFamily="34" charset="-120"/>
               </a:rPr>
-              <a:t>er</a:t>
+              <a:t>view</a:t>
             </a:r>
             <a:endParaRPr lang="en-US" sz="1300" dirty="0"/>
           </a:p>
@@ -7947,7 +7947,7 @@
         </p:nvSpPr>
         <p:spPr>
           <a:xfrm>
-            <a:off x="5803392" y="2569464"/>
+            <a:off x="4370832" y="2569464"/>
             <a:ext cx="1828800" cy="201168"/>
           </a:xfrm>
           <a:prstGeom prst="rect">
@@ -7972,7 +7972,7 @@
                 <a:ea typeface="Calibri" pitchFamily="34" charset="-122"/>
                 <a:cs typeface="Calibri" pitchFamily="34" charset="-120"/>
               </a:rPr>
-              <a:t>a person who does something</a:t>
+              <a:t>see or look</a:t>
             </a:r>
             <a:endParaRPr lang="en-US" sz="850" dirty="0"/>
           </a:p>
@@ -7981,6 +7981,118 @@
       <p:sp>
         <p:nvSpPr>
           <p:cNvPr id="22" name="Shape 20"/>
+          <p:cNvSpPr/>
+          <p:nvPr/>
+        </p:nvSpPr>
+        <p:spPr>
+          <a:xfrm>
+            <a:off x="6519672" y="2258568"/>
+            <a:ext cx="1828800" cy="292608"/>
+          </a:xfrm>
+          <a:prstGeom prst="rect">
+            <a:avLst>
+              <a:gd name="adj" fmla="val 25000"/>
+            </a:avLst>
+          </a:prstGeom>
+          <a:solidFill>
+            <a:srgbClr val="FCE7F3"/>
+          </a:solidFill>
+          <a:ln w="19050">
+            <a:solidFill>
+              <a:srgbClr val="DB2777"/>
+            </a:solidFill>
+            <a:prstDash val="solid"/>
+          </a:ln>
+          <a:effectLst>
+            <a:outerShdw sx="100000" sy="100000" kx="0" ky="0" algn="bl" rotWithShape="0" blurRad="101600" dist="38100" dir="8100000">
+              <a:srgbClr val="000000">
+                <a:alpha val="12000"/>
+              </a:srgbClr>
+            </a:outerShdw>
+          </a:effectLst>
+        </p:spPr>
+      </p:sp>
+      <p:sp>
+        <p:nvSpPr>
+          <p:cNvPr id="23" name="Text 21"/>
+          <p:cNvSpPr/>
+          <p:nvPr/>
+        </p:nvSpPr>
+        <p:spPr>
+          <a:xfrm>
+            <a:off x="6519672" y="2258568"/>
+            <a:ext cx="1828800" cy="292608"/>
+          </a:xfrm>
+          <a:prstGeom prst="rect">
+            <a:avLst/>
+          </a:prstGeom>
+          <a:noFill/>
+          <a:ln/>
+        </p:spPr>
+        <p:txBody>
+          <a:bodyPr wrap="square" lIns="0" tIns="0" rIns="0" bIns="0" rtlCol="0" anchor="ctr"/>
+          <a:lstStyle/>
+          <a:p>
+            <a:pPr algn="ctr" indent="0" marL="0">
+              <a:buNone/>
+            </a:pPr>
+            <a:r>
+              <a:rPr lang="en-US" sz="1300" b="1" dirty="0">
+                <a:solidFill>
+                  <a:srgbClr val="9D174D"/>
+                </a:solidFill>
+                <a:latin typeface="Trebuchet MS" pitchFamily="34" charset="0"/>
+                <a:ea typeface="Trebuchet MS" pitchFamily="34" charset="-122"/>
+                <a:cs typeface="Trebuchet MS" pitchFamily="34" charset="-120"/>
+              </a:rPr>
+              <a:t>er</a:t>
+            </a:r>
+            <a:endParaRPr lang="en-US" sz="1300" dirty="0"/>
+          </a:p>
+        </p:txBody>
+      </p:sp>
+      <p:sp>
+        <p:nvSpPr>
+          <p:cNvPr id="24" name="Text 22"/>
+          <p:cNvSpPr/>
+          <p:nvPr/>
+        </p:nvSpPr>
+        <p:spPr>
+          <a:xfrm>
+            <a:off x="6519672" y="2569464"/>
+            <a:ext cx="1828800" cy="201168"/>
+          </a:xfrm>
+          <a:prstGeom prst="rect">
+            <a:avLst/>
+          </a:prstGeom>
+          <a:noFill/>
+          <a:ln/>
+        </p:spPr>
+        <p:txBody>
+          <a:bodyPr wrap="square" lIns="0" tIns="0" rIns="0" bIns="0" rtlCol="0" anchor="t"/>
+          <a:lstStyle/>
+          <a:p>
+            <a:pPr algn="ctr" indent="0" marL="0">
+              <a:buNone/>
+            </a:pPr>
+            <a:r>
+              <a:rPr lang="en-US" sz="850" dirty="0">
+                <a:solidFill>
+                  <a:srgbClr val="475569"/>
+                </a:solidFill>
+                <a:latin typeface="Calibri" pitchFamily="34" charset="0"/>
+                <a:ea typeface="Calibri" pitchFamily="34" charset="-122"/>
+                <a:cs typeface="Calibri" pitchFamily="34" charset="-120"/>
+              </a:rPr>
+              <a:t>person who does something</a:t>
+            </a:r>
+            <a:endParaRPr lang="en-US" sz="850" dirty="0"/>
+          </a:p>
+        </p:txBody>
+      </p:sp>
+      <p:sp>
+        <p:nvSpPr>
+          <p:cNvPr id="25" name="Shape 23"/>
           <p:cNvSpPr/>
           <p:nvPr/>
         </p:nvSpPr>
@@ -8007,7 +8119,7 @@
       </p:sp>
       <p:sp>
         <p:nvSpPr>
-          <p:cNvPr id="23" name="Text 21"/>
+          <p:cNvPr id="26" name="Text 24"/>
           <p:cNvSpPr/>
           <p:nvPr/>
         </p:nvSpPr>
@@ -8046,7 +8158,7 @@
       </p:sp>
       <p:sp>
         <p:nvSpPr>
-          <p:cNvPr id="24" name="Shape 22"/>
+          <p:cNvPr id="27" name="Shape 25"/>
           <p:cNvSpPr/>
           <p:nvPr/>
         </p:nvSpPr>
@@ -8073,7 +8185,7 @@
       </p:sp>
       <p:sp>
         <p:nvSpPr>
-          <p:cNvPr id="25" name="Text 23"/>
+          <p:cNvPr id="28" name="Text 26"/>
           <p:cNvSpPr/>
           <p:nvPr/>
         </p:nvSpPr>
@@ -8112,7 +8224,7 @@
       </p:sp>
       <p:sp>
         <p:nvSpPr>
-          <p:cNvPr id="26" name="Shape 24"/>
+          <p:cNvPr id="29" name="Shape 27"/>
           <p:cNvSpPr/>
           <p:nvPr/>
         </p:nvSpPr>
@@ -8139,7 +8251,7 @@
       </p:sp>
       <p:sp>
         <p:nvSpPr>
-          <p:cNvPr id="27" name="Text 25"/>
+          <p:cNvPr id="30" name="Text 28"/>
           <p:cNvSpPr/>
           <p:nvPr/>
         </p:nvSpPr>
@@ -8178,7 +8290,7 @@
       </p:sp>
       <p:sp>
         <p:nvSpPr>
-          <p:cNvPr id="28" name="Shape 26"/>
+          <p:cNvPr id="31" name="Shape 29"/>
           <p:cNvSpPr/>
           <p:nvPr/>
         </p:nvSpPr>
@@ -8205,7 +8317,7 @@
       </p:sp>
       <p:sp>
         <p:nvSpPr>
-          <p:cNvPr id="29" name="Text 27"/>
+          <p:cNvPr id="32" name="Text 30"/>
           <p:cNvSpPr/>
           <p:nvPr/>
         </p:nvSpPr>
@@ -8528,7 +8640,7 @@
                 <a:ea typeface="Calibri" pitchFamily="34" charset="-122"/>
                 <a:cs typeface="Calibri" pitchFamily="34" charset="-120"/>
               </a:rPr>
-              <a:t>Word Labs  •  wordlabs.app  •  Root: 'review' = look at again, examine</a:t>
+              <a:t>Word Labs  •  wordlabs.app  •  Root: 'review' = look at again carefully</a:t>
             </a:r>
             <a:endParaRPr lang="en-US" sz="800" dirty="0"/>
           </a:p>
@@ -8747,7 +8859,7 @@
         </p:nvSpPr>
         <p:spPr>
           <a:xfrm>
-            <a:off x="2938272" y="2258568"/>
+            <a:off x="2221992" y="2258568"/>
             <a:ext cx="1828800" cy="292608"/>
           </a:xfrm>
           <a:prstGeom prst="rect">
@@ -8756,11 +8868,11 @@
             </a:avLst>
           </a:prstGeom>
           <a:solidFill>
-            <a:srgbClr val="CCFBF1"/>
+            <a:srgbClr val="DDD6FE"/>
           </a:solidFill>
           <a:ln w="19050">
             <a:solidFill>
-              <a:srgbClr val="0D9488"/>
+              <a:srgbClr val="7C3AED"/>
             </a:solidFill>
             <a:prstDash val="solid"/>
           </a:ln>
@@ -8781,7 +8893,7 @@
         </p:nvSpPr>
         <p:spPr>
           <a:xfrm>
-            <a:off x="2938272" y="2258568"/>
+            <a:off x="2221992" y="2258568"/>
             <a:ext cx="1828800" cy="292608"/>
           </a:xfrm>
           <a:prstGeom prst="rect">
@@ -8800,13 +8912,13 @@
             <a:r>
               <a:rPr lang="en-US" sz="1300" b="1" dirty="0">
                 <a:solidFill>
-                  <a:srgbClr val="0F766E"/>
+                  <a:srgbClr val="4C1D95"/>
                 </a:solidFill>
                 <a:latin typeface="Trebuchet MS" pitchFamily="34" charset="0"/>
                 <a:ea typeface="Trebuchet MS" pitchFamily="34" charset="-122"/>
                 <a:cs typeface="Trebuchet MS" pitchFamily="34" charset="-120"/>
               </a:rPr>
-              <a:t>review</a:t>
+              <a:t>re</a:t>
             </a:r>
             <a:endParaRPr lang="en-US" sz="1300" dirty="0"/>
           </a:p>
@@ -8820,7 +8932,7 @@
         </p:nvSpPr>
         <p:spPr>
           <a:xfrm>
-            <a:off x="2938272" y="2569464"/>
+            <a:off x="2221992" y="2569464"/>
             <a:ext cx="1828800" cy="201168"/>
           </a:xfrm>
           <a:prstGeom prst="rect">
@@ -8845,7 +8957,7 @@
                 <a:ea typeface="Calibri" pitchFamily="34" charset="-122"/>
                 <a:cs typeface="Calibri" pitchFamily="34" charset="-120"/>
               </a:rPr>
-              <a:t>look at again</a:t>
+              <a:t>again</a:t>
             </a:r>
             <a:endParaRPr lang="en-US" sz="850" dirty="0"/>
           </a:p>
@@ -8859,7 +8971,7 @@
         </p:nvSpPr>
         <p:spPr>
           <a:xfrm>
-            <a:off x="5803392" y="2258568"/>
+            <a:off x="4370832" y="2258568"/>
             <a:ext cx="1828800" cy="292608"/>
           </a:xfrm>
           <a:prstGeom prst="rect">
@@ -8893,7 +9005,7 @@
         </p:nvSpPr>
         <p:spPr>
           <a:xfrm>
-            <a:off x="5803392" y="2258568"/>
+            <a:off x="4370832" y="2258568"/>
             <a:ext cx="1828800" cy="292608"/>
           </a:xfrm>
           <a:prstGeom prst="rect">
@@ -8918,7 +9030,7 @@
                 <a:ea typeface="Trebuchet MS" pitchFamily="34" charset="-122"/>
                 <a:cs typeface="Trebuchet MS" pitchFamily="34" charset="-120"/>
               </a:rPr>
-              <a:t>er</a:t>
+              <a:t>view</a:t>
             </a:r>
             <a:endParaRPr lang="en-US" sz="1300" dirty="0"/>
           </a:p>
@@ -8932,7 +9044,7 @@
         </p:nvSpPr>
         <p:spPr>
           <a:xfrm>
-            <a:off x="5803392" y="2569464"/>
+            <a:off x="4370832" y="2569464"/>
             <a:ext cx="1828800" cy="201168"/>
           </a:xfrm>
           <a:prstGeom prst="rect">
@@ -8957,7 +9069,7 @@
                 <a:ea typeface="Calibri" pitchFamily="34" charset="-122"/>
                 <a:cs typeface="Calibri" pitchFamily="34" charset="-120"/>
               </a:rPr>
-              <a:t>a person who does something</a:t>
+              <a:t>see or look</a:t>
             </a:r>
             <a:endParaRPr lang="en-US" sz="850" dirty="0"/>
           </a:p>
@@ -8966,6 +9078,118 @@
       <p:sp>
         <p:nvSpPr>
           <p:cNvPr id="22" name="Shape 20"/>
+          <p:cNvSpPr/>
+          <p:nvPr/>
+        </p:nvSpPr>
+        <p:spPr>
+          <a:xfrm>
+            <a:off x="6519672" y="2258568"/>
+            <a:ext cx="1828800" cy="292608"/>
+          </a:xfrm>
+          <a:prstGeom prst="rect">
+            <a:avLst>
+              <a:gd name="adj" fmla="val 25000"/>
+            </a:avLst>
+          </a:prstGeom>
+          <a:solidFill>
+            <a:srgbClr val="FCE7F3"/>
+          </a:solidFill>
+          <a:ln w="19050">
+            <a:solidFill>
+              <a:srgbClr val="DB2777"/>
+            </a:solidFill>
+            <a:prstDash val="solid"/>
+          </a:ln>
+          <a:effectLst>
+            <a:outerShdw sx="100000" sy="100000" kx="0" ky="0" algn="bl" rotWithShape="0" blurRad="101600" dist="38100" dir="8100000">
+              <a:srgbClr val="000000">
+                <a:alpha val="12000"/>
+              </a:srgbClr>
+            </a:outerShdw>
+          </a:effectLst>
+        </p:spPr>
+      </p:sp>
+      <p:sp>
+        <p:nvSpPr>
+          <p:cNvPr id="23" name="Text 21"/>
+          <p:cNvSpPr/>
+          <p:nvPr/>
+        </p:nvSpPr>
+        <p:spPr>
+          <a:xfrm>
+            <a:off x="6519672" y="2258568"/>
+            <a:ext cx="1828800" cy="292608"/>
+          </a:xfrm>
+          <a:prstGeom prst="rect">
+            <a:avLst/>
+          </a:prstGeom>
+          <a:noFill/>
+          <a:ln/>
+        </p:spPr>
+        <p:txBody>
+          <a:bodyPr wrap="square" lIns="0" tIns="0" rIns="0" bIns="0" rtlCol="0" anchor="ctr"/>
+          <a:lstStyle/>
+          <a:p>
+            <a:pPr algn="ctr" indent="0" marL="0">
+              <a:buNone/>
+            </a:pPr>
+            <a:r>
+              <a:rPr lang="en-US" sz="1300" b="1" dirty="0">
+                <a:solidFill>
+                  <a:srgbClr val="9D174D"/>
+                </a:solidFill>
+                <a:latin typeface="Trebuchet MS" pitchFamily="34" charset="0"/>
+                <a:ea typeface="Trebuchet MS" pitchFamily="34" charset="-122"/>
+                <a:cs typeface="Trebuchet MS" pitchFamily="34" charset="-120"/>
+              </a:rPr>
+              <a:t>er</a:t>
+            </a:r>
+            <a:endParaRPr lang="en-US" sz="1300" dirty="0"/>
+          </a:p>
+        </p:txBody>
+      </p:sp>
+      <p:sp>
+        <p:nvSpPr>
+          <p:cNvPr id="24" name="Text 22"/>
+          <p:cNvSpPr/>
+          <p:nvPr/>
+        </p:nvSpPr>
+        <p:spPr>
+          <a:xfrm>
+            <a:off x="6519672" y="2569464"/>
+            <a:ext cx="1828800" cy="201168"/>
+          </a:xfrm>
+          <a:prstGeom prst="rect">
+            <a:avLst/>
+          </a:prstGeom>
+          <a:noFill/>
+          <a:ln/>
+        </p:spPr>
+        <p:txBody>
+          <a:bodyPr wrap="square" lIns="0" tIns="0" rIns="0" bIns="0" rtlCol="0" anchor="t"/>
+          <a:lstStyle/>
+          <a:p>
+            <a:pPr algn="ctr" indent="0" marL="0">
+              <a:buNone/>
+            </a:pPr>
+            <a:r>
+              <a:rPr lang="en-US" sz="850" dirty="0">
+                <a:solidFill>
+                  <a:srgbClr val="475569"/>
+                </a:solidFill>
+                <a:latin typeface="Calibri" pitchFamily="34" charset="0"/>
+                <a:ea typeface="Calibri" pitchFamily="34" charset="-122"/>
+                <a:cs typeface="Calibri" pitchFamily="34" charset="-120"/>
+              </a:rPr>
+              <a:t>person who does something</a:t>
+            </a:r>
+            <a:endParaRPr lang="en-US" sz="850" dirty="0"/>
+          </a:p>
+        </p:txBody>
+      </p:sp>
+      <p:sp>
+        <p:nvSpPr>
+          <p:cNvPr id="25" name="Shape 23"/>
           <p:cNvSpPr/>
           <p:nvPr/>
         </p:nvSpPr>
@@ -8992,7 +9216,7 @@
       </p:sp>
       <p:sp>
         <p:nvSpPr>
-          <p:cNvPr id="23" name="Text 21"/>
+          <p:cNvPr id="26" name="Text 24"/>
           <p:cNvSpPr/>
           <p:nvPr/>
         </p:nvSpPr>
@@ -9031,7 +9255,7 @@
       </p:sp>
       <p:sp>
         <p:nvSpPr>
-          <p:cNvPr id="24" name="Shape 22"/>
+          <p:cNvPr id="27" name="Shape 25"/>
           <p:cNvSpPr/>
           <p:nvPr/>
         </p:nvSpPr>
@@ -9058,7 +9282,7 @@
       </p:sp>
       <p:sp>
         <p:nvSpPr>
-          <p:cNvPr id="25" name="Shape 23"/>
+          <p:cNvPr id="28" name="Shape 26"/>
           <p:cNvSpPr/>
           <p:nvPr/>
         </p:nvSpPr>
@@ -9085,7 +9309,7 @@
       </p:sp>
       <p:sp>
         <p:nvSpPr>
-          <p:cNvPr id="26" name="Text 24"/>
+          <p:cNvPr id="29" name="Text 27"/>
           <p:cNvSpPr/>
           <p:nvPr/>
         </p:nvSpPr>
@@ -9124,7 +9348,7 @@
       </p:sp>
       <p:sp>
         <p:nvSpPr>
-          <p:cNvPr id="27" name="Text 25"/>
+          <p:cNvPr id="30" name="Text 28"/>
           <p:cNvSpPr/>
           <p:nvPr/>
         </p:nvSpPr>
@@ -9163,7 +9387,7 @@
       </p:sp>
       <p:sp>
         <p:nvSpPr>
-          <p:cNvPr id="28" name="Shape 26"/>
+          <p:cNvPr id="31" name="Shape 29"/>
           <p:cNvSpPr/>
           <p:nvPr/>
         </p:nvSpPr>
@@ -9190,7 +9414,7 @@
       </p:sp>
       <p:sp>
         <p:nvSpPr>
-          <p:cNvPr id="29" name="Text 27"/>
+          <p:cNvPr id="32" name="Text 30"/>
           <p:cNvSpPr/>
           <p:nvPr/>
         </p:nvSpPr>
@@ -9229,7 +9453,7 @@
       </p:sp>
       <p:sp>
         <p:nvSpPr>
-          <p:cNvPr id="30" name="Text 28"/>
+          <p:cNvPr id="33" name="Text 31"/>
           <p:cNvSpPr/>
           <p:nvPr/>
         </p:nvSpPr>
@@ -9268,7 +9492,7 @@
       </p:sp>
       <p:sp>
         <p:nvSpPr>
-          <p:cNvPr id="31" name="Shape 29"/>
+          <p:cNvPr id="34" name="Shape 32"/>
           <p:cNvSpPr/>
           <p:nvPr/>
         </p:nvSpPr>
@@ -9295,7 +9519,7 @@
       </p:sp>
       <p:sp>
         <p:nvSpPr>
-          <p:cNvPr id="32" name="Text 30"/>
+          <p:cNvPr id="35" name="Text 33"/>
           <p:cNvSpPr/>
           <p:nvPr/>
         </p:nvSpPr>
@@ -9334,7 +9558,7 @@
       </p:sp>
       <p:sp>
         <p:nvSpPr>
-          <p:cNvPr id="33" name="Shape 31"/>
+          <p:cNvPr id="36" name="Shape 34"/>
           <p:cNvSpPr/>
           <p:nvPr/>
         </p:nvSpPr>
@@ -9361,7 +9585,7 @@
       </p:sp>
       <p:sp>
         <p:nvSpPr>
-          <p:cNvPr id="34" name="Text 32"/>
+          <p:cNvPr id="37" name="Text 35"/>
           <p:cNvSpPr/>
           <p:nvPr/>
         </p:nvSpPr>
@@ -9400,7 +9624,7 @@
       </p:sp>
       <p:sp>
         <p:nvSpPr>
-          <p:cNvPr id="35" name="Shape 33"/>
+          <p:cNvPr id="38" name="Shape 36"/>
           <p:cNvSpPr/>
           <p:nvPr/>
         </p:nvSpPr>
@@ -9427,7 +9651,7 @@
       </p:sp>
       <p:sp>
         <p:nvSpPr>
-          <p:cNvPr id="36" name="Text 34"/>
+          <p:cNvPr id="39" name="Text 37"/>
           <p:cNvSpPr/>
           <p:nvPr/>
         </p:nvSpPr>
@@ -9750,7 +9974,7 @@
                 <a:ea typeface="Calibri" pitchFamily="34" charset="-122"/>
                 <a:cs typeface="Calibri" pitchFamily="34" charset="-120"/>
               </a:rPr>
-              <a:t>Word Labs  •  wordlabs.app  •  Root: 'review' = look at again, examine</a:t>
+              <a:t>Word Labs  •  wordlabs.app  •  Root: 'review' = look at again carefully</a:t>
             </a:r>
             <a:endParaRPr lang="en-US" sz="800" dirty="0"/>
           </a:p>
@@ -9969,7 +10193,7 @@
         </p:nvSpPr>
         <p:spPr>
           <a:xfrm>
-            <a:off x="2938272" y="2258568"/>
+            <a:off x="2221992" y="2258568"/>
             <a:ext cx="1828800" cy="292608"/>
           </a:xfrm>
           <a:prstGeom prst="rect">
@@ -9978,11 +10202,11 @@
             </a:avLst>
           </a:prstGeom>
           <a:solidFill>
-            <a:srgbClr val="CCFBF1"/>
+            <a:srgbClr val="DDD6FE"/>
           </a:solidFill>
           <a:ln w="19050">
             <a:solidFill>
-              <a:srgbClr val="0D9488"/>
+              <a:srgbClr val="7C3AED"/>
             </a:solidFill>
             <a:prstDash val="solid"/>
           </a:ln>
@@ -10003,7 +10227,7 @@
         </p:nvSpPr>
         <p:spPr>
           <a:xfrm>
-            <a:off x="2938272" y="2258568"/>
+            <a:off x="2221992" y="2258568"/>
             <a:ext cx="1828800" cy="292608"/>
           </a:xfrm>
           <a:prstGeom prst="rect">
@@ -10022,13 +10246,13 @@
             <a:r>
               <a:rPr lang="en-US" sz="1300" b="1" dirty="0">
                 <a:solidFill>
-                  <a:srgbClr val="0F766E"/>
+                  <a:srgbClr val="4C1D95"/>
                 </a:solidFill>
                 <a:latin typeface="Trebuchet MS" pitchFamily="34" charset="0"/>
                 <a:ea typeface="Trebuchet MS" pitchFamily="34" charset="-122"/>
                 <a:cs typeface="Trebuchet MS" pitchFamily="34" charset="-120"/>
               </a:rPr>
-              <a:t>review</a:t>
+              <a:t>re</a:t>
             </a:r>
             <a:endParaRPr lang="en-US" sz="1300" dirty="0"/>
           </a:p>
@@ -10042,7 +10266,7 @@
         </p:nvSpPr>
         <p:spPr>
           <a:xfrm>
-            <a:off x="2938272" y="2569464"/>
+            <a:off x="2221992" y="2569464"/>
             <a:ext cx="1828800" cy="201168"/>
           </a:xfrm>
           <a:prstGeom prst="rect">
@@ -10067,7 +10291,7 @@
                 <a:ea typeface="Calibri" pitchFamily="34" charset="-122"/>
                 <a:cs typeface="Calibri" pitchFamily="34" charset="-120"/>
               </a:rPr>
-              <a:t>look at again</a:t>
+              <a:t>again</a:t>
             </a:r>
             <a:endParaRPr lang="en-US" sz="850" dirty="0"/>
           </a:p>
@@ -10081,7 +10305,7 @@
         </p:nvSpPr>
         <p:spPr>
           <a:xfrm>
-            <a:off x="5803392" y="2258568"/>
+            <a:off x="4370832" y="2258568"/>
             <a:ext cx="1828800" cy="292608"/>
           </a:xfrm>
           <a:prstGeom prst="rect">
@@ -10115,7 +10339,7 @@
         </p:nvSpPr>
         <p:spPr>
           <a:xfrm>
-            <a:off x="5803392" y="2258568"/>
+            <a:off x="4370832" y="2258568"/>
             <a:ext cx="1828800" cy="292608"/>
           </a:xfrm>
           <a:prstGeom prst="rect">
@@ -10140,7 +10364,7 @@
                 <a:ea typeface="Trebuchet MS" pitchFamily="34" charset="-122"/>
                 <a:cs typeface="Trebuchet MS" pitchFamily="34" charset="-120"/>
               </a:rPr>
-              <a:t>er</a:t>
+              <a:t>view</a:t>
             </a:r>
             <a:endParaRPr lang="en-US" sz="1300" dirty="0"/>
           </a:p>
@@ -10154,7 +10378,7 @@
         </p:nvSpPr>
         <p:spPr>
           <a:xfrm>
-            <a:off x="5803392" y="2569464"/>
+            <a:off x="4370832" y="2569464"/>
             <a:ext cx="1828800" cy="201168"/>
           </a:xfrm>
           <a:prstGeom prst="rect">
@@ -10179,7 +10403,7 @@
                 <a:ea typeface="Calibri" pitchFamily="34" charset="-122"/>
                 <a:cs typeface="Calibri" pitchFamily="34" charset="-120"/>
               </a:rPr>
-              <a:t>a person who does something</a:t>
+              <a:t>see or look</a:t>
             </a:r>
             <a:endParaRPr lang="en-US" sz="850" dirty="0"/>
           </a:p>
@@ -10188,6 +10412,118 @@
       <p:sp>
         <p:nvSpPr>
           <p:cNvPr id="22" name="Shape 20"/>
+          <p:cNvSpPr/>
+          <p:nvPr/>
+        </p:nvSpPr>
+        <p:spPr>
+          <a:xfrm>
+            <a:off x="6519672" y="2258568"/>
+            <a:ext cx="1828800" cy="292608"/>
+          </a:xfrm>
+          <a:prstGeom prst="rect">
+            <a:avLst>
+              <a:gd name="adj" fmla="val 25000"/>
+            </a:avLst>
+          </a:prstGeom>
+          <a:solidFill>
+            <a:srgbClr val="FCE7F3"/>
+          </a:solidFill>
+          <a:ln w="19050">
+            <a:solidFill>
+              <a:srgbClr val="DB2777"/>
+            </a:solidFill>
+            <a:prstDash val="solid"/>
+          </a:ln>
+          <a:effectLst>
+            <a:outerShdw sx="100000" sy="100000" kx="0" ky="0" algn="bl" rotWithShape="0" blurRad="101600" dist="38100" dir="8100000">
+              <a:srgbClr val="000000">
+                <a:alpha val="12000"/>
+              </a:srgbClr>
+            </a:outerShdw>
+          </a:effectLst>
+        </p:spPr>
+      </p:sp>
+      <p:sp>
+        <p:nvSpPr>
+          <p:cNvPr id="23" name="Text 21"/>
+          <p:cNvSpPr/>
+          <p:nvPr/>
+        </p:nvSpPr>
+        <p:spPr>
+          <a:xfrm>
+            <a:off x="6519672" y="2258568"/>
+            <a:ext cx="1828800" cy="292608"/>
+          </a:xfrm>
+          <a:prstGeom prst="rect">
+            <a:avLst/>
+          </a:prstGeom>
+          <a:noFill/>
+          <a:ln/>
+        </p:spPr>
+        <p:txBody>
+          <a:bodyPr wrap="square" lIns="0" tIns="0" rIns="0" bIns="0" rtlCol="0" anchor="ctr"/>
+          <a:lstStyle/>
+          <a:p>
+            <a:pPr algn="ctr" indent="0" marL="0">
+              <a:buNone/>
+            </a:pPr>
+            <a:r>
+              <a:rPr lang="en-US" sz="1300" b="1" dirty="0">
+                <a:solidFill>
+                  <a:srgbClr val="9D174D"/>
+                </a:solidFill>
+                <a:latin typeface="Trebuchet MS" pitchFamily="34" charset="0"/>
+                <a:ea typeface="Trebuchet MS" pitchFamily="34" charset="-122"/>
+                <a:cs typeface="Trebuchet MS" pitchFamily="34" charset="-120"/>
+              </a:rPr>
+              <a:t>er</a:t>
+            </a:r>
+            <a:endParaRPr lang="en-US" sz="1300" dirty="0"/>
+          </a:p>
+        </p:txBody>
+      </p:sp>
+      <p:sp>
+        <p:nvSpPr>
+          <p:cNvPr id="24" name="Text 22"/>
+          <p:cNvSpPr/>
+          <p:nvPr/>
+        </p:nvSpPr>
+        <p:spPr>
+          <a:xfrm>
+            <a:off x="6519672" y="2569464"/>
+            <a:ext cx="1828800" cy="201168"/>
+          </a:xfrm>
+          <a:prstGeom prst="rect">
+            <a:avLst/>
+          </a:prstGeom>
+          <a:noFill/>
+          <a:ln/>
+        </p:spPr>
+        <p:txBody>
+          <a:bodyPr wrap="square" lIns="0" tIns="0" rIns="0" bIns="0" rtlCol="0" anchor="t"/>
+          <a:lstStyle/>
+          <a:p>
+            <a:pPr algn="ctr" indent="0" marL="0">
+              <a:buNone/>
+            </a:pPr>
+            <a:r>
+              <a:rPr lang="en-US" sz="850" dirty="0">
+                <a:solidFill>
+                  <a:srgbClr val="475569"/>
+                </a:solidFill>
+                <a:latin typeface="Calibri" pitchFamily="34" charset="0"/>
+                <a:ea typeface="Calibri" pitchFamily="34" charset="-122"/>
+                <a:cs typeface="Calibri" pitchFamily="34" charset="-120"/>
+              </a:rPr>
+              <a:t>person who does something</a:t>
+            </a:r>
+            <a:endParaRPr lang="en-US" sz="850" dirty="0"/>
+          </a:p>
+        </p:txBody>
+      </p:sp>
+      <p:sp>
+        <p:nvSpPr>
+          <p:cNvPr id="25" name="Shape 23"/>
           <p:cNvSpPr/>
           <p:nvPr/>
         </p:nvSpPr>
@@ -10214,7 +10550,7 @@
       </p:sp>
       <p:sp>
         <p:nvSpPr>
-          <p:cNvPr id="23" name="Text 21"/>
+          <p:cNvPr id="26" name="Text 24"/>
           <p:cNvSpPr/>
           <p:nvPr/>
         </p:nvSpPr>
@@ -10253,7 +10589,7 @@
       </p:sp>
       <p:sp>
         <p:nvSpPr>
-          <p:cNvPr id="24" name="Shape 22"/>
+          <p:cNvPr id="27" name="Shape 25"/>
           <p:cNvSpPr/>
           <p:nvPr/>
         </p:nvSpPr>
@@ -10280,7 +10616,7 @@
       </p:sp>
       <p:sp>
         <p:nvSpPr>
-          <p:cNvPr id="25" name="Shape 23"/>
+          <p:cNvPr id="28" name="Shape 26"/>
           <p:cNvSpPr/>
           <p:nvPr/>
         </p:nvSpPr>
@@ -10307,7 +10643,7 @@
       </p:sp>
       <p:sp>
         <p:nvSpPr>
-          <p:cNvPr id="26" name="Text 24"/>
+          <p:cNvPr id="29" name="Text 27"/>
           <p:cNvSpPr/>
           <p:nvPr/>
         </p:nvSpPr>
@@ -10346,7 +10682,7 @@
       </p:sp>
       <p:sp>
         <p:nvSpPr>
-          <p:cNvPr id="27" name="Text 25"/>
+          <p:cNvPr id="30" name="Text 28"/>
           <p:cNvSpPr/>
           <p:nvPr/>
         </p:nvSpPr>
@@ -10385,7 +10721,7 @@
       </p:sp>
       <p:sp>
         <p:nvSpPr>
-          <p:cNvPr id="28" name="Shape 26"/>
+          <p:cNvPr id="31" name="Shape 29"/>
           <p:cNvSpPr/>
           <p:nvPr/>
         </p:nvSpPr>
@@ -10412,7 +10748,7 @@
       </p:sp>
       <p:sp>
         <p:nvSpPr>
-          <p:cNvPr id="29" name="Text 27"/>
+          <p:cNvPr id="32" name="Text 30"/>
           <p:cNvSpPr/>
           <p:nvPr/>
         </p:nvSpPr>
@@ -10451,7 +10787,7 @@
       </p:sp>
       <p:sp>
         <p:nvSpPr>
-          <p:cNvPr id="30" name="Text 28"/>
+          <p:cNvPr id="33" name="Text 31"/>
           <p:cNvSpPr/>
           <p:nvPr/>
         </p:nvSpPr>
@@ -10490,7 +10826,7 @@
       </p:sp>
       <p:sp>
         <p:nvSpPr>
-          <p:cNvPr id="31" name="Shape 29"/>
+          <p:cNvPr id="34" name="Shape 32"/>
           <p:cNvSpPr/>
           <p:nvPr/>
         </p:nvSpPr>
@@ -10517,7 +10853,7 @@
       </p:sp>
       <p:sp>
         <p:nvSpPr>
-          <p:cNvPr id="32" name="Text 30"/>
+          <p:cNvPr id="35" name="Text 33"/>
           <p:cNvSpPr/>
           <p:nvPr/>
         </p:nvSpPr>
@@ -10556,7 +10892,7 @@
       </p:sp>
       <p:sp>
         <p:nvSpPr>
-          <p:cNvPr id="33" name="Shape 31"/>
+          <p:cNvPr id="36" name="Shape 34"/>
           <p:cNvSpPr/>
           <p:nvPr/>
         </p:nvSpPr>
@@ -10583,7 +10919,7 @@
       </p:sp>
       <p:sp>
         <p:nvSpPr>
-          <p:cNvPr id="34" name="Text 32"/>
+          <p:cNvPr id="37" name="Text 35"/>
           <p:cNvSpPr/>
           <p:nvPr/>
         </p:nvSpPr>
@@ -10622,7 +10958,7 @@
       </p:sp>
       <p:sp>
         <p:nvSpPr>
-          <p:cNvPr id="35" name="Shape 33"/>
+          <p:cNvPr id="38" name="Shape 36"/>
           <p:cNvSpPr/>
           <p:nvPr/>
         </p:nvSpPr>
@@ -10649,13 +10985,13 @@
       </p:sp>
       <p:sp>
         <p:nvSpPr>
-          <p:cNvPr id="36" name="Shape 34"/>
-          <p:cNvSpPr/>
-          <p:nvPr/>
-        </p:nvSpPr>
-        <p:spPr>
-          <a:xfrm>
-            <a:off x="2254649" y="4169664"/>
+          <p:cNvPr id="39" name="Shape 37"/>
+          <p:cNvSpPr/>
+          <p:nvPr/>
+        </p:nvSpPr>
+        <p:spPr>
+          <a:xfrm>
+            <a:off x="2427732" y="4169664"/>
             <a:ext cx="685800" cy="475488"/>
           </a:xfrm>
           <a:prstGeom prst="rect">
@@ -10676,13 +11012,13 @@
       </p:sp>
       <p:sp>
         <p:nvSpPr>
-          <p:cNvPr id="37" name="Text 35"/>
-          <p:cNvSpPr/>
-          <p:nvPr/>
-        </p:nvSpPr>
-        <p:spPr>
-          <a:xfrm>
-            <a:off x="2254649" y="4169664"/>
+          <p:cNvPr id="40" name="Text 38"/>
+          <p:cNvSpPr/>
+          <p:nvPr/>
+        </p:nvSpPr>
+        <p:spPr>
+          <a:xfrm>
+            <a:off x="2427732" y="4169664"/>
             <a:ext cx="685800" cy="475488"/>
           </a:xfrm>
           <a:prstGeom prst="rect">
@@ -10715,13 +11051,13 @@
       </p:sp>
       <p:sp>
         <p:nvSpPr>
-          <p:cNvPr id="38" name="Shape 36"/>
-          <p:cNvSpPr/>
-          <p:nvPr/>
-        </p:nvSpPr>
-        <p:spPr>
-          <a:xfrm>
-            <a:off x="3293146" y="4169664"/>
+          <p:cNvPr id="41" name="Shape 39"/>
+          <p:cNvSpPr/>
+          <p:nvPr/>
+        </p:nvSpPr>
+        <p:spPr>
+          <a:xfrm>
+            <a:off x="3639312" y="4169664"/>
             <a:ext cx="685800" cy="475488"/>
           </a:xfrm>
           <a:prstGeom prst="rect">
@@ -10742,13 +11078,13 @@
       </p:sp>
       <p:sp>
         <p:nvSpPr>
-          <p:cNvPr id="39" name="Text 37"/>
-          <p:cNvSpPr/>
-          <p:nvPr/>
-        </p:nvSpPr>
-        <p:spPr>
-          <a:xfrm>
-            <a:off x="3293146" y="4169664"/>
+          <p:cNvPr id="42" name="Text 40"/>
+          <p:cNvSpPr/>
+          <p:nvPr/>
+        </p:nvSpPr>
+        <p:spPr>
+          <a:xfrm>
+            <a:off x="3639312" y="4169664"/>
             <a:ext cx="685800" cy="475488"/>
           </a:xfrm>
           <a:prstGeom prst="rect">
@@ -10781,13 +11117,13 @@
       </p:sp>
       <p:sp>
         <p:nvSpPr>
-          <p:cNvPr id="40" name="Shape 38"/>
-          <p:cNvSpPr/>
-          <p:nvPr/>
-        </p:nvSpPr>
-        <p:spPr>
-          <a:xfrm>
-            <a:off x="4331643" y="4169664"/>
+          <p:cNvPr id="43" name="Shape 41"/>
+          <p:cNvSpPr/>
+          <p:nvPr/>
+        </p:nvSpPr>
+        <p:spPr>
+          <a:xfrm>
+            <a:off x="4850892" y="4169664"/>
             <a:ext cx="685800" cy="475488"/>
           </a:xfrm>
           <a:prstGeom prst="rect">
@@ -10808,13 +11144,13 @@
       </p:sp>
       <p:sp>
         <p:nvSpPr>
-          <p:cNvPr id="41" name="Text 39"/>
-          <p:cNvSpPr/>
-          <p:nvPr/>
-        </p:nvSpPr>
-        <p:spPr>
-          <a:xfrm>
-            <a:off x="4331643" y="4169664"/>
+          <p:cNvPr id="44" name="Text 42"/>
+          <p:cNvSpPr/>
+          <p:nvPr/>
+        </p:nvSpPr>
+        <p:spPr>
+          <a:xfrm>
+            <a:off x="4850892" y="4169664"/>
             <a:ext cx="685800" cy="475488"/>
           </a:xfrm>
           <a:prstGeom prst="rect">
@@ -10847,13 +11183,13 @@
       </p:sp>
       <p:sp>
         <p:nvSpPr>
-          <p:cNvPr id="42" name="Shape 40"/>
-          <p:cNvSpPr/>
-          <p:nvPr/>
-        </p:nvSpPr>
-        <p:spPr>
-          <a:xfrm>
-            <a:off x="5370141" y="4169664"/>
+          <p:cNvPr id="45" name="Shape 43"/>
+          <p:cNvSpPr/>
+          <p:nvPr/>
+        </p:nvSpPr>
+        <p:spPr>
+          <a:xfrm>
+            <a:off x="6062472" y="4169664"/>
             <a:ext cx="685800" cy="475488"/>
           </a:xfrm>
           <a:prstGeom prst="rect">
@@ -10874,13 +11210,13 @@
       </p:sp>
       <p:sp>
         <p:nvSpPr>
-          <p:cNvPr id="43" name="Text 41"/>
-          <p:cNvSpPr/>
-          <p:nvPr/>
-        </p:nvSpPr>
-        <p:spPr>
-          <a:xfrm>
-            <a:off x="5370141" y="4169664"/>
+          <p:cNvPr id="46" name="Text 44"/>
+          <p:cNvSpPr/>
+          <p:nvPr/>
+        </p:nvSpPr>
+        <p:spPr>
+          <a:xfrm>
+            <a:off x="6062472" y="4169664"/>
             <a:ext cx="685800" cy="475488"/>
           </a:xfrm>
           <a:prstGeom prst="rect">
@@ -10905,7 +11241,7 @@
                 <a:ea typeface="Trebuchet MS" pitchFamily="34" charset="-122"/>
                 <a:cs typeface="Trebuchet MS" pitchFamily="34" charset="-120"/>
               </a:rPr>
-              <a:t>ie</a:t>
+              <a:t>iew</a:t>
             </a:r>
             <a:endParaRPr lang="en-US" sz="900" dirty="0"/>
           </a:p>
@@ -10913,13 +11249,13 @@
       </p:sp>
       <p:sp>
         <p:nvSpPr>
-          <p:cNvPr id="44" name="Shape 42"/>
-          <p:cNvSpPr/>
-          <p:nvPr/>
-        </p:nvSpPr>
-        <p:spPr>
-          <a:xfrm>
-            <a:off x="6408638" y="4169664"/>
+          <p:cNvPr id="47" name="Shape 45"/>
+          <p:cNvSpPr/>
+          <p:nvPr/>
+        </p:nvSpPr>
+        <p:spPr>
+          <a:xfrm>
+            <a:off x="7274052" y="4169664"/>
             <a:ext cx="685800" cy="475488"/>
           </a:xfrm>
           <a:prstGeom prst="rect">
@@ -10940,79 +11276,13 @@
       </p:sp>
       <p:sp>
         <p:nvSpPr>
-          <p:cNvPr id="45" name="Text 43"/>
-          <p:cNvSpPr/>
-          <p:nvPr/>
-        </p:nvSpPr>
-        <p:spPr>
-          <a:xfrm>
-            <a:off x="6408638" y="4169664"/>
-            <a:ext cx="685800" cy="475488"/>
-          </a:xfrm>
-          <a:prstGeom prst="rect">
-            <a:avLst/>
-          </a:prstGeom>
-          <a:noFill/>
-          <a:ln/>
-        </p:spPr>
-        <p:txBody>
-          <a:bodyPr wrap="square" lIns="0" tIns="0" rIns="0" bIns="0" rtlCol="0" anchor="ctr"/>
-          <a:lstStyle/>
-          <a:p>
-            <a:pPr algn="ctr" indent="0" marL="0">
-              <a:buNone/>
-            </a:pPr>
-            <a:r>
-              <a:rPr lang="en-US" sz="900" b="1" dirty="0">
-                <a:solidFill>
-                  <a:srgbClr val="9D174D"/>
-                </a:solidFill>
-                <a:latin typeface="Trebuchet MS" pitchFamily="34" charset="0"/>
-                <a:ea typeface="Trebuchet MS" pitchFamily="34" charset="-122"/>
-                <a:cs typeface="Trebuchet MS" pitchFamily="34" charset="-120"/>
-              </a:rPr>
-              <a:t>w</a:t>
-            </a:r>
-            <a:endParaRPr lang="en-US" sz="900" dirty="0"/>
-          </a:p>
-        </p:txBody>
-      </p:sp>
-      <p:sp>
-        <p:nvSpPr>
-          <p:cNvPr id="46" name="Shape 44"/>
-          <p:cNvSpPr/>
-          <p:nvPr/>
-        </p:nvSpPr>
-        <p:spPr>
-          <a:xfrm>
-            <a:off x="7447135" y="4169664"/>
-            <a:ext cx="685800" cy="475488"/>
-          </a:xfrm>
-          <a:prstGeom prst="rect">
-            <a:avLst>
-              <a:gd name="adj" fmla="val 7692"/>
-            </a:avLst>
-          </a:prstGeom>
-          <a:solidFill>
-            <a:srgbClr val="FFFFFF"/>
-          </a:solidFill>
-          <a:ln w="12700">
-            <a:solidFill>
-              <a:srgbClr val="DB2777"/>
-            </a:solidFill>
-            <a:prstDash val="solid"/>
-          </a:ln>
-        </p:spPr>
-      </p:sp>
-      <p:sp>
-        <p:nvSpPr>
-          <p:cNvPr id="47" name="Text 45"/>
-          <p:cNvSpPr/>
-          <p:nvPr/>
-        </p:nvSpPr>
-        <p:spPr>
-          <a:xfrm>
-            <a:off x="7447135" y="4169664"/>
+          <p:cNvPr id="48" name="Text 46"/>
+          <p:cNvSpPr/>
+          <p:nvPr/>
+        </p:nvSpPr>
+        <p:spPr>
+          <a:xfrm>
+            <a:off x="7274052" y="4169664"/>
             <a:ext cx="685800" cy="475488"/>
           </a:xfrm>
           <a:prstGeom prst="rect">
@@ -11329,7 +11599,7 @@
                 <a:ea typeface="Calibri" pitchFamily="34" charset="-122"/>
                 <a:cs typeface="Calibri" pitchFamily="34" charset="-120"/>
               </a:rPr>
-              <a:t>Word Labs  •  wordlabs.app  •  Root: 'review' = look at again, examine</a:t>
+              <a:t>Word Labs  •  wordlabs.app  •  Root: 'review' = look at again carefully</a:t>
             </a:r>
             <a:endParaRPr lang="en-US" sz="800" dirty="0"/>
           </a:p>
@@ -11468,7 +11738,7 @@
                 <a:ea typeface="Trebuchet MS" pitchFamily="34" charset="-122"/>
                 <a:cs typeface="Trebuchet MS" pitchFamily="34" charset="-120"/>
               </a:rPr>
-              <a:t>reviewed</a:t>
+              <a:t>reviewing</a:t>
             </a:r>
             <a:endParaRPr lang="en-US" sz="2800" dirty="0"/>
           </a:p>
@@ -12156,7 +12426,7 @@
                 <a:ea typeface="Calibri" pitchFamily="34" charset="-122"/>
                 <a:cs typeface="Calibri" pitchFamily="34" charset="-120"/>
               </a:rPr>
-              <a:t>Word Labs  •  wordlabs.app  •  Root: 'review' = look at again, examine</a:t>
+              <a:t>Word Labs  •  wordlabs.app  •  Root: 'review' = look at again carefully</a:t>
             </a:r>
             <a:endParaRPr lang="en-US" sz="800" dirty="0"/>
           </a:p>
@@ -12295,7 +12565,7 @@
                 <a:ea typeface="Trebuchet MS" pitchFamily="34" charset="-122"/>
                 <a:cs typeface="Trebuchet MS" pitchFamily="34" charset="-120"/>
               </a:rPr>
-              <a:t>reviewed</a:t>
+              <a:t>reviewing</a:t>
             </a:r>
             <a:endParaRPr lang="en-US" sz="2800" dirty="0"/>
           </a:p>
@@ -12375,7 +12645,7 @@
         </p:nvSpPr>
         <p:spPr>
           <a:xfrm>
-            <a:off x="2938272" y="2258568"/>
+            <a:off x="2221992" y="2258568"/>
             <a:ext cx="1828800" cy="292608"/>
           </a:xfrm>
           <a:prstGeom prst="rect">
@@ -12384,11 +12654,11 @@
             </a:avLst>
           </a:prstGeom>
           <a:solidFill>
-            <a:srgbClr val="CCFBF1"/>
+            <a:srgbClr val="DDD6FE"/>
           </a:solidFill>
           <a:ln w="19050">
             <a:solidFill>
-              <a:srgbClr val="0D9488"/>
+              <a:srgbClr val="7C3AED"/>
             </a:solidFill>
             <a:prstDash val="solid"/>
           </a:ln>
@@ -12409,7 +12679,7 @@
         </p:nvSpPr>
         <p:spPr>
           <a:xfrm>
-            <a:off x="2938272" y="2258568"/>
+            <a:off x="2221992" y="2258568"/>
             <a:ext cx="1828800" cy="292608"/>
           </a:xfrm>
           <a:prstGeom prst="rect">
@@ -12428,13 +12698,13 @@
             <a:r>
               <a:rPr lang="en-US" sz="1300" b="1" dirty="0">
                 <a:solidFill>
-                  <a:srgbClr val="0F766E"/>
+                  <a:srgbClr val="4C1D95"/>
                 </a:solidFill>
                 <a:latin typeface="Trebuchet MS" pitchFamily="34" charset="0"/>
                 <a:ea typeface="Trebuchet MS" pitchFamily="34" charset="-122"/>
                 <a:cs typeface="Trebuchet MS" pitchFamily="34" charset="-120"/>
               </a:rPr>
-              <a:t>review</a:t>
+              <a:t>re</a:t>
             </a:r>
             <a:endParaRPr lang="en-US" sz="1300" dirty="0"/>
           </a:p>
@@ -12448,7 +12718,7 @@
         </p:nvSpPr>
         <p:spPr>
           <a:xfrm>
-            <a:off x="2938272" y="2569464"/>
+            <a:off x="2221992" y="2569464"/>
             <a:ext cx="1828800" cy="201168"/>
           </a:xfrm>
           <a:prstGeom prst="rect">
@@ -12473,7 +12743,7 @@
                 <a:ea typeface="Calibri" pitchFamily="34" charset="-122"/>
                 <a:cs typeface="Calibri" pitchFamily="34" charset="-120"/>
               </a:rPr>
-              <a:t>look at again</a:t>
+              <a:t>again</a:t>
             </a:r>
             <a:endParaRPr lang="en-US" sz="850" dirty="0"/>
           </a:p>
@@ -12487,7 +12757,7 @@
         </p:nvSpPr>
         <p:spPr>
           <a:xfrm>
-            <a:off x="5803392" y="2258568"/>
+            <a:off x="4370832" y="2258568"/>
             <a:ext cx="1828800" cy="292608"/>
           </a:xfrm>
           <a:prstGeom prst="rect">
@@ -12521,7 +12791,7 @@
         </p:nvSpPr>
         <p:spPr>
           <a:xfrm>
-            <a:off x="5803392" y="2258568"/>
+            <a:off x="4370832" y="2258568"/>
             <a:ext cx="1828800" cy="292608"/>
           </a:xfrm>
           <a:prstGeom prst="rect">
@@ -12546,7 +12816,7 @@
                 <a:ea typeface="Trebuchet MS" pitchFamily="34" charset="-122"/>
                 <a:cs typeface="Trebuchet MS" pitchFamily="34" charset="-120"/>
               </a:rPr>
-              <a:t>ed</a:t>
+              <a:t>view</a:t>
             </a:r>
             <a:endParaRPr lang="en-US" sz="1300" dirty="0"/>
           </a:p>
@@ -12560,7 +12830,7 @@
         </p:nvSpPr>
         <p:spPr>
           <a:xfrm>
-            <a:off x="5803392" y="2569464"/>
+            <a:off x="4370832" y="2569464"/>
             <a:ext cx="1828800" cy="201168"/>
           </a:xfrm>
           <a:prstGeom prst="rect">
@@ -12585,7 +12855,7 @@
                 <a:ea typeface="Calibri" pitchFamily="34" charset="-122"/>
                 <a:cs typeface="Calibri" pitchFamily="34" charset="-120"/>
               </a:rPr>
-              <a:t>in the past</a:t>
+              <a:t>see or look</a:t>
             </a:r>
             <a:endParaRPr lang="en-US" sz="850" dirty="0"/>
           </a:p>
@@ -12594,6 +12864,118 @@
       <p:sp>
         <p:nvSpPr>
           <p:cNvPr id="22" name="Shape 20"/>
+          <p:cNvSpPr/>
+          <p:nvPr/>
+        </p:nvSpPr>
+        <p:spPr>
+          <a:xfrm>
+            <a:off x="6519672" y="2258568"/>
+            <a:ext cx="1828800" cy="292608"/>
+          </a:xfrm>
+          <a:prstGeom prst="rect">
+            <a:avLst>
+              <a:gd name="adj" fmla="val 25000"/>
+            </a:avLst>
+          </a:prstGeom>
+          <a:solidFill>
+            <a:srgbClr val="FCE7F3"/>
+          </a:solidFill>
+          <a:ln w="19050">
+            <a:solidFill>
+              <a:srgbClr val="DB2777"/>
+            </a:solidFill>
+            <a:prstDash val="solid"/>
+          </a:ln>
+          <a:effectLst>
+            <a:outerShdw sx="100000" sy="100000" kx="0" ky="0" algn="bl" rotWithShape="0" blurRad="101600" dist="38100" dir="8100000">
+              <a:srgbClr val="000000">
+                <a:alpha val="12000"/>
+              </a:srgbClr>
+            </a:outerShdw>
+          </a:effectLst>
+        </p:spPr>
+      </p:sp>
+      <p:sp>
+        <p:nvSpPr>
+          <p:cNvPr id="23" name="Text 21"/>
+          <p:cNvSpPr/>
+          <p:nvPr/>
+        </p:nvSpPr>
+        <p:spPr>
+          <a:xfrm>
+            <a:off x="6519672" y="2258568"/>
+            <a:ext cx="1828800" cy="292608"/>
+          </a:xfrm>
+          <a:prstGeom prst="rect">
+            <a:avLst/>
+          </a:prstGeom>
+          <a:noFill/>
+          <a:ln/>
+        </p:spPr>
+        <p:txBody>
+          <a:bodyPr wrap="square" lIns="0" tIns="0" rIns="0" bIns="0" rtlCol="0" anchor="ctr"/>
+          <a:lstStyle/>
+          <a:p>
+            <a:pPr algn="ctr" indent="0" marL="0">
+              <a:buNone/>
+            </a:pPr>
+            <a:r>
+              <a:rPr lang="en-US" sz="1300" b="1" dirty="0">
+                <a:solidFill>
+                  <a:srgbClr val="9D174D"/>
+                </a:solidFill>
+                <a:latin typeface="Trebuchet MS" pitchFamily="34" charset="0"/>
+                <a:ea typeface="Trebuchet MS" pitchFamily="34" charset="-122"/>
+                <a:cs typeface="Trebuchet MS" pitchFamily="34" charset="-120"/>
+              </a:rPr>
+              <a:t>ing</a:t>
+            </a:r>
+            <a:endParaRPr lang="en-US" sz="1300" dirty="0"/>
+          </a:p>
+        </p:txBody>
+      </p:sp>
+      <p:sp>
+        <p:nvSpPr>
+          <p:cNvPr id="24" name="Text 22"/>
+          <p:cNvSpPr/>
+          <p:nvPr/>
+        </p:nvSpPr>
+        <p:spPr>
+          <a:xfrm>
+            <a:off x="6519672" y="2569464"/>
+            <a:ext cx="1828800" cy="201168"/>
+          </a:xfrm>
+          <a:prstGeom prst="rect">
+            <a:avLst/>
+          </a:prstGeom>
+          <a:noFill/>
+          <a:ln/>
+        </p:spPr>
+        <p:txBody>
+          <a:bodyPr wrap="square" lIns="0" tIns="0" rIns="0" bIns="0" rtlCol="0" anchor="t"/>
+          <a:lstStyle/>
+          <a:p>
+            <a:pPr algn="ctr" indent="0" marL="0">
+              <a:buNone/>
+            </a:pPr>
+            <a:r>
+              <a:rPr lang="en-US" sz="850" dirty="0">
+                <a:solidFill>
+                  <a:srgbClr val="475569"/>
+                </a:solidFill>
+                <a:latin typeface="Calibri" pitchFamily="34" charset="0"/>
+                <a:ea typeface="Calibri" pitchFamily="34" charset="-122"/>
+                <a:cs typeface="Calibri" pitchFamily="34" charset="-120"/>
+              </a:rPr>
+              <a:t>ongoing action</a:t>
+            </a:r>
+            <a:endParaRPr lang="en-US" sz="850" dirty="0"/>
+          </a:p>
+        </p:txBody>
+      </p:sp>
+      <p:sp>
+        <p:nvSpPr>
+          <p:cNvPr id="25" name="Shape 23"/>
           <p:cNvSpPr/>
           <p:nvPr/>
         </p:nvSpPr>
@@ -12620,7 +13002,7 @@
       </p:sp>
       <p:sp>
         <p:nvSpPr>
-          <p:cNvPr id="23" name="Text 21"/>
+          <p:cNvPr id="26" name="Text 24"/>
           <p:cNvSpPr/>
           <p:nvPr/>
         </p:nvSpPr>
@@ -12659,7 +13041,7 @@
       </p:sp>
       <p:sp>
         <p:nvSpPr>
-          <p:cNvPr id="24" name="Shape 22"/>
+          <p:cNvPr id="27" name="Shape 25"/>
           <p:cNvSpPr/>
           <p:nvPr/>
         </p:nvSpPr>
@@ -12686,7 +13068,7 @@
       </p:sp>
       <p:sp>
         <p:nvSpPr>
-          <p:cNvPr id="25" name="Text 23"/>
+          <p:cNvPr id="28" name="Text 26"/>
           <p:cNvSpPr/>
           <p:nvPr/>
         </p:nvSpPr>
@@ -12725,7 +13107,7 @@
       </p:sp>
       <p:sp>
         <p:nvSpPr>
-          <p:cNvPr id="26" name="Shape 24"/>
+          <p:cNvPr id="29" name="Shape 27"/>
           <p:cNvSpPr/>
           <p:nvPr/>
         </p:nvSpPr>
@@ -12752,7 +13134,7 @@
       </p:sp>
       <p:sp>
         <p:nvSpPr>
-          <p:cNvPr id="27" name="Text 25"/>
+          <p:cNvPr id="30" name="Text 28"/>
           <p:cNvSpPr/>
           <p:nvPr/>
         </p:nvSpPr>
@@ -12791,7 +13173,7 @@
       </p:sp>
       <p:sp>
         <p:nvSpPr>
-          <p:cNvPr id="28" name="Shape 26"/>
+          <p:cNvPr id="31" name="Shape 29"/>
           <p:cNvSpPr/>
           <p:nvPr/>
         </p:nvSpPr>
@@ -12818,7 +13200,7 @@
       </p:sp>
       <p:sp>
         <p:nvSpPr>
-          <p:cNvPr id="29" name="Text 27"/>
+          <p:cNvPr id="32" name="Text 30"/>
           <p:cNvSpPr/>
           <p:nvPr/>
         </p:nvSpPr>
@@ -13141,7 +13523,7 @@
                 <a:ea typeface="Calibri" pitchFamily="34" charset="-122"/>
                 <a:cs typeface="Calibri" pitchFamily="34" charset="-120"/>
               </a:rPr>
-              <a:t>Word Labs  •  wordlabs.app  •  Root: 'review' = look at again, examine</a:t>
+              <a:t>Word Labs  •  wordlabs.app  •  Root: 'review' = look at again carefully</a:t>
             </a:r>
             <a:endParaRPr lang="en-US" sz="800" dirty="0"/>
           </a:p>
@@ -13280,7 +13662,7 @@
                 <a:ea typeface="Trebuchet MS" pitchFamily="34" charset="-122"/>
                 <a:cs typeface="Trebuchet MS" pitchFamily="34" charset="-120"/>
               </a:rPr>
-              <a:t>reviewed</a:t>
+              <a:t>reviewing</a:t>
             </a:r>
             <a:endParaRPr lang="en-US" sz="2800" dirty="0"/>
           </a:p>
@@ -13360,7 +13742,7 @@
         </p:nvSpPr>
         <p:spPr>
           <a:xfrm>
-            <a:off x="2938272" y="2258568"/>
+            <a:off x="2221992" y="2258568"/>
             <a:ext cx="1828800" cy="292608"/>
           </a:xfrm>
           <a:prstGeom prst="rect">
@@ -13369,11 +13751,11 @@
             </a:avLst>
           </a:prstGeom>
           <a:solidFill>
-            <a:srgbClr val="CCFBF1"/>
+            <a:srgbClr val="DDD6FE"/>
           </a:solidFill>
           <a:ln w="19050">
             <a:solidFill>
-              <a:srgbClr val="0D9488"/>
+              <a:srgbClr val="7C3AED"/>
             </a:solidFill>
             <a:prstDash val="solid"/>
           </a:ln>
@@ -13394,7 +13776,7 @@
         </p:nvSpPr>
         <p:spPr>
           <a:xfrm>
-            <a:off x="2938272" y="2258568"/>
+            <a:off x="2221992" y="2258568"/>
             <a:ext cx="1828800" cy="292608"/>
           </a:xfrm>
           <a:prstGeom prst="rect">
@@ -13413,13 +13795,13 @@
             <a:r>
               <a:rPr lang="en-US" sz="1300" b="1" dirty="0">
                 <a:solidFill>
-                  <a:srgbClr val="0F766E"/>
+                  <a:srgbClr val="4C1D95"/>
                 </a:solidFill>
                 <a:latin typeface="Trebuchet MS" pitchFamily="34" charset="0"/>
                 <a:ea typeface="Trebuchet MS" pitchFamily="34" charset="-122"/>
                 <a:cs typeface="Trebuchet MS" pitchFamily="34" charset="-120"/>
               </a:rPr>
-              <a:t>review</a:t>
+              <a:t>re</a:t>
             </a:r>
             <a:endParaRPr lang="en-US" sz="1300" dirty="0"/>
           </a:p>
@@ -13433,7 +13815,7 @@
         </p:nvSpPr>
         <p:spPr>
           <a:xfrm>
-            <a:off x="2938272" y="2569464"/>
+            <a:off x="2221992" y="2569464"/>
             <a:ext cx="1828800" cy="201168"/>
           </a:xfrm>
           <a:prstGeom prst="rect">
@@ -13458,7 +13840,7 @@
                 <a:ea typeface="Calibri" pitchFamily="34" charset="-122"/>
                 <a:cs typeface="Calibri" pitchFamily="34" charset="-120"/>
               </a:rPr>
-              <a:t>look at again</a:t>
+              <a:t>again</a:t>
             </a:r>
             <a:endParaRPr lang="en-US" sz="850" dirty="0"/>
           </a:p>
@@ -13472,7 +13854,7 @@
         </p:nvSpPr>
         <p:spPr>
           <a:xfrm>
-            <a:off x="5803392" y="2258568"/>
+            <a:off x="4370832" y="2258568"/>
             <a:ext cx="1828800" cy="292608"/>
           </a:xfrm>
           <a:prstGeom prst="rect">
@@ -13506,7 +13888,7 @@
         </p:nvSpPr>
         <p:spPr>
           <a:xfrm>
-            <a:off x="5803392" y="2258568"/>
+            <a:off x="4370832" y="2258568"/>
             <a:ext cx="1828800" cy="292608"/>
           </a:xfrm>
           <a:prstGeom prst="rect">
@@ -13531,7 +13913,7 @@
                 <a:ea typeface="Trebuchet MS" pitchFamily="34" charset="-122"/>
                 <a:cs typeface="Trebuchet MS" pitchFamily="34" charset="-120"/>
               </a:rPr>
-              <a:t>ed</a:t>
+              <a:t>view</a:t>
             </a:r>
             <a:endParaRPr lang="en-US" sz="1300" dirty="0"/>
           </a:p>
@@ -13545,7 +13927,7 @@
         </p:nvSpPr>
         <p:spPr>
           <a:xfrm>
-            <a:off x="5803392" y="2569464"/>
+            <a:off x="4370832" y="2569464"/>
             <a:ext cx="1828800" cy="201168"/>
           </a:xfrm>
           <a:prstGeom prst="rect">
@@ -13570,7 +13952,7 @@
                 <a:ea typeface="Calibri" pitchFamily="34" charset="-122"/>
                 <a:cs typeface="Calibri" pitchFamily="34" charset="-120"/>
               </a:rPr>
-              <a:t>in the past</a:t>
+              <a:t>see or look</a:t>
             </a:r>
             <a:endParaRPr lang="en-US" sz="850" dirty="0"/>
           </a:p>
@@ -13579,6 +13961,118 @@
       <p:sp>
         <p:nvSpPr>
           <p:cNvPr id="22" name="Shape 20"/>
+          <p:cNvSpPr/>
+          <p:nvPr/>
+        </p:nvSpPr>
+        <p:spPr>
+          <a:xfrm>
+            <a:off x="6519672" y="2258568"/>
+            <a:ext cx="1828800" cy="292608"/>
+          </a:xfrm>
+          <a:prstGeom prst="rect">
+            <a:avLst>
+              <a:gd name="adj" fmla="val 25000"/>
+            </a:avLst>
+          </a:prstGeom>
+          <a:solidFill>
+            <a:srgbClr val="FCE7F3"/>
+          </a:solidFill>
+          <a:ln w="19050">
+            <a:solidFill>
+              <a:srgbClr val="DB2777"/>
+            </a:solidFill>
+            <a:prstDash val="solid"/>
+          </a:ln>
+          <a:effectLst>
+            <a:outerShdw sx="100000" sy="100000" kx="0" ky="0" algn="bl" rotWithShape="0" blurRad="101600" dist="38100" dir="8100000">
+              <a:srgbClr val="000000">
+                <a:alpha val="12000"/>
+              </a:srgbClr>
+            </a:outerShdw>
+          </a:effectLst>
+        </p:spPr>
+      </p:sp>
+      <p:sp>
+        <p:nvSpPr>
+          <p:cNvPr id="23" name="Text 21"/>
+          <p:cNvSpPr/>
+          <p:nvPr/>
+        </p:nvSpPr>
+        <p:spPr>
+          <a:xfrm>
+            <a:off x="6519672" y="2258568"/>
+            <a:ext cx="1828800" cy="292608"/>
+          </a:xfrm>
+          <a:prstGeom prst="rect">
+            <a:avLst/>
+          </a:prstGeom>
+          <a:noFill/>
+          <a:ln/>
+        </p:spPr>
+        <p:txBody>
+          <a:bodyPr wrap="square" lIns="0" tIns="0" rIns="0" bIns="0" rtlCol="0" anchor="ctr"/>
+          <a:lstStyle/>
+          <a:p>
+            <a:pPr algn="ctr" indent="0" marL="0">
+              <a:buNone/>
+            </a:pPr>
+            <a:r>
+              <a:rPr lang="en-US" sz="1300" b="1" dirty="0">
+                <a:solidFill>
+                  <a:srgbClr val="9D174D"/>
+                </a:solidFill>
+                <a:latin typeface="Trebuchet MS" pitchFamily="34" charset="0"/>
+                <a:ea typeface="Trebuchet MS" pitchFamily="34" charset="-122"/>
+                <a:cs typeface="Trebuchet MS" pitchFamily="34" charset="-120"/>
+              </a:rPr>
+              <a:t>ing</a:t>
+            </a:r>
+            <a:endParaRPr lang="en-US" sz="1300" dirty="0"/>
+          </a:p>
+        </p:txBody>
+      </p:sp>
+      <p:sp>
+        <p:nvSpPr>
+          <p:cNvPr id="24" name="Text 22"/>
+          <p:cNvSpPr/>
+          <p:nvPr/>
+        </p:nvSpPr>
+        <p:spPr>
+          <a:xfrm>
+            <a:off x="6519672" y="2569464"/>
+            <a:ext cx="1828800" cy="201168"/>
+          </a:xfrm>
+          <a:prstGeom prst="rect">
+            <a:avLst/>
+          </a:prstGeom>
+          <a:noFill/>
+          <a:ln/>
+        </p:spPr>
+        <p:txBody>
+          <a:bodyPr wrap="square" lIns="0" tIns="0" rIns="0" bIns="0" rtlCol="0" anchor="t"/>
+          <a:lstStyle/>
+          <a:p>
+            <a:pPr algn="ctr" indent="0" marL="0">
+              <a:buNone/>
+            </a:pPr>
+            <a:r>
+              <a:rPr lang="en-US" sz="850" dirty="0">
+                <a:solidFill>
+                  <a:srgbClr val="475569"/>
+                </a:solidFill>
+                <a:latin typeface="Calibri" pitchFamily="34" charset="0"/>
+                <a:ea typeface="Calibri" pitchFamily="34" charset="-122"/>
+                <a:cs typeface="Calibri" pitchFamily="34" charset="-120"/>
+              </a:rPr>
+              <a:t>ongoing action</a:t>
+            </a:r>
+            <a:endParaRPr lang="en-US" sz="850" dirty="0"/>
+          </a:p>
+        </p:txBody>
+      </p:sp>
+      <p:sp>
+        <p:nvSpPr>
+          <p:cNvPr id="25" name="Shape 23"/>
           <p:cNvSpPr/>
           <p:nvPr/>
         </p:nvSpPr>
@@ -13605,7 +14099,7 @@
       </p:sp>
       <p:sp>
         <p:nvSpPr>
-          <p:cNvPr id="23" name="Text 21"/>
+          <p:cNvPr id="26" name="Text 24"/>
           <p:cNvSpPr/>
           <p:nvPr/>
         </p:nvSpPr>
@@ -13644,7 +14138,7 @@
       </p:sp>
       <p:sp>
         <p:nvSpPr>
-          <p:cNvPr id="24" name="Shape 22"/>
+          <p:cNvPr id="27" name="Shape 25"/>
           <p:cNvSpPr/>
           <p:nvPr/>
         </p:nvSpPr>
@@ -13671,13 +14165,13 @@
       </p:sp>
       <p:sp>
         <p:nvSpPr>
-          <p:cNvPr id="25" name="Shape 23"/>
-          <p:cNvSpPr/>
-          <p:nvPr/>
-        </p:nvSpPr>
-        <p:spPr>
-          <a:xfrm>
-            <a:off x="2999232" y="3364992"/>
+          <p:cNvPr id="28" name="Shape 26"/>
+          <p:cNvSpPr/>
+          <p:nvPr/>
+        </p:nvSpPr>
+        <p:spPr>
+          <a:xfrm>
+            <a:off x="2313432" y="3364992"/>
             <a:ext cx="1645920" cy="475488"/>
           </a:xfrm>
           <a:prstGeom prst="rect">
@@ -13698,13 +14192,13 @@
       </p:sp>
       <p:sp>
         <p:nvSpPr>
-          <p:cNvPr id="26" name="Text 24"/>
-          <p:cNvSpPr/>
-          <p:nvPr/>
-        </p:nvSpPr>
-        <p:spPr>
-          <a:xfrm>
-            <a:off x="2999232" y="3364992"/>
+          <p:cNvPr id="29" name="Text 27"/>
+          <p:cNvSpPr/>
+          <p:nvPr/>
+        </p:nvSpPr>
+        <p:spPr>
+          <a:xfrm>
+            <a:off x="2313432" y="3364992"/>
             <a:ext cx="1645920" cy="475488"/>
           </a:xfrm>
           <a:prstGeom prst="rect">
@@ -13737,14 +14231,14 @@
       </p:sp>
       <p:sp>
         <p:nvSpPr>
-          <p:cNvPr id="27" name="Text 25"/>
-          <p:cNvSpPr/>
-          <p:nvPr/>
-        </p:nvSpPr>
-        <p:spPr>
-          <a:xfrm>
-            <a:off x="4645152" y="3364992"/>
-            <a:ext cx="1097280" cy="475488"/>
+          <p:cNvPr id="30" name="Text 28"/>
+          <p:cNvSpPr/>
+          <p:nvPr/>
+        </p:nvSpPr>
+        <p:spPr>
+          <a:xfrm>
+            <a:off x="3959352" y="3364992"/>
+            <a:ext cx="411480" cy="475488"/>
           </a:xfrm>
           <a:prstGeom prst="rect">
             <a:avLst/>
@@ -13776,13 +14270,13 @@
       </p:sp>
       <p:sp>
         <p:nvSpPr>
-          <p:cNvPr id="28" name="Shape 26"/>
-          <p:cNvSpPr/>
-          <p:nvPr/>
-        </p:nvSpPr>
-        <p:spPr>
-          <a:xfrm>
-            <a:off x="5742432" y="3364992"/>
+          <p:cNvPr id="31" name="Shape 29"/>
+          <p:cNvSpPr/>
+          <p:nvPr/>
+        </p:nvSpPr>
+        <p:spPr>
+          <a:xfrm>
+            <a:off x="4370832" y="3364992"/>
             <a:ext cx="1645920" cy="475488"/>
           </a:xfrm>
           <a:prstGeom prst="rect">
@@ -13803,13 +14297,13 @@
       </p:sp>
       <p:sp>
         <p:nvSpPr>
-          <p:cNvPr id="29" name="Text 27"/>
-          <p:cNvSpPr/>
-          <p:nvPr/>
-        </p:nvSpPr>
-        <p:spPr>
-          <a:xfrm>
-            <a:off x="5742432" y="3364992"/>
+          <p:cNvPr id="32" name="Text 30"/>
+          <p:cNvSpPr/>
+          <p:nvPr/>
+        </p:nvSpPr>
+        <p:spPr>
+          <a:xfrm>
+            <a:off x="4370832" y="3364992"/>
             <a:ext cx="1645920" cy="475488"/>
           </a:xfrm>
           <a:prstGeom prst="rect">
@@ -13834,7 +14328,7 @@
                 <a:ea typeface="Trebuchet MS" pitchFamily="34" charset="-122"/>
                 <a:cs typeface="Trebuchet MS" pitchFamily="34" charset="-120"/>
               </a:rPr>
-              <a:t>viewed</a:t>
+              <a:t>view</a:t>
             </a:r>
             <a:endParaRPr lang="en-US" sz="1400" dirty="0"/>
           </a:p>
@@ -13842,7 +14336,112 @@
       </p:sp>
       <p:sp>
         <p:nvSpPr>
-          <p:cNvPr id="30" name="Shape 28"/>
+          <p:cNvPr id="33" name="Text 31"/>
+          <p:cNvSpPr/>
+          <p:nvPr/>
+        </p:nvSpPr>
+        <p:spPr>
+          <a:xfrm>
+            <a:off x="6016752" y="3364992"/>
+            <a:ext cx="411480" cy="475488"/>
+          </a:xfrm>
+          <a:prstGeom prst="rect">
+            <a:avLst/>
+          </a:prstGeom>
+          <a:noFill/>
+          <a:ln/>
+        </p:spPr>
+        <p:txBody>
+          <a:bodyPr wrap="square" lIns="0" tIns="0" rIns="0" bIns="0" rtlCol="0" anchor="ctr"/>
+          <a:lstStyle/>
+          <a:p>
+            <a:pPr algn="ctr" indent="0" marL="0">
+              <a:buNone/>
+            </a:pPr>
+            <a:r>
+              <a:rPr lang="en-US" sz="1600" b="1" dirty="0">
+                <a:solidFill>
+                  <a:srgbClr val="0D9488"/>
+                </a:solidFill>
+                <a:latin typeface="Trebuchet MS" pitchFamily="34" charset="0"/>
+                <a:ea typeface="Trebuchet MS" pitchFamily="34" charset="-122"/>
+                <a:cs typeface="Trebuchet MS" pitchFamily="34" charset="-120"/>
+              </a:rPr>
+              <a:t>·</a:t>
+            </a:r>
+            <a:endParaRPr lang="en-US" sz="1600" dirty="0"/>
+          </a:p>
+        </p:txBody>
+      </p:sp>
+      <p:sp>
+        <p:nvSpPr>
+          <p:cNvPr id="34" name="Shape 32"/>
+          <p:cNvSpPr/>
+          <p:nvPr/>
+        </p:nvSpPr>
+        <p:spPr>
+          <a:xfrm>
+            <a:off x="6428232" y="3364992"/>
+            <a:ext cx="1645920" cy="475488"/>
+          </a:xfrm>
+          <a:prstGeom prst="rect">
+            <a:avLst>
+              <a:gd name="adj" fmla="val 9615"/>
+            </a:avLst>
+          </a:prstGeom>
+          <a:solidFill>
+            <a:srgbClr val="FFFFFF"/>
+          </a:solidFill>
+          <a:ln w="12700">
+            <a:solidFill>
+              <a:srgbClr val="0D9488"/>
+            </a:solidFill>
+            <a:prstDash val="solid"/>
+          </a:ln>
+        </p:spPr>
+      </p:sp>
+      <p:sp>
+        <p:nvSpPr>
+          <p:cNvPr id="35" name="Text 33"/>
+          <p:cNvSpPr/>
+          <p:nvPr/>
+        </p:nvSpPr>
+        <p:spPr>
+          <a:xfrm>
+            <a:off x="6428232" y="3364992"/>
+            <a:ext cx="1645920" cy="475488"/>
+          </a:xfrm>
+          <a:prstGeom prst="rect">
+            <a:avLst/>
+          </a:prstGeom>
+          <a:noFill/>
+          <a:ln/>
+        </p:spPr>
+        <p:txBody>
+          <a:bodyPr wrap="square" lIns="0" tIns="0" rIns="0" bIns="0" rtlCol="0" anchor="ctr"/>
+          <a:lstStyle/>
+          <a:p>
+            <a:pPr algn="ctr" indent="0" marL="0">
+              <a:buNone/>
+            </a:pPr>
+            <a:r>
+              <a:rPr lang="en-US" sz="1400" b="1" dirty="0">
+                <a:solidFill>
+                  <a:srgbClr val="0D9488"/>
+                </a:solidFill>
+                <a:latin typeface="Trebuchet MS" pitchFamily="34" charset="0"/>
+                <a:ea typeface="Trebuchet MS" pitchFamily="34" charset="-122"/>
+                <a:cs typeface="Trebuchet MS" pitchFamily="34" charset="-120"/>
+              </a:rPr>
+              <a:t>ing</a:t>
+            </a:r>
+            <a:endParaRPr lang="en-US" sz="1400" dirty="0"/>
+          </a:p>
+        </p:txBody>
+      </p:sp>
+      <p:sp>
+        <p:nvSpPr>
+          <p:cNvPr id="36" name="Shape 34"/>
           <p:cNvSpPr/>
           <p:nvPr/>
         </p:nvSpPr>
@@ -13869,7 +14468,7 @@
       </p:sp>
       <p:sp>
         <p:nvSpPr>
-          <p:cNvPr id="31" name="Text 29"/>
+          <p:cNvPr id="37" name="Text 35"/>
           <p:cNvSpPr/>
           <p:nvPr/>
         </p:nvSpPr>
@@ -13908,7 +14507,7 @@
       </p:sp>
       <p:sp>
         <p:nvSpPr>
-          <p:cNvPr id="32" name="Shape 30"/>
+          <p:cNvPr id="38" name="Shape 36"/>
           <p:cNvSpPr/>
           <p:nvPr/>
         </p:nvSpPr>
@@ -13935,7 +14534,7 @@
       </p:sp>
       <p:sp>
         <p:nvSpPr>
-          <p:cNvPr id="33" name="Text 31"/>
+          <p:cNvPr id="39" name="Text 37"/>
           <p:cNvSpPr/>
           <p:nvPr/>
         </p:nvSpPr>
@@ -14167,7 +14766,7 @@
                 <a:ea typeface="Calibri" pitchFamily="34" charset="-122"/>
                 <a:cs typeface="Calibri" pitchFamily="34" charset="-120"/>
               </a:rPr>
-              <a:t>Root 'review' — look at again, examine</a:t>
+              <a:t>Root 'review' — look at again carefully</a:t>
             </a:r>
             <a:endParaRPr lang="en-US" sz="1600" dirty="0"/>
           </a:p>
@@ -14523,7 +15122,7 @@
                 <a:ea typeface="Calibri" pitchFamily="34" charset="-122"/>
                 <a:cs typeface="Calibri" pitchFamily="34" charset="-120"/>
               </a:rPr>
-              <a:t>Word Labs  •  wordlabs.app  •  Root: 'review' = look at again, examine</a:t>
+              <a:t>Word Labs  •  wordlabs.app  •  Root: 'review' = look at again carefully</a:t>
             </a:r>
             <a:endParaRPr lang="en-US" sz="800" dirty="0"/>
           </a:p>
@@ -14662,7 +15261,7 @@
                 <a:ea typeface="Trebuchet MS" pitchFamily="34" charset="-122"/>
                 <a:cs typeface="Trebuchet MS" pitchFamily="34" charset="-120"/>
               </a:rPr>
-              <a:t>reviewed</a:t>
+              <a:t>reviewing</a:t>
             </a:r>
             <a:endParaRPr lang="en-US" sz="2800" dirty="0"/>
           </a:p>
@@ -14742,7 +15341,7 @@
         </p:nvSpPr>
         <p:spPr>
           <a:xfrm>
-            <a:off x="2938272" y="2258568"/>
+            <a:off x="2221992" y="2258568"/>
             <a:ext cx="1828800" cy="292608"/>
           </a:xfrm>
           <a:prstGeom prst="rect">
@@ -14751,11 +15350,11 @@
             </a:avLst>
           </a:prstGeom>
           <a:solidFill>
-            <a:srgbClr val="CCFBF1"/>
+            <a:srgbClr val="DDD6FE"/>
           </a:solidFill>
           <a:ln w="19050">
             <a:solidFill>
-              <a:srgbClr val="0D9488"/>
+              <a:srgbClr val="7C3AED"/>
             </a:solidFill>
             <a:prstDash val="solid"/>
           </a:ln>
@@ -14776,7 +15375,7 @@
         </p:nvSpPr>
         <p:spPr>
           <a:xfrm>
-            <a:off x="2938272" y="2258568"/>
+            <a:off x="2221992" y="2258568"/>
             <a:ext cx="1828800" cy="292608"/>
           </a:xfrm>
           <a:prstGeom prst="rect">
@@ -14795,13 +15394,13 @@
             <a:r>
               <a:rPr lang="en-US" sz="1300" b="1" dirty="0">
                 <a:solidFill>
-                  <a:srgbClr val="0F766E"/>
+                  <a:srgbClr val="4C1D95"/>
                 </a:solidFill>
                 <a:latin typeface="Trebuchet MS" pitchFamily="34" charset="0"/>
                 <a:ea typeface="Trebuchet MS" pitchFamily="34" charset="-122"/>
                 <a:cs typeface="Trebuchet MS" pitchFamily="34" charset="-120"/>
               </a:rPr>
-              <a:t>review</a:t>
+              <a:t>re</a:t>
             </a:r>
             <a:endParaRPr lang="en-US" sz="1300" dirty="0"/>
           </a:p>
@@ -14815,7 +15414,7 @@
         </p:nvSpPr>
         <p:spPr>
           <a:xfrm>
-            <a:off x="2938272" y="2569464"/>
+            <a:off x="2221992" y="2569464"/>
             <a:ext cx="1828800" cy="201168"/>
           </a:xfrm>
           <a:prstGeom prst="rect">
@@ -14840,7 +15439,7 @@
                 <a:ea typeface="Calibri" pitchFamily="34" charset="-122"/>
                 <a:cs typeface="Calibri" pitchFamily="34" charset="-120"/>
               </a:rPr>
-              <a:t>look at again</a:t>
+              <a:t>again</a:t>
             </a:r>
             <a:endParaRPr lang="en-US" sz="850" dirty="0"/>
           </a:p>
@@ -14854,7 +15453,7 @@
         </p:nvSpPr>
         <p:spPr>
           <a:xfrm>
-            <a:off x="5803392" y="2258568"/>
+            <a:off x="4370832" y="2258568"/>
             <a:ext cx="1828800" cy="292608"/>
           </a:xfrm>
           <a:prstGeom prst="rect">
@@ -14888,7 +15487,7 @@
         </p:nvSpPr>
         <p:spPr>
           <a:xfrm>
-            <a:off x="5803392" y="2258568"/>
+            <a:off x="4370832" y="2258568"/>
             <a:ext cx="1828800" cy="292608"/>
           </a:xfrm>
           <a:prstGeom prst="rect">
@@ -14913,7 +15512,7 @@
                 <a:ea typeface="Trebuchet MS" pitchFamily="34" charset="-122"/>
                 <a:cs typeface="Trebuchet MS" pitchFamily="34" charset="-120"/>
               </a:rPr>
-              <a:t>ed</a:t>
+              <a:t>view</a:t>
             </a:r>
             <a:endParaRPr lang="en-US" sz="1300" dirty="0"/>
           </a:p>
@@ -14927,7 +15526,7 @@
         </p:nvSpPr>
         <p:spPr>
           <a:xfrm>
-            <a:off x="5803392" y="2569464"/>
+            <a:off x="4370832" y="2569464"/>
             <a:ext cx="1828800" cy="201168"/>
           </a:xfrm>
           <a:prstGeom prst="rect">
@@ -14952,7 +15551,7 @@
                 <a:ea typeface="Calibri" pitchFamily="34" charset="-122"/>
                 <a:cs typeface="Calibri" pitchFamily="34" charset="-120"/>
               </a:rPr>
-              <a:t>in the past</a:t>
+              <a:t>see or look</a:t>
             </a:r>
             <a:endParaRPr lang="en-US" sz="850" dirty="0"/>
           </a:p>
@@ -14961,6 +15560,118 @@
       <p:sp>
         <p:nvSpPr>
           <p:cNvPr id="22" name="Shape 20"/>
+          <p:cNvSpPr/>
+          <p:nvPr/>
+        </p:nvSpPr>
+        <p:spPr>
+          <a:xfrm>
+            <a:off x="6519672" y="2258568"/>
+            <a:ext cx="1828800" cy="292608"/>
+          </a:xfrm>
+          <a:prstGeom prst="rect">
+            <a:avLst>
+              <a:gd name="adj" fmla="val 25000"/>
+            </a:avLst>
+          </a:prstGeom>
+          <a:solidFill>
+            <a:srgbClr val="FCE7F3"/>
+          </a:solidFill>
+          <a:ln w="19050">
+            <a:solidFill>
+              <a:srgbClr val="DB2777"/>
+            </a:solidFill>
+            <a:prstDash val="solid"/>
+          </a:ln>
+          <a:effectLst>
+            <a:outerShdw sx="100000" sy="100000" kx="0" ky="0" algn="bl" rotWithShape="0" blurRad="101600" dist="38100" dir="8100000">
+              <a:srgbClr val="000000">
+                <a:alpha val="12000"/>
+              </a:srgbClr>
+            </a:outerShdw>
+          </a:effectLst>
+        </p:spPr>
+      </p:sp>
+      <p:sp>
+        <p:nvSpPr>
+          <p:cNvPr id="23" name="Text 21"/>
+          <p:cNvSpPr/>
+          <p:nvPr/>
+        </p:nvSpPr>
+        <p:spPr>
+          <a:xfrm>
+            <a:off x="6519672" y="2258568"/>
+            <a:ext cx="1828800" cy="292608"/>
+          </a:xfrm>
+          <a:prstGeom prst="rect">
+            <a:avLst/>
+          </a:prstGeom>
+          <a:noFill/>
+          <a:ln/>
+        </p:spPr>
+        <p:txBody>
+          <a:bodyPr wrap="square" lIns="0" tIns="0" rIns="0" bIns="0" rtlCol="0" anchor="ctr"/>
+          <a:lstStyle/>
+          <a:p>
+            <a:pPr algn="ctr" indent="0" marL="0">
+              <a:buNone/>
+            </a:pPr>
+            <a:r>
+              <a:rPr lang="en-US" sz="1300" b="1" dirty="0">
+                <a:solidFill>
+                  <a:srgbClr val="9D174D"/>
+                </a:solidFill>
+                <a:latin typeface="Trebuchet MS" pitchFamily="34" charset="0"/>
+                <a:ea typeface="Trebuchet MS" pitchFamily="34" charset="-122"/>
+                <a:cs typeface="Trebuchet MS" pitchFamily="34" charset="-120"/>
+              </a:rPr>
+              <a:t>ing</a:t>
+            </a:r>
+            <a:endParaRPr lang="en-US" sz="1300" dirty="0"/>
+          </a:p>
+        </p:txBody>
+      </p:sp>
+      <p:sp>
+        <p:nvSpPr>
+          <p:cNvPr id="24" name="Text 22"/>
+          <p:cNvSpPr/>
+          <p:nvPr/>
+        </p:nvSpPr>
+        <p:spPr>
+          <a:xfrm>
+            <a:off x="6519672" y="2569464"/>
+            <a:ext cx="1828800" cy="201168"/>
+          </a:xfrm>
+          <a:prstGeom prst="rect">
+            <a:avLst/>
+          </a:prstGeom>
+          <a:noFill/>
+          <a:ln/>
+        </p:spPr>
+        <p:txBody>
+          <a:bodyPr wrap="square" lIns="0" tIns="0" rIns="0" bIns="0" rtlCol="0" anchor="t"/>
+          <a:lstStyle/>
+          <a:p>
+            <a:pPr algn="ctr" indent="0" marL="0">
+              <a:buNone/>
+            </a:pPr>
+            <a:r>
+              <a:rPr lang="en-US" sz="850" dirty="0">
+                <a:solidFill>
+                  <a:srgbClr val="475569"/>
+                </a:solidFill>
+                <a:latin typeface="Calibri" pitchFamily="34" charset="0"/>
+                <a:ea typeface="Calibri" pitchFamily="34" charset="-122"/>
+                <a:cs typeface="Calibri" pitchFamily="34" charset="-120"/>
+              </a:rPr>
+              <a:t>ongoing action</a:t>
+            </a:r>
+            <a:endParaRPr lang="en-US" sz="850" dirty="0"/>
+          </a:p>
+        </p:txBody>
+      </p:sp>
+      <p:sp>
+        <p:nvSpPr>
+          <p:cNvPr id="25" name="Shape 23"/>
           <p:cNvSpPr/>
           <p:nvPr/>
         </p:nvSpPr>
@@ -14987,7 +15698,7 @@
       </p:sp>
       <p:sp>
         <p:nvSpPr>
-          <p:cNvPr id="23" name="Text 21"/>
+          <p:cNvPr id="26" name="Text 24"/>
           <p:cNvSpPr/>
           <p:nvPr/>
         </p:nvSpPr>
@@ -15026,7 +15737,7 @@
       </p:sp>
       <p:sp>
         <p:nvSpPr>
-          <p:cNvPr id="24" name="Shape 22"/>
+          <p:cNvPr id="27" name="Shape 25"/>
           <p:cNvSpPr/>
           <p:nvPr/>
         </p:nvSpPr>
@@ -15053,13 +15764,13 @@
       </p:sp>
       <p:sp>
         <p:nvSpPr>
-          <p:cNvPr id="25" name="Shape 23"/>
-          <p:cNvSpPr/>
-          <p:nvPr/>
-        </p:nvSpPr>
-        <p:spPr>
-          <a:xfrm>
-            <a:off x="2999232" y="3364992"/>
+          <p:cNvPr id="28" name="Shape 26"/>
+          <p:cNvSpPr/>
+          <p:nvPr/>
+        </p:nvSpPr>
+        <p:spPr>
+          <a:xfrm>
+            <a:off x="2313432" y="3364992"/>
             <a:ext cx="1645920" cy="475488"/>
           </a:xfrm>
           <a:prstGeom prst="rect">
@@ -15080,13 +15791,13 @@
       </p:sp>
       <p:sp>
         <p:nvSpPr>
-          <p:cNvPr id="26" name="Text 24"/>
-          <p:cNvSpPr/>
-          <p:nvPr/>
-        </p:nvSpPr>
-        <p:spPr>
-          <a:xfrm>
-            <a:off x="2999232" y="3364992"/>
+          <p:cNvPr id="29" name="Text 27"/>
+          <p:cNvSpPr/>
+          <p:nvPr/>
+        </p:nvSpPr>
+        <p:spPr>
+          <a:xfrm>
+            <a:off x="2313432" y="3364992"/>
             <a:ext cx="1645920" cy="475488"/>
           </a:xfrm>
           <a:prstGeom prst="rect">
@@ -15119,14 +15830,14 @@
       </p:sp>
       <p:sp>
         <p:nvSpPr>
-          <p:cNvPr id="27" name="Text 25"/>
-          <p:cNvSpPr/>
-          <p:nvPr/>
-        </p:nvSpPr>
-        <p:spPr>
-          <a:xfrm>
-            <a:off x="4645152" y="3364992"/>
-            <a:ext cx="1097280" cy="475488"/>
+          <p:cNvPr id="30" name="Text 28"/>
+          <p:cNvSpPr/>
+          <p:nvPr/>
+        </p:nvSpPr>
+        <p:spPr>
+          <a:xfrm>
+            <a:off x="3959352" y="3364992"/>
+            <a:ext cx="411480" cy="475488"/>
           </a:xfrm>
           <a:prstGeom prst="rect">
             <a:avLst/>
@@ -15158,13 +15869,13 @@
       </p:sp>
       <p:sp>
         <p:nvSpPr>
-          <p:cNvPr id="28" name="Shape 26"/>
-          <p:cNvSpPr/>
-          <p:nvPr/>
-        </p:nvSpPr>
-        <p:spPr>
-          <a:xfrm>
-            <a:off x="5742432" y="3364992"/>
+          <p:cNvPr id="31" name="Shape 29"/>
+          <p:cNvSpPr/>
+          <p:nvPr/>
+        </p:nvSpPr>
+        <p:spPr>
+          <a:xfrm>
+            <a:off x="4370832" y="3364992"/>
             <a:ext cx="1645920" cy="475488"/>
           </a:xfrm>
           <a:prstGeom prst="rect">
@@ -15185,13 +15896,13 @@
       </p:sp>
       <p:sp>
         <p:nvSpPr>
-          <p:cNvPr id="29" name="Text 27"/>
-          <p:cNvSpPr/>
-          <p:nvPr/>
-        </p:nvSpPr>
-        <p:spPr>
-          <a:xfrm>
-            <a:off x="5742432" y="3364992"/>
+          <p:cNvPr id="32" name="Text 30"/>
+          <p:cNvSpPr/>
+          <p:nvPr/>
+        </p:nvSpPr>
+        <p:spPr>
+          <a:xfrm>
+            <a:off x="4370832" y="3364992"/>
             <a:ext cx="1645920" cy="475488"/>
           </a:xfrm>
           <a:prstGeom prst="rect">
@@ -15216,7 +15927,7 @@
                 <a:ea typeface="Trebuchet MS" pitchFamily="34" charset="-122"/>
                 <a:cs typeface="Trebuchet MS" pitchFamily="34" charset="-120"/>
               </a:rPr>
-              <a:t>viewed</a:t>
+              <a:t>view</a:t>
             </a:r>
             <a:endParaRPr lang="en-US" sz="1400" dirty="0"/>
           </a:p>
@@ -15224,7 +15935,112 @@
       </p:sp>
       <p:sp>
         <p:nvSpPr>
-          <p:cNvPr id="30" name="Shape 28"/>
+          <p:cNvPr id="33" name="Text 31"/>
+          <p:cNvSpPr/>
+          <p:nvPr/>
+        </p:nvSpPr>
+        <p:spPr>
+          <a:xfrm>
+            <a:off x="6016752" y="3364992"/>
+            <a:ext cx="411480" cy="475488"/>
+          </a:xfrm>
+          <a:prstGeom prst="rect">
+            <a:avLst/>
+          </a:prstGeom>
+          <a:noFill/>
+          <a:ln/>
+        </p:spPr>
+        <p:txBody>
+          <a:bodyPr wrap="square" lIns="0" tIns="0" rIns="0" bIns="0" rtlCol="0" anchor="ctr"/>
+          <a:lstStyle/>
+          <a:p>
+            <a:pPr algn="ctr" indent="0" marL="0">
+              <a:buNone/>
+            </a:pPr>
+            <a:r>
+              <a:rPr lang="en-US" sz="1600" b="1" dirty="0">
+                <a:solidFill>
+                  <a:srgbClr val="0D9488"/>
+                </a:solidFill>
+                <a:latin typeface="Trebuchet MS" pitchFamily="34" charset="0"/>
+                <a:ea typeface="Trebuchet MS" pitchFamily="34" charset="-122"/>
+                <a:cs typeface="Trebuchet MS" pitchFamily="34" charset="-120"/>
+              </a:rPr>
+              <a:t>·</a:t>
+            </a:r>
+            <a:endParaRPr lang="en-US" sz="1600" dirty="0"/>
+          </a:p>
+        </p:txBody>
+      </p:sp>
+      <p:sp>
+        <p:nvSpPr>
+          <p:cNvPr id="34" name="Shape 32"/>
+          <p:cNvSpPr/>
+          <p:nvPr/>
+        </p:nvSpPr>
+        <p:spPr>
+          <a:xfrm>
+            <a:off x="6428232" y="3364992"/>
+            <a:ext cx="1645920" cy="475488"/>
+          </a:xfrm>
+          <a:prstGeom prst="rect">
+            <a:avLst>
+              <a:gd name="adj" fmla="val 9615"/>
+            </a:avLst>
+          </a:prstGeom>
+          <a:solidFill>
+            <a:srgbClr val="FFFFFF"/>
+          </a:solidFill>
+          <a:ln w="12700">
+            <a:solidFill>
+              <a:srgbClr val="0D9488"/>
+            </a:solidFill>
+            <a:prstDash val="solid"/>
+          </a:ln>
+        </p:spPr>
+      </p:sp>
+      <p:sp>
+        <p:nvSpPr>
+          <p:cNvPr id="35" name="Text 33"/>
+          <p:cNvSpPr/>
+          <p:nvPr/>
+        </p:nvSpPr>
+        <p:spPr>
+          <a:xfrm>
+            <a:off x="6428232" y="3364992"/>
+            <a:ext cx="1645920" cy="475488"/>
+          </a:xfrm>
+          <a:prstGeom prst="rect">
+            <a:avLst/>
+          </a:prstGeom>
+          <a:noFill/>
+          <a:ln/>
+        </p:spPr>
+        <p:txBody>
+          <a:bodyPr wrap="square" lIns="0" tIns="0" rIns="0" bIns="0" rtlCol="0" anchor="ctr"/>
+          <a:lstStyle/>
+          <a:p>
+            <a:pPr algn="ctr" indent="0" marL="0">
+              <a:buNone/>
+            </a:pPr>
+            <a:r>
+              <a:rPr lang="en-US" sz="1400" b="1" dirty="0">
+                <a:solidFill>
+                  <a:srgbClr val="0D9488"/>
+                </a:solidFill>
+                <a:latin typeface="Trebuchet MS" pitchFamily="34" charset="0"/>
+                <a:ea typeface="Trebuchet MS" pitchFamily="34" charset="-122"/>
+                <a:cs typeface="Trebuchet MS" pitchFamily="34" charset="-120"/>
+              </a:rPr>
+              <a:t>ing</a:t>
+            </a:r>
+            <a:endParaRPr lang="en-US" sz="1400" dirty="0"/>
+          </a:p>
+        </p:txBody>
+      </p:sp>
+      <p:sp>
+        <p:nvSpPr>
+          <p:cNvPr id="36" name="Shape 34"/>
           <p:cNvSpPr/>
           <p:nvPr/>
         </p:nvSpPr>
@@ -15251,7 +16067,7 @@
       </p:sp>
       <p:sp>
         <p:nvSpPr>
-          <p:cNvPr id="31" name="Text 29"/>
+          <p:cNvPr id="37" name="Text 35"/>
           <p:cNvSpPr/>
           <p:nvPr/>
         </p:nvSpPr>
@@ -15290,7 +16106,7 @@
       </p:sp>
       <p:sp>
         <p:nvSpPr>
-          <p:cNvPr id="32" name="Shape 30"/>
+          <p:cNvPr id="38" name="Shape 36"/>
           <p:cNvSpPr/>
           <p:nvPr/>
         </p:nvSpPr>
@@ -15317,7 +16133,7 @@
       </p:sp>
       <p:sp>
         <p:nvSpPr>
-          <p:cNvPr id="33" name="Shape 31"/>
+          <p:cNvPr id="39" name="Shape 37"/>
           <p:cNvSpPr/>
           <p:nvPr/>
         </p:nvSpPr>
@@ -15344,7 +16160,7 @@
       </p:sp>
       <p:sp>
         <p:nvSpPr>
-          <p:cNvPr id="34" name="Text 32"/>
+          <p:cNvPr id="40" name="Text 38"/>
           <p:cNvSpPr/>
           <p:nvPr/>
         </p:nvSpPr>
@@ -15383,7 +16199,7 @@
       </p:sp>
       <p:sp>
         <p:nvSpPr>
-          <p:cNvPr id="35" name="Shape 33"/>
+          <p:cNvPr id="41" name="Shape 39"/>
           <p:cNvSpPr/>
           <p:nvPr/>
         </p:nvSpPr>
@@ -15410,7 +16226,7 @@
       </p:sp>
       <p:sp>
         <p:nvSpPr>
-          <p:cNvPr id="36" name="Text 34"/>
+          <p:cNvPr id="42" name="Text 40"/>
           <p:cNvSpPr/>
           <p:nvPr/>
         </p:nvSpPr>
@@ -15449,7 +16265,7 @@
       </p:sp>
       <p:sp>
         <p:nvSpPr>
-          <p:cNvPr id="37" name="Shape 35"/>
+          <p:cNvPr id="43" name="Shape 41"/>
           <p:cNvSpPr/>
           <p:nvPr/>
         </p:nvSpPr>
@@ -15476,7 +16292,7 @@
       </p:sp>
       <p:sp>
         <p:nvSpPr>
-          <p:cNvPr id="38" name="Text 36"/>
+          <p:cNvPr id="44" name="Text 42"/>
           <p:cNvSpPr/>
           <p:nvPr/>
         </p:nvSpPr>
@@ -15515,7 +16331,7 @@
       </p:sp>
       <p:sp>
         <p:nvSpPr>
-          <p:cNvPr id="39" name="Shape 37"/>
+          <p:cNvPr id="45" name="Shape 43"/>
           <p:cNvSpPr/>
           <p:nvPr/>
         </p:nvSpPr>
@@ -15542,7 +16358,7 @@
       </p:sp>
       <p:sp>
         <p:nvSpPr>
-          <p:cNvPr id="40" name="Text 38"/>
+          <p:cNvPr id="46" name="Text 44"/>
           <p:cNvSpPr/>
           <p:nvPr/>
         </p:nvSpPr>
@@ -15573,7 +16389,7 @@
                 <a:ea typeface="Trebuchet MS" pitchFamily="34" charset="-122"/>
                 <a:cs typeface="Trebuchet MS" pitchFamily="34" charset="-120"/>
               </a:rPr>
-              <a:t>ie</a:t>
+              <a:t>iew</a:t>
             </a:r>
             <a:endParaRPr lang="en-US" sz="900" dirty="0"/>
           </a:p>
@@ -15581,7 +16397,7 @@
       </p:sp>
       <p:sp>
         <p:nvSpPr>
-          <p:cNvPr id="41" name="Shape 39"/>
+          <p:cNvPr id="47" name="Shape 45"/>
           <p:cNvSpPr/>
           <p:nvPr/>
         </p:nvSpPr>
@@ -15608,7 +16424,7 @@
       </p:sp>
       <p:sp>
         <p:nvSpPr>
-          <p:cNvPr id="42" name="Text 40"/>
+          <p:cNvPr id="48" name="Text 46"/>
           <p:cNvSpPr/>
           <p:nvPr/>
         </p:nvSpPr>
@@ -15639,7 +16455,7 @@
                 <a:ea typeface="Trebuchet MS" pitchFamily="34" charset="-122"/>
                 <a:cs typeface="Trebuchet MS" pitchFamily="34" charset="-120"/>
               </a:rPr>
-              <a:t>w</a:t>
+              <a:t>i</a:t>
             </a:r>
             <a:endParaRPr lang="en-US" sz="900" dirty="0"/>
           </a:p>
@@ -15647,7 +16463,7 @@
       </p:sp>
       <p:sp>
         <p:nvSpPr>
-          <p:cNvPr id="43" name="Shape 41"/>
+          <p:cNvPr id="49" name="Shape 47"/>
           <p:cNvSpPr/>
           <p:nvPr/>
         </p:nvSpPr>
@@ -15674,7 +16490,7 @@
       </p:sp>
       <p:sp>
         <p:nvSpPr>
-          <p:cNvPr id="44" name="Text 42"/>
+          <p:cNvPr id="50" name="Text 48"/>
           <p:cNvSpPr/>
           <p:nvPr/>
         </p:nvSpPr>
@@ -15705,7 +16521,7 @@
                 <a:ea typeface="Trebuchet MS" pitchFamily="34" charset="-122"/>
                 <a:cs typeface="Trebuchet MS" pitchFamily="34" charset="-120"/>
               </a:rPr>
-              <a:t>ed</a:t>
+              <a:t>ng</a:t>
             </a:r>
             <a:endParaRPr lang="en-US" sz="900" dirty="0"/>
           </a:p>
@@ -16279,7 +17095,7 @@
                 <a:ea typeface="Calibri" pitchFamily="34" charset="-122"/>
                 <a:cs typeface="Calibri" pitchFamily="34" charset="-120"/>
               </a:rPr>
-              <a:t>Word Labs  •  wordlabs.app  •  Root: 'review' = look at again, examine</a:t>
+              <a:t>Word Labs  •  wordlabs.app  •  Root: 'review' = look at again carefully</a:t>
             </a:r>
             <a:endParaRPr lang="en-US" sz="800" dirty="0"/>
           </a:p>
@@ -16919,7 +17735,7 @@
                 <a:ea typeface="Calibri" pitchFamily="34" charset="-122"/>
                 <a:cs typeface="Calibri" pitchFamily="34" charset="-120"/>
               </a:rPr>
-              <a:t>Word Labs  •  wordlabs.app  •  Root: 'review' = look at again, examine</a:t>
+              <a:t>Word Labs  •  wordlabs.app  •  Root: 'review' = look at again carefully</a:t>
             </a:r>
             <a:endParaRPr lang="en-US" sz="800" dirty="0"/>
           </a:p>
@@ -17048,7 +17864,7 @@
                 <a:ea typeface="Calibri" pitchFamily="34" charset="-122"/>
                 <a:cs typeface="Calibri" pitchFamily="34" charset="-120"/>
               </a:rPr>
-              <a:t>reviewer</a:t>
+              <a:t>reviewed</a:t>
             </a:r>
             <a:pPr algn="l" indent="0" marL="0">
               <a:buNone/>
@@ -17062,7 +17878,7 @@
                 <a:ea typeface="Calibri" pitchFamily="34" charset="-122"/>
                 <a:cs typeface="Calibri" pitchFamily="34" charset="-120"/>
               </a:rPr>
-              <a:t> finished </a:t>
+              <a:t> draft was </a:t>
             </a:r>
             <a:pPr algn="l" indent="0" marL="0">
               <a:buNone/>
@@ -17079,7 +17895,7 @@
                 <a:ea typeface="Calibri" pitchFamily="34" charset="-122"/>
                 <a:cs typeface="Calibri" pitchFamily="34" charset="-120"/>
               </a:rPr>
-              <a:t>reviewing</a:t>
+              <a:t>reviewable</a:t>
             </a:r>
             <a:pPr algn="l" indent="0" marL="0">
               <a:buNone/>
@@ -17093,7 +17909,7 @@
                 <a:ea typeface="Calibri" pitchFamily="34" charset="-122"/>
                 <a:cs typeface="Calibri" pitchFamily="34" charset="-120"/>
               </a:rPr>
-              <a:t> the book, but she will </a:t>
+              <a:t>, but the students needed to complete a </a:t>
             </a:r>
             <a:pPr algn="l" indent="0" marL="0">
               <a:buNone/>
@@ -17110,7 +17926,7 @@
                 <a:ea typeface="Calibri" pitchFamily="34" charset="-122"/>
                 <a:cs typeface="Calibri" pitchFamily="34" charset="-120"/>
               </a:rPr>
-              <a:t>review</a:t>
+              <a:t>self-review</a:t>
             </a:r>
             <a:pPr algn="l" indent="0" marL="0">
               <a:buNone/>
@@ -17124,7 +17940,7 @@
                 <a:ea typeface="Calibri" pitchFamily="34" charset="-122"/>
                 <a:cs typeface="Calibri" pitchFamily="34" charset="-120"/>
               </a:rPr>
-              <a:t> it again before publishing her notes.</a:t>
+              <a:t> before handing it in.</a:t>
             </a:r>
             <a:endParaRPr lang="en-US" sz="1800" dirty="0"/>
           </a:p>
@@ -17279,7 +18095,7 @@
                 <a:ea typeface="Trebuchet MS" pitchFamily="34" charset="-122"/>
                 <a:cs typeface="Trebuchet MS" pitchFamily="34" charset="-120"/>
               </a:rPr>
-              <a:t>reviewer</a:t>
+              <a:t>reviewed</a:t>
             </a:r>
             <a:endParaRPr lang="en-US" sz="1400" dirty="0"/>
           </a:p>
@@ -17407,7 +18223,7 @@
                 <a:ea typeface="Trebuchet MS" pitchFamily="34" charset="-122"/>
                 <a:cs typeface="Trebuchet MS" pitchFamily="34" charset="-120"/>
               </a:rPr>
-              <a:t>reviewing</a:t>
+              <a:t>reviewable</a:t>
             </a:r>
             <a:endParaRPr lang="en-US" sz="1400" dirty="0"/>
           </a:p>
@@ -17535,7 +18351,7 @@
                 <a:ea typeface="Trebuchet MS" pitchFamily="34" charset="-122"/>
                 <a:cs typeface="Trebuchet MS" pitchFamily="34" charset="-120"/>
               </a:rPr>
-              <a:t>review</a:t>
+              <a:t>self-review</a:t>
             </a:r>
             <a:endParaRPr lang="en-US" sz="1400" dirty="0"/>
           </a:p>
@@ -17866,7 +18682,7 @@
                 <a:ea typeface="Calibri" pitchFamily="34" charset="-122"/>
                 <a:cs typeface="Calibri" pitchFamily="34" charset="-120"/>
               </a:rPr>
-              <a:t>Word Labs  •  wordlabs.app  •  Root: 'review' = look at again, examine</a:t>
+              <a:t>Word Labs  •  wordlabs.app  •  Root: 'review' = look at again carefully</a:t>
             </a:r>
             <a:endParaRPr lang="en-US" sz="800" dirty="0"/>
           </a:p>
@@ -18005,7 +18821,7 @@
                 <a:ea typeface="Trebuchet MS" pitchFamily="34" charset="-122"/>
                 <a:cs typeface="Trebuchet MS" pitchFamily="34" charset="-120"/>
               </a:rPr>
-              <a:t>reviewer</a:t>
+              <a:t>reviewed</a:t>
             </a:r>
             <a:endParaRPr lang="en-US" sz="2800" dirty="0"/>
           </a:p>
@@ -18693,7 +19509,7 @@
                 <a:ea typeface="Calibri" pitchFamily="34" charset="-122"/>
                 <a:cs typeface="Calibri" pitchFamily="34" charset="-120"/>
               </a:rPr>
-              <a:t>Word Labs  •  wordlabs.app  •  Root: 'review' = look at again, examine</a:t>
+              <a:t>Word Labs  •  wordlabs.app  •  Root: 'review' = look at again carefully</a:t>
             </a:r>
             <a:endParaRPr lang="en-US" sz="800" dirty="0"/>
           </a:p>
@@ -18832,7 +19648,7 @@
                 <a:ea typeface="Trebuchet MS" pitchFamily="34" charset="-122"/>
                 <a:cs typeface="Trebuchet MS" pitchFamily="34" charset="-120"/>
               </a:rPr>
-              <a:t>reviewer</a:t>
+              <a:t>reviewed</a:t>
             </a:r>
             <a:endParaRPr lang="en-US" sz="2800" dirty="0"/>
           </a:p>
@@ -18912,7 +19728,7 @@
         </p:nvSpPr>
         <p:spPr>
           <a:xfrm>
-            <a:off x="2938272" y="2258568"/>
+            <a:off x="2221992" y="2258568"/>
             <a:ext cx="1828800" cy="292608"/>
           </a:xfrm>
           <a:prstGeom prst="rect">
@@ -18921,11 +19737,11 @@
             </a:avLst>
           </a:prstGeom>
           <a:solidFill>
-            <a:srgbClr val="CCFBF1"/>
+            <a:srgbClr val="DDD6FE"/>
           </a:solidFill>
           <a:ln w="19050">
             <a:solidFill>
-              <a:srgbClr val="0D9488"/>
+              <a:srgbClr val="7C3AED"/>
             </a:solidFill>
             <a:prstDash val="solid"/>
           </a:ln>
@@ -18946,7 +19762,7 @@
         </p:nvSpPr>
         <p:spPr>
           <a:xfrm>
-            <a:off x="2938272" y="2258568"/>
+            <a:off x="2221992" y="2258568"/>
             <a:ext cx="1828800" cy="292608"/>
           </a:xfrm>
           <a:prstGeom prst="rect">
@@ -18965,13 +19781,13 @@
             <a:r>
               <a:rPr lang="en-US" sz="1300" b="1" dirty="0">
                 <a:solidFill>
-                  <a:srgbClr val="0F766E"/>
+                  <a:srgbClr val="4C1D95"/>
                 </a:solidFill>
                 <a:latin typeface="Trebuchet MS" pitchFamily="34" charset="0"/>
                 <a:ea typeface="Trebuchet MS" pitchFamily="34" charset="-122"/>
                 <a:cs typeface="Trebuchet MS" pitchFamily="34" charset="-120"/>
               </a:rPr>
-              <a:t>review</a:t>
+              <a:t>re</a:t>
             </a:r>
             <a:endParaRPr lang="en-US" sz="1300" dirty="0"/>
           </a:p>
@@ -18985,7 +19801,7 @@
         </p:nvSpPr>
         <p:spPr>
           <a:xfrm>
-            <a:off x="2938272" y="2569464"/>
+            <a:off x="2221992" y="2569464"/>
             <a:ext cx="1828800" cy="201168"/>
           </a:xfrm>
           <a:prstGeom prst="rect">
@@ -19010,7 +19826,7 @@
                 <a:ea typeface="Calibri" pitchFamily="34" charset="-122"/>
                 <a:cs typeface="Calibri" pitchFamily="34" charset="-120"/>
               </a:rPr>
-              <a:t>look at again</a:t>
+              <a:t>again</a:t>
             </a:r>
             <a:endParaRPr lang="en-US" sz="850" dirty="0"/>
           </a:p>
@@ -19024,7 +19840,7 @@
         </p:nvSpPr>
         <p:spPr>
           <a:xfrm>
-            <a:off x="5803392" y="2258568"/>
+            <a:off x="4370832" y="2258568"/>
             <a:ext cx="1828800" cy="292608"/>
           </a:xfrm>
           <a:prstGeom prst="rect">
@@ -19058,7 +19874,7 @@
         </p:nvSpPr>
         <p:spPr>
           <a:xfrm>
-            <a:off x="5803392" y="2258568"/>
+            <a:off x="4370832" y="2258568"/>
             <a:ext cx="1828800" cy="292608"/>
           </a:xfrm>
           <a:prstGeom prst="rect">
@@ -19083,7 +19899,7 @@
                 <a:ea typeface="Trebuchet MS" pitchFamily="34" charset="-122"/>
                 <a:cs typeface="Trebuchet MS" pitchFamily="34" charset="-120"/>
               </a:rPr>
-              <a:t>er</a:t>
+              <a:t>view</a:t>
             </a:r>
             <a:endParaRPr lang="en-US" sz="1300" dirty="0"/>
           </a:p>
@@ -19097,7 +19913,7 @@
         </p:nvSpPr>
         <p:spPr>
           <a:xfrm>
-            <a:off x="5803392" y="2569464"/>
+            <a:off x="4370832" y="2569464"/>
             <a:ext cx="1828800" cy="201168"/>
           </a:xfrm>
           <a:prstGeom prst="rect">
@@ -19122,7 +19938,7 @@
                 <a:ea typeface="Calibri" pitchFamily="34" charset="-122"/>
                 <a:cs typeface="Calibri" pitchFamily="34" charset="-120"/>
               </a:rPr>
-              <a:t>a person who does something</a:t>
+              <a:t>see or look</a:t>
             </a:r>
             <a:endParaRPr lang="en-US" sz="850" dirty="0"/>
           </a:p>
@@ -19131,6 +19947,118 @@
       <p:sp>
         <p:nvSpPr>
           <p:cNvPr id="22" name="Shape 20"/>
+          <p:cNvSpPr/>
+          <p:nvPr/>
+        </p:nvSpPr>
+        <p:spPr>
+          <a:xfrm>
+            <a:off x="6519672" y="2258568"/>
+            <a:ext cx="1828800" cy="292608"/>
+          </a:xfrm>
+          <a:prstGeom prst="rect">
+            <a:avLst>
+              <a:gd name="adj" fmla="val 25000"/>
+            </a:avLst>
+          </a:prstGeom>
+          <a:solidFill>
+            <a:srgbClr val="FCE7F3"/>
+          </a:solidFill>
+          <a:ln w="19050">
+            <a:solidFill>
+              <a:srgbClr val="DB2777"/>
+            </a:solidFill>
+            <a:prstDash val="solid"/>
+          </a:ln>
+          <a:effectLst>
+            <a:outerShdw sx="100000" sy="100000" kx="0" ky="0" algn="bl" rotWithShape="0" blurRad="101600" dist="38100" dir="8100000">
+              <a:srgbClr val="000000">
+                <a:alpha val="12000"/>
+              </a:srgbClr>
+            </a:outerShdw>
+          </a:effectLst>
+        </p:spPr>
+      </p:sp>
+      <p:sp>
+        <p:nvSpPr>
+          <p:cNvPr id="23" name="Text 21"/>
+          <p:cNvSpPr/>
+          <p:nvPr/>
+        </p:nvSpPr>
+        <p:spPr>
+          <a:xfrm>
+            <a:off x="6519672" y="2258568"/>
+            <a:ext cx="1828800" cy="292608"/>
+          </a:xfrm>
+          <a:prstGeom prst="rect">
+            <a:avLst/>
+          </a:prstGeom>
+          <a:noFill/>
+          <a:ln/>
+        </p:spPr>
+        <p:txBody>
+          <a:bodyPr wrap="square" lIns="0" tIns="0" rIns="0" bIns="0" rtlCol="0" anchor="ctr"/>
+          <a:lstStyle/>
+          <a:p>
+            <a:pPr algn="ctr" indent="0" marL="0">
+              <a:buNone/>
+            </a:pPr>
+            <a:r>
+              <a:rPr lang="en-US" sz="1300" b="1" dirty="0">
+                <a:solidFill>
+                  <a:srgbClr val="9D174D"/>
+                </a:solidFill>
+                <a:latin typeface="Trebuchet MS" pitchFamily="34" charset="0"/>
+                <a:ea typeface="Trebuchet MS" pitchFamily="34" charset="-122"/>
+                <a:cs typeface="Trebuchet MS" pitchFamily="34" charset="-120"/>
+              </a:rPr>
+              <a:t>ed</a:t>
+            </a:r>
+            <a:endParaRPr lang="en-US" sz="1300" dirty="0"/>
+          </a:p>
+        </p:txBody>
+      </p:sp>
+      <p:sp>
+        <p:nvSpPr>
+          <p:cNvPr id="24" name="Text 22"/>
+          <p:cNvSpPr/>
+          <p:nvPr/>
+        </p:nvSpPr>
+        <p:spPr>
+          <a:xfrm>
+            <a:off x="6519672" y="2569464"/>
+            <a:ext cx="1828800" cy="201168"/>
+          </a:xfrm>
+          <a:prstGeom prst="rect">
+            <a:avLst/>
+          </a:prstGeom>
+          <a:noFill/>
+          <a:ln/>
+        </p:spPr>
+        <p:txBody>
+          <a:bodyPr wrap="square" lIns="0" tIns="0" rIns="0" bIns="0" rtlCol="0" anchor="t"/>
+          <a:lstStyle/>
+          <a:p>
+            <a:pPr algn="ctr" indent="0" marL="0">
+              <a:buNone/>
+            </a:pPr>
+            <a:r>
+              <a:rPr lang="en-US" sz="850" dirty="0">
+                <a:solidFill>
+                  <a:srgbClr val="475569"/>
+                </a:solidFill>
+                <a:latin typeface="Calibri" pitchFamily="34" charset="0"/>
+                <a:ea typeface="Calibri" pitchFamily="34" charset="-122"/>
+                <a:cs typeface="Calibri" pitchFamily="34" charset="-120"/>
+              </a:rPr>
+              <a:t>past tense</a:t>
+            </a:r>
+            <a:endParaRPr lang="en-US" sz="850" dirty="0"/>
+          </a:p>
+        </p:txBody>
+      </p:sp>
+      <p:sp>
+        <p:nvSpPr>
+          <p:cNvPr id="25" name="Shape 23"/>
           <p:cNvSpPr/>
           <p:nvPr/>
         </p:nvSpPr>
@@ -19157,7 +20085,7 @@
       </p:sp>
       <p:sp>
         <p:nvSpPr>
-          <p:cNvPr id="23" name="Text 21"/>
+          <p:cNvPr id="26" name="Text 24"/>
           <p:cNvSpPr/>
           <p:nvPr/>
         </p:nvSpPr>
@@ -19196,7 +20124,7 @@
       </p:sp>
       <p:sp>
         <p:nvSpPr>
-          <p:cNvPr id="24" name="Shape 22"/>
+          <p:cNvPr id="27" name="Shape 25"/>
           <p:cNvSpPr/>
           <p:nvPr/>
         </p:nvSpPr>
@@ -19223,7 +20151,7 @@
       </p:sp>
       <p:sp>
         <p:nvSpPr>
-          <p:cNvPr id="25" name="Text 23"/>
+          <p:cNvPr id="28" name="Text 26"/>
           <p:cNvSpPr/>
           <p:nvPr/>
         </p:nvSpPr>
@@ -19262,7 +20190,7 @@
       </p:sp>
       <p:sp>
         <p:nvSpPr>
-          <p:cNvPr id="26" name="Shape 24"/>
+          <p:cNvPr id="29" name="Shape 27"/>
           <p:cNvSpPr/>
           <p:nvPr/>
         </p:nvSpPr>
@@ -19289,7 +20217,7 @@
       </p:sp>
       <p:sp>
         <p:nvSpPr>
-          <p:cNvPr id="27" name="Text 25"/>
+          <p:cNvPr id="30" name="Text 28"/>
           <p:cNvSpPr/>
           <p:nvPr/>
         </p:nvSpPr>
@@ -19328,7 +20256,7 @@
       </p:sp>
       <p:sp>
         <p:nvSpPr>
-          <p:cNvPr id="28" name="Shape 26"/>
+          <p:cNvPr id="31" name="Shape 29"/>
           <p:cNvSpPr/>
           <p:nvPr/>
         </p:nvSpPr>
@@ -19355,7 +20283,7 @@
       </p:sp>
       <p:sp>
         <p:nvSpPr>
-          <p:cNvPr id="29" name="Text 27"/>
+          <p:cNvPr id="32" name="Text 30"/>
           <p:cNvSpPr/>
           <p:nvPr/>
         </p:nvSpPr>
@@ -19678,7 +20606,7 @@
                 <a:ea typeface="Calibri" pitchFamily="34" charset="-122"/>
                 <a:cs typeface="Calibri" pitchFamily="34" charset="-120"/>
               </a:rPr>
-              <a:t>Word Labs  •  wordlabs.app  •  Root: 'review' = look at again, examine</a:t>
+              <a:t>Word Labs  •  wordlabs.app  •  Root: 'review' = look at again carefully</a:t>
             </a:r>
             <a:endParaRPr lang="en-US" sz="800" dirty="0"/>
           </a:p>
@@ -19817,7 +20745,7 @@
                 <a:ea typeface="Trebuchet MS" pitchFamily="34" charset="-122"/>
                 <a:cs typeface="Trebuchet MS" pitchFamily="34" charset="-120"/>
               </a:rPr>
-              <a:t>reviewer</a:t>
+              <a:t>reviewed</a:t>
             </a:r>
             <a:endParaRPr lang="en-US" sz="2800" dirty="0"/>
           </a:p>
@@ -19897,7 +20825,7 @@
         </p:nvSpPr>
         <p:spPr>
           <a:xfrm>
-            <a:off x="2938272" y="2258568"/>
+            <a:off x="2221992" y="2258568"/>
             <a:ext cx="1828800" cy="292608"/>
           </a:xfrm>
           <a:prstGeom prst="rect">
@@ -19906,11 +20834,11 @@
             </a:avLst>
           </a:prstGeom>
           <a:solidFill>
-            <a:srgbClr val="CCFBF1"/>
+            <a:srgbClr val="DDD6FE"/>
           </a:solidFill>
           <a:ln w="19050">
             <a:solidFill>
-              <a:srgbClr val="0D9488"/>
+              <a:srgbClr val="7C3AED"/>
             </a:solidFill>
             <a:prstDash val="solid"/>
           </a:ln>
@@ -19931,7 +20859,7 @@
         </p:nvSpPr>
         <p:spPr>
           <a:xfrm>
-            <a:off x="2938272" y="2258568"/>
+            <a:off x="2221992" y="2258568"/>
             <a:ext cx="1828800" cy="292608"/>
           </a:xfrm>
           <a:prstGeom prst="rect">
@@ -19950,13 +20878,13 @@
             <a:r>
               <a:rPr lang="en-US" sz="1300" b="1" dirty="0">
                 <a:solidFill>
-                  <a:srgbClr val="0F766E"/>
+                  <a:srgbClr val="4C1D95"/>
                 </a:solidFill>
                 <a:latin typeface="Trebuchet MS" pitchFamily="34" charset="0"/>
                 <a:ea typeface="Trebuchet MS" pitchFamily="34" charset="-122"/>
                 <a:cs typeface="Trebuchet MS" pitchFamily="34" charset="-120"/>
               </a:rPr>
-              <a:t>review</a:t>
+              <a:t>re</a:t>
             </a:r>
             <a:endParaRPr lang="en-US" sz="1300" dirty="0"/>
           </a:p>
@@ -19970,7 +20898,7 @@
         </p:nvSpPr>
         <p:spPr>
           <a:xfrm>
-            <a:off x="2938272" y="2569464"/>
+            <a:off x="2221992" y="2569464"/>
             <a:ext cx="1828800" cy="201168"/>
           </a:xfrm>
           <a:prstGeom prst="rect">
@@ -19995,7 +20923,7 @@
                 <a:ea typeface="Calibri" pitchFamily="34" charset="-122"/>
                 <a:cs typeface="Calibri" pitchFamily="34" charset="-120"/>
               </a:rPr>
-              <a:t>look at again</a:t>
+              <a:t>again</a:t>
             </a:r>
             <a:endParaRPr lang="en-US" sz="850" dirty="0"/>
           </a:p>
@@ -20009,7 +20937,7 @@
         </p:nvSpPr>
         <p:spPr>
           <a:xfrm>
-            <a:off x="5803392" y="2258568"/>
+            <a:off x="4370832" y="2258568"/>
             <a:ext cx="1828800" cy="292608"/>
           </a:xfrm>
           <a:prstGeom prst="rect">
@@ -20043,7 +20971,7 @@
         </p:nvSpPr>
         <p:spPr>
           <a:xfrm>
-            <a:off x="5803392" y="2258568"/>
+            <a:off x="4370832" y="2258568"/>
             <a:ext cx="1828800" cy="292608"/>
           </a:xfrm>
           <a:prstGeom prst="rect">
@@ -20068,7 +20996,7 @@
                 <a:ea typeface="Trebuchet MS" pitchFamily="34" charset="-122"/>
                 <a:cs typeface="Trebuchet MS" pitchFamily="34" charset="-120"/>
               </a:rPr>
-              <a:t>er</a:t>
+              <a:t>view</a:t>
             </a:r>
             <a:endParaRPr lang="en-US" sz="1300" dirty="0"/>
           </a:p>
@@ -20082,7 +21010,7 @@
         </p:nvSpPr>
         <p:spPr>
           <a:xfrm>
-            <a:off x="5803392" y="2569464"/>
+            <a:off x="4370832" y="2569464"/>
             <a:ext cx="1828800" cy="201168"/>
           </a:xfrm>
           <a:prstGeom prst="rect">
@@ -20107,7 +21035,7 @@
                 <a:ea typeface="Calibri" pitchFamily="34" charset="-122"/>
                 <a:cs typeface="Calibri" pitchFamily="34" charset="-120"/>
               </a:rPr>
-              <a:t>a person who does something</a:t>
+              <a:t>see or look</a:t>
             </a:r>
             <a:endParaRPr lang="en-US" sz="850" dirty="0"/>
           </a:p>
@@ -20116,6 +21044,118 @@
       <p:sp>
         <p:nvSpPr>
           <p:cNvPr id="22" name="Shape 20"/>
+          <p:cNvSpPr/>
+          <p:nvPr/>
+        </p:nvSpPr>
+        <p:spPr>
+          <a:xfrm>
+            <a:off x="6519672" y="2258568"/>
+            <a:ext cx="1828800" cy="292608"/>
+          </a:xfrm>
+          <a:prstGeom prst="rect">
+            <a:avLst>
+              <a:gd name="adj" fmla="val 25000"/>
+            </a:avLst>
+          </a:prstGeom>
+          <a:solidFill>
+            <a:srgbClr val="FCE7F3"/>
+          </a:solidFill>
+          <a:ln w="19050">
+            <a:solidFill>
+              <a:srgbClr val="DB2777"/>
+            </a:solidFill>
+            <a:prstDash val="solid"/>
+          </a:ln>
+          <a:effectLst>
+            <a:outerShdw sx="100000" sy="100000" kx="0" ky="0" algn="bl" rotWithShape="0" blurRad="101600" dist="38100" dir="8100000">
+              <a:srgbClr val="000000">
+                <a:alpha val="12000"/>
+              </a:srgbClr>
+            </a:outerShdw>
+          </a:effectLst>
+        </p:spPr>
+      </p:sp>
+      <p:sp>
+        <p:nvSpPr>
+          <p:cNvPr id="23" name="Text 21"/>
+          <p:cNvSpPr/>
+          <p:nvPr/>
+        </p:nvSpPr>
+        <p:spPr>
+          <a:xfrm>
+            <a:off x="6519672" y="2258568"/>
+            <a:ext cx="1828800" cy="292608"/>
+          </a:xfrm>
+          <a:prstGeom prst="rect">
+            <a:avLst/>
+          </a:prstGeom>
+          <a:noFill/>
+          <a:ln/>
+        </p:spPr>
+        <p:txBody>
+          <a:bodyPr wrap="square" lIns="0" tIns="0" rIns="0" bIns="0" rtlCol="0" anchor="ctr"/>
+          <a:lstStyle/>
+          <a:p>
+            <a:pPr algn="ctr" indent="0" marL="0">
+              <a:buNone/>
+            </a:pPr>
+            <a:r>
+              <a:rPr lang="en-US" sz="1300" b="1" dirty="0">
+                <a:solidFill>
+                  <a:srgbClr val="9D174D"/>
+                </a:solidFill>
+                <a:latin typeface="Trebuchet MS" pitchFamily="34" charset="0"/>
+                <a:ea typeface="Trebuchet MS" pitchFamily="34" charset="-122"/>
+                <a:cs typeface="Trebuchet MS" pitchFamily="34" charset="-120"/>
+              </a:rPr>
+              <a:t>ed</a:t>
+            </a:r>
+            <a:endParaRPr lang="en-US" sz="1300" dirty="0"/>
+          </a:p>
+        </p:txBody>
+      </p:sp>
+      <p:sp>
+        <p:nvSpPr>
+          <p:cNvPr id="24" name="Text 22"/>
+          <p:cNvSpPr/>
+          <p:nvPr/>
+        </p:nvSpPr>
+        <p:spPr>
+          <a:xfrm>
+            <a:off x="6519672" y="2569464"/>
+            <a:ext cx="1828800" cy="201168"/>
+          </a:xfrm>
+          <a:prstGeom prst="rect">
+            <a:avLst/>
+          </a:prstGeom>
+          <a:noFill/>
+          <a:ln/>
+        </p:spPr>
+        <p:txBody>
+          <a:bodyPr wrap="square" lIns="0" tIns="0" rIns="0" bIns="0" rtlCol="0" anchor="t"/>
+          <a:lstStyle/>
+          <a:p>
+            <a:pPr algn="ctr" indent="0" marL="0">
+              <a:buNone/>
+            </a:pPr>
+            <a:r>
+              <a:rPr lang="en-US" sz="850" dirty="0">
+                <a:solidFill>
+                  <a:srgbClr val="475569"/>
+                </a:solidFill>
+                <a:latin typeface="Calibri" pitchFamily="34" charset="0"/>
+                <a:ea typeface="Calibri" pitchFamily="34" charset="-122"/>
+                <a:cs typeface="Calibri" pitchFamily="34" charset="-120"/>
+              </a:rPr>
+              <a:t>past tense</a:t>
+            </a:r>
+            <a:endParaRPr lang="en-US" sz="850" dirty="0"/>
+          </a:p>
+        </p:txBody>
+      </p:sp>
+      <p:sp>
+        <p:nvSpPr>
+          <p:cNvPr id="25" name="Shape 23"/>
           <p:cNvSpPr/>
           <p:nvPr/>
         </p:nvSpPr>
@@ -20142,7 +21182,7 @@
       </p:sp>
       <p:sp>
         <p:nvSpPr>
-          <p:cNvPr id="23" name="Text 21"/>
+          <p:cNvPr id="26" name="Text 24"/>
           <p:cNvSpPr/>
           <p:nvPr/>
         </p:nvSpPr>
@@ -20181,7 +21221,7 @@
       </p:sp>
       <p:sp>
         <p:nvSpPr>
-          <p:cNvPr id="24" name="Shape 22"/>
+          <p:cNvPr id="27" name="Shape 25"/>
           <p:cNvSpPr/>
           <p:nvPr/>
         </p:nvSpPr>
@@ -20208,13 +21248,13 @@
       </p:sp>
       <p:sp>
         <p:nvSpPr>
-          <p:cNvPr id="25" name="Shape 23"/>
-          <p:cNvSpPr/>
-          <p:nvPr/>
-        </p:nvSpPr>
-        <p:spPr>
-          <a:xfrm>
-            <a:off x="2313432" y="3364992"/>
+          <p:cNvPr id="28" name="Shape 26"/>
+          <p:cNvSpPr/>
+          <p:nvPr/>
+        </p:nvSpPr>
+        <p:spPr>
+          <a:xfrm>
+            <a:off x="2999232" y="3364992"/>
             <a:ext cx="1645920" cy="475488"/>
           </a:xfrm>
           <a:prstGeom prst="rect">
@@ -20235,13 +21275,13 @@
       </p:sp>
       <p:sp>
         <p:nvSpPr>
-          <p:cNvPr id="26" name="Text 24"/>
-          <p:cNvSpPr/>
-          <p:nvPr/>
-        </p:nvSpPr>
-        <p:spPr>
-          <a:xfrm>
-            <a:off x="2313432" y="3364992"/>
+          <p:cNvPr id="29" name="Text 27"/>
+          <p:cNvSpPr/>
+          <p:nvPr/>
+        </p:nvSpPr>
+        <p:spPr>
+          <a:xfrm>
+            <a:off x="2999232" y="3364992"/>
             <a:ext cx="1645920" cy="475488"/>
           </a:xfrm>
           <a:prstGeom prst="rect">
@@ -20274,14 +21314,14 @@
       </p:sp>
       <p:sp>
         <p:nvSpPr>
-          <p:cNvPr id="27" name="Text 25"/>
-          <p:cNvSpPr/>
-          <p:nvPr/>
-        </p:nvSpPr>
-        <p:spPr>
-          <a:xfrm>
-            <a:off x="3959352" y="3364992"/>
-            <a:ext cx="411480" cy="475488"/>
+          <p:cNvPr id="30" name="Text 28"/>
+          <p:cNvSpPr/>
+          <p:nvPr/>
+        </p:nvSpPr>
+        <p:spPr>
+          <a:xfrm>
+            <a:off x="4645152" y="3364992"/>
+            <a:ext cx="1097280" cy="475488"/>
           </a:xfrm>
           <a:prstGeom prst="rect">
             <a:avLst/>
@@ -20313,13 +21353,13 @@
       </p:sp>
       <p:sp>
         <p:nvSpPr>
-          <p:cNvPr id="28" name="Shape 26"/>
-          <p:cNvSpPr/>
-          <p:nvPr/>
-        </p:nvSpPr>
-        <p:spPr>
-          <a:xfrm>
-            <a:off x="4370832" y="3364992"/>
+          <p:cNvPr id="31" name="Shape 29"/>
+          <p:cNvSpPr/>
+          <p:nvPr/>
+        </p:nvSpPr>
+        <p:spPr>
+          <a:xfrm>
+            <a:off x="5742432" y="3364992"/>
             <a:ext cx="1645920" cy="475488"/>
           </a:xfrm>
           <a:prstGeom prst="rect">
@@ -20340,13 +21380,13 @@
       </p:sp>
       <p:sp>
         <p:nvSpPr>
-          <p:cNvPr id="29" name="Text 27"/>
-          <p:cNvSpPr/>
-          <p:nvPr/>
-        </p:nvSpPr>
-        <p:spPr>
-          <a:xfrm>
-            <a:off x="4370832" y="3364992"/>
+          <p:cNvPr id="32" name="Text 30"/>
+          <p:cNvSpPr/>
+          <p:nvPr/>
+        </p:nvSpPr>
+        <p:spPr>
+          <a:xfrm>
+            <a:off x="5742432" y="3364992"/>
             <a:ext cx="1645920" cy="475488"/>
           </a:xfrm>
           <a:prstGeom prst="rect">
@@ -20371,112 +21411,7 @@
                 <a:ea typeface="Trebuchet MS" pitchFamily="34" charset="-122"/>
                 <a:cs typeface="Trebuchet MS" pitchFamily="34" charset="-120"/>
               </a:rPr>
-              <a:t>view</a:t>
-            </a:r>
-            <a:endParaRPr lang="en-US" sz="1400" dirty="0"/>
-          </a:p>
-        </p:txBody>
-      </p:sp>
-      <p:sp>
-        <p:nvSpPr>
-          <p:cNvPr id="30" name="Text 28"/>
-          <p:cNvSpPr/>
-          <p:nvPr/>
-        </p:nvSpPr>
-        <p:spPr>
-          <a:xfrm>
-            <a:off x="6016752" y="3364992"/>
-            <a:ext cx="411480" cy="475488"/>
-          </a:xfrm>
-          <a:prstGeom prst="rect">
-            <a:avLst/>
-          </a:prstGeom>
-          <a:noFill/>
-          <a:ln/>
-        </p:spPr>
-        <p:txBody>
-          <a:bodyPr wrap="square" lIns="0" tIns="0" rIns="0" bIns="0" rtlCol="0" anchor="ctr"/>
-          <a:lstStyle/>
-          <a:p>
-            <a:pPr algn="ctr" indent="0" marL="0">
-              <a:buNone/>
-            </a:pPr>
-            <a:r>
-              <a:rPr lang="en-US" sz="1600" b="1" dirty="0">
-                <a:solidFill>
-                  <a:srgbClr val="0D9488"/>
-                </a:solidFill>
-                <a:latin typeface="Trebuchet MS" pitchFamily="34" charset="0"/>
-                <a:ea typeface="Trebuchet MS" pitchFamily="34" charset="-122"/>
-                <a:cs typeface="Trebuchet MS" pitchFamily="34" charset="-120"/>
-              </a:rPr>
-              <a:t>·</a:t>
-            </a:r>
-            <a:endParaRPr lang="en-US" sz="1600" dirty="0"/>
-          </a:p>
-        </p:txBody>
-      </p:sp>
-      <p:sp>
-        <p:nvSpPr>
-          <p:cNvPr id="31" name="Shape 29"/>
-          <p:cNvSpPr/>
-          <p:nvPr/>
-        </p:nvSpPr>
-        <p:spPr>
-          <a:xfrm>
-            <a:off x="6428232" y="3364992"/>
-            <a:ext cx="1645920" cy="475488"/>
-          </a:xfrm>
-          <a:prstGeom prst="rect">
-            <a:avLst>
-              <a:gd name="adj" fmla="val 9615"/>
-            </a:avLst>
-          </a:prstGeom>
-          <a:solidFill>
-            <a:srgbClr val="FFFFFF"/>
-          </a:solidFill>
-          <a:ln w="12700">
-            <a:solidFill>
-              <a:srgbClr val="0D9488"/>
-            </a:solidFill>
-            <a:prstDash val="solid"/>
-          </a:ln>
-        </p:spPr>
-      </p:sp>
-      <p:sp>
-        <p:nvSpPr>
-          <p:cNvPr id="32" name="Text 30"/>
-          <p:cNvSpPr/>
-          <p:nvPr/>
-        </p:nvSpPr>
-        <p:spPr>
-          <a:xfrm>
-            <a:off x="6428232" y="3364992"/>
-            <a:ext cx="1645920" cy="475488"/>
-          </a:xfrm>
-          <a:prstGeom prst="rect">
-            <a:avLst/>
-          </a:prstGeom>
-          <a:noFill/>
-          <a:ln/>
-        </p:spPr>
-        <p:txBody>
-          <a:bodyPr wrap="square" lIns="0" tIns="0" rIns="0" bIns="0" rtlCol="0" anchor="ctr"/>
-          <a:lstStyle/>
-          <a:p>
-            <a:pPr algn="ctr" indent="0" marL="0">
-              <a:buNone/>
-            </a:pPr>
-            <a:r>
-              <a:rPr lang="en-US" sz="1400" b="1" dirty="0">
-                <a:solidFill>
-                  <a:srgbClr val="0D9488"/>
-                </a:solidFill>
-                <a:latin typeface="Trebuchet MS" pitchFamily="34" charset="0"/>
-                <a:ea typeface="Trebuchet MS" pitchFamily="34" charset="-122"/>
-                <a:cs typeface="Trebuchet MS" pitchFamily="34" charset="-120"/>
-              </a:rPr>
-              <a:t>er</a:t>
+              <a:t>viewed</a:t>
             </a:r>
             <a:endParaRPr lang="en-US" sz="1400" dirty="0"/>
           </a:p>
@@ -20900,7 +21835,7 @@
                 <a:ea typeface="Calibri" pitchFamily="34" charset="-122"/>
                 <a:cs typeface="Calibri" pitchFamily="34" charset="-120"/>
               </a:rPr>
-              <a:t>Word Labs  •  wordlabs.app  •  Root: 'review' = look at again, examine</a:t>
+              <a:t>Word Labs  •  wordlabs.app  •  Root: 'review' = look at again carefully</a:t>
             </a:r>
             <a:endParaRPr lang="en-US" sz="800" dirty="0"/>
           </a:p>
@@ -21039,7 +21974,7 @@
                 <a:ea typeface="Trebuchet MS" pitchFamily="34" charset="-122"/>
                 <a:cs typeface="Trebuchet MS" pitchFamily="34" charset="-120"/>
               </a:rPr>
-              <a:t>reviewer</a:t>
+              <a:t>reviewed</a:t>
             </a:r>
             <a:endParaRPr lang="en-US" sz="2800" dirty="0"/>
           </a:p>
@@ -21119,7 +22054,7 @@
         </p:nvSpPr>
         <p:spPr>
           <a:xfrm>
-            <a:off x="2938272" y="2258568"/>
+            <a:off x="2221992" y="2258568"/>
             <a:ext cx="1828800" cy="292608"/>
           </a:xfrm>
           <a:prstGeom prst="rect">
@@ -21128,11 +22063,11 @@
             </a:avLst>
           </a:prstGeom>
           <a:solidFill>
-            <a:srgbClr val="CCFBF1"/>
+            <a:srgbClr val="DDD6FE"/>
           </a:solidFill>
           <a:ln w="19050">
             <a:solidFill>
-              <a:srgbClr val="0D9488"/>
+              <a:srgbClr val="7C3AED"/>
             </a:solidFill>
             <a:prstDash val="solid"/>
           </a:ln>
@@ -21153,7 +22088,7 @@
         </p:nvSpPr>
         <p:spPr>
           <a:xfrm>
-            <a:off x="2938272" y="2258568"/>
+            <a:off x="2221992" y="2258568"/>
             <a:ext cx="1828800" cy="292608"/>
           </a:xfrm>
           <a:prstGeom prst="rect">
@@ -21172,13 +22107,13 @@
             <a:r>
               <a:rPr lang="en-US" sz="1300" b="1" dirty="0">
                 <a:solidFill>
-                  <a:srgbClr val="0F766E"/>
+                  <a:srgbClr val="4C1D95"/>
                 </a:solidFill>
                 <a:latin typeface="Trebuchet MS" pitchFamily="34" charset="0"/>
                 <a:ea typeface="Trebuchet MS" pitchFamily="34" charset="-122"/>
                 <a:cs typeface="Trebuchet MS" pitchFamily="34" charset="-120"/>
               </a:rPr>
-              <a:t>review</a:t>
+              <a:t>re</a:t>
             </a:r>
             <a:endParaRPr lang="en-US" sz="1300" dirty="0"/>
           </a:p>
@@ -21192,7 +22127,7 @@
         </p:nvSpPr>
         <p:spPr>
           <a:xfrm>
-            <a:off x="2938272" y="2569464"/>
+            <a:off x="2221992" y="2569464"/>
             <a:ext cx="1828800" cy="201168"/>
           </a:xfrm>
           <a:prstGeom prst="rect">
@@ -21217,7 +22152,7 @@
                 <a:ea typeface="Calibri" pitchFamily="34" charset="-122"/>
                 <a:cs typeface="Calibri" pitchFamily="34" charset="-120"/>
               </a:rPr>
-              <a:t>look at again</a:t>
+              <a:t>again</a:t>
             </a:r>
             <a:endParaRPr lang="en-US" sz="850" dirty="0"/>
           </a:p>
@@ -21231,7 +22166,7 @@
         </p:nvSpPr>
         <p:spPr>
           <a:xfrm>
-            <a:off x="5803392" y="2258568"/>
+            <a:off x="4370832" y="2258568"/>
             <a:ext cx="1828800" cy="292608"/>
           </a:xfrm>
           <a:prstGeom prst="rect">
@@ -21265,7 +22200,7 @@
         </p:nvSpPr>
         <p:spPr>
           <a:xfrm>
-            <a:off x="5803392" y="2258568"/>
+            <a:off x="4370832" y="2258568"/>
             <a:ext cx="1828800" cy="292608"/>
           </a:xfrm>
           <a:prstGeom prst="rect">
@@ -21290,7 +22225,7 @@
                 <a:ea typeface="Trebuchet MS" pitchFamily="34" charset="-122"/>
                 <a:cs typeface="Trebuchet MS" pitchFamily="34" charset="-120"/>
               </a:rPr>
-              <a:t>er</a:t>
+              <a:t>view</a:t>
             </a:r>
             <a:endParaRPr lang="en-US" sz="1300" dirty="0"/>
           </a:p>
@@ -21304,7 +22239,7 @@
         </p:nvSpPr>
         <p:spPr>
           <a:xfrm>
-            <a:off x="5803392" y="2569464"/>
+            <a:off x="4370832" y="2569464"/>
             <a:ext cx="1828800" cy="201168"/>
           </a:xfrm>
           <a:prstGeom prst="rect">
@@ -21329,7 +22264,7 @@
                 <a:ea typeface="Calibri" pitchFamily="34" charset="-122"/>
                 <a:cs typeface="Calibri" pitchFamily="34" charset="-120"/>
               </a:rPr>
-              <a:t>a person who does something</a:t>
+              <a:t>see or look</a:t>
             </a:r>
             <a:endParaRPr lang="en-US" sz="850" dirty="0"/>
           </a:p>
@@ -21338,6 +22273,118 @@
       <p:sp>
         <p:nvSpPr>
           <p:cNvPr id="22" name="Shape 20"/>
+          <p:cNvSpPr/>
+          <p:nvPr/>
+        </p:nvSpPr>
+        <p:spPr>
+          <a:xfrm>
+            <a:off x="6519672" y="2258568"/>
+            <a:ext cx="1828800" cy="292608"/>
+          </a:xfrm>
+          <a:prstGeom prst="rect">
+            <a:avLst>
+              <a:gd name="adj" fmla="val 25000"/>
+            </a:avLst>
+          </a:prstGeom>
+          <a:solidFill>
+            <a:srgbClr val="FCE7F3"/>
+          </a:solidFill>
+          <a:ln w="19050">
+            <a:solidFill>
+              <a:srgbClr val="DB2777"/>
+            </a:solidFill>
+            <a:prstDash val="solid"/>
+          </a:ln>
+          <a:effectLst>
+            <a:outerShdw sx="100000" sy="100000" kx="0" ky="0" algn="bl" rotWithShape="0" blurRad="101600" dist="38100" dir="8100000">
+              <a:srgbClr val="000000">
+                <a:alpha val="12000"/>
+              </a:srgbClr>
+            </a:outerShdw>
+          </a:effectLst>
+        </p:spPr>
+      </p:sp>
+      <p:sp>
+        <p:nvSpPr>
+          <p:cNvPr id="23" name="Text 21"/>
+          <p:cNvSpPr/>
+          <p:nvPr/>
+        </p:nvSpPr>
+        <p:spPr>
+          <a:xfrm>
+            <a:off x="6519672" y="2258568"/>
+            <a:ext cx="1828800" cy="292608"/>
+          </a:xfrm>
+          <a:prstGeom prst="rect">
+            <a:avLst/>
+          </a:prstGeom>
+          <a:noFill/>
+          <a:ln/>
+        </p:spPr>
+        <p:txBody>
+          <a:bodyPr wrap="square" lIns="0" tIns="0" rIns="0" bIns="0" rtlCol="0" anchor="ctr"/>
+          <a:lstStyle/>
+          <a:p>
+            <a:pPr algn="ctr" indent="0" marL="0">
+              <a:buNone/>
+            </a:pPr>
+            <a:r>
+              <a:rPr lang="en-US" sz="1300" b="1" dirty="0">
+                <a:solidFill>
+                  <a:srgbClr val="9D174D"/>
+                </a:solidFill>
+                <a:latin typeface="Trebuchet MS" pitchFamily="34" charset="0"/>
+                <a:ea typeface="Trebuchet MS" pitchFamily="34" charset="-122"/>
+                <a:cs typeface="Trebuchet MS" pitchFamily="34" charset="-120"/>
+              </a:rPr>
+              <a:t>ed</a:t>
+            </a:r>
+            <a:endParaRPr lang="en-US" sz="1300" dirty="0"/>
+          </a:p>
+        </p:txBody>
+      </p:sp>
+      <p:sp>
+        <p:nvSpPr>
+          <p:cNvPr id="24" name="Text 22"/>
+          <p:cNvSpPr/>
+          <p:nvPr/>
+        </p:nvSpPr>
+        <p:spPr>
+          <a:xfrm>
+            <a:off x="6519672" y="2569464"/>
+            <a:ext cx="1828800" cy="201168"/>
+          </a:xfrm>
+          <a:prstGeom prst="rect">
+            <a:avLst/>
+          </a:prstGeom>
+          <a:noFill/>
+          <a:ln/>
+        </p:spPr>
+        <p:txBody>
+          <a:bodyPr wrap="square" lIns="0" tIns="0" rIns="0" bIns="0" rtlCol="0" anchor="t"/>
+          <a:lstStyle/>
+          <a:p>
+            <a:pPr algn="ctr" indent="0" marL="0">
+              <a:buNone/>
+            </a:pPr>
+            <a:r>
+              <a:rPr lang="en-US" sz="850" dirty="0">
+                <a:solidFill>
+                  <a:srgbClr val="475569"/>
+                </a:solidFill>
+                <a:latin typeface="Calibri" pitchFamily="34" charset="0"/>
+                <a:ea typeface="Calibri" pitchFamily="34" charset="-122"/>
+                <a:cs typeface="Calibri" pitchFamily="34" charset="-120"/>
+              </a:rPr>
+              <a:t>past tense</a:t>
+            </a:r>
+            <a:endParaRPr lang="en-US" sz="850" dirty="0"/>
+          </a:p>
+        </p:txBody>
+      </p:sp>
+      <p:sp>
+        <p:nvSpPr>
+          <p:cNvPr id="25" name="Shape 23"/>
           <p:cNvSpPr/>
           <p:nvPr/>
         </p:nvSpPr>
@@ -21364,7 +22411,7 @@
       </p:sp>
       <p:sp>
         <p:nvSpPr>
-          <p:cNvPr id="23" name="Text 21"/>
+          <p:cNvPr id="26" name="Text 24"/>
           <p:cNvSpPr/>
           <p:nvPr/>
         </p:nvSpPr>
@@ -21403,7 +22450,7 @@
       </p:sp>
       <p:sp>
         <p:nvSpPr>
-          <p:cNvPr id="24" name="Shape 22"/>
+          <p:cNvPr id="27" name="Shape 25"/>
           <p:cNvSpPr/>
           <p:nvPr/>
         </p:nvSpPr>
@@ -21430,13 +22477,13 @@
       </p:sp>
       <p:sp>
         <p:nvSpPr>
-          <p:cNvPr id="25" name="Shape 23"/>
-          <p:cNvSpPr/>
-          <p:nvPr/>
-        </p:nvSpPr>
-        <p:spPr>
-          <a:xfrm>
-            <a:off x="2313432" y="3364992"/>
+          <p:cNvPr id="28" name="Shape 26"/>
+          <p:cNvSpPr/>
+          <p:nvPr/>
+        </p:nvSpPr>
+        <p:spPr>
+          <a:xfrm>
+            <a:off x="2999232" y="3364992"/>
             <a:ext cx="1645920" cy="475488"/>
           </a:xfrm>
           <a:prstGeom prst="rect">
@@ -21457,13 +22504,13 @@
       </p:sp>
       <p:sp>
         <p:nvSpPr>
-          <p:cNvPr id="26" name="Text 24"/>
-          <p:cNvSpPr/>
-          <p:nvPr/>
-        </p:nvSpPr>
-        <p:spPr>
-          <a:xfrm>
-            <a:off x="2313432" y="3364992"/>
+          <p:cNvPr id="29" name="Text 27"/>
+          <p:cNvSpPr/>
+          <p:nvPr/>
+        </p:nvSpPr>
+        <p:spPr>
+          <a:xfrm>
+            <a:off x="2999232" y="3364992"/>
             <a:ext cx="1645920" cy="475488"/>
           </a:xfrm>
           <a:prstGeom prst="rect">
@@ -21496,14 +22543,14 @@
       </p:sp>
       <p:sp>
         <p:nvSpPr>
-          <p:cNvPr id="27" name="Text 25"/>
-          <p:cNvSpPr/>
-          <p:nvPr/>
-        </p:nvSpPr>
-        <p:spPr>
-          <a:xfrm>
-            <a:off x="3959352" y="3364992"/>
-            <a:ext cx="411480" cy="475488"/>
+          <p:cNvPr id="30" name="Text 28"/>
+          <p:cNvSpPr/>
+          <p:nvPr/>
+        </p:nvSpPr>
+        <p:spPr>
+          <a:xfrm>
+            <a:off x="4645152" y="3364992"/>
+            <a:ext cx="1097280" cy="475488"/>
           </a:xfrm>
           <a:prstGeom prst="rect">
             <a:avLst/>
@@ -21535,13 +22582,13 @@
       </p:sp>
       <p:sp>
         <p:nvSpPr>
-          <p:cNvPr id="28" name="Shape 26"/>
-          <p:cNvSpPr/>
-          <p:nvPr/>
-        </p:nvSpPr>
-        <p:spPr>
-          <a:xfrm>
-            <a:off x="4370832" y="3364992"/>
+          <p:cNvPr id="31" name="Shape 29"/>
+          <p:cNvSpPr/>
+          <p:nvPr/>
+        </p:nvSpPr>
+        <p:spPr>
+          <a:xfrm>
+            <a:off x="5742432" y="3364992"/>
             <a:ext cx="1645920" cy="475488"/>
           </a:xfrm>
           <a:prstGeom prst="rect">
@@ -21562,13 +22609,13 @@
       </p:sp>
       <p:sp>
         <p:nvSpPr>
-          <p:cNvPr id="29" name="Text 27"/>
-          <p:cNvSpPr/>
-          <p:nvPr/>
-        </p:nvSpPr>
-        <p:spPr>
-          <a:xfrm>
-            <a:off x="4370832" y="3364992"/>
+          <p:cNvPr id="32" name="Text 30"/>
+          <p:cNvSpPr/>
+          <p:nvPr/>
+        </p:nvSpPr>
+        <p:spPr>
+          <a:xfrm>
+            <a:off x="5742432" y="3364992"/>
             <a:ext cx="1645920" cy="475488"/>
           </a:xfrm>
           <a:prstGeom prst="rect">
@@ -21593,7 +22640,7 @@
                 <a:ea typeface="Trebuchet MS" pitchFamily="34" charset="-122"/>
                 <a:cs typeface="Trebuchet MS" pitchFamily="34" charset="-120"/>
               </a:rPr>
-              <a:t>view</a:t>
+              <a:t>viewed</a:t>
             </a:r>
             <a:endParaRPr lang="en-US" sz="1400" dirty="0"/>
           </a:p>
@@ -21601,211 +22648,238 @@
       </p:sp>
       <p:sp>
         <p:nvSpPr>
-          <p:cNvPr id="30" name="Text 28"/>
-          <p:cNvSpPr/>
-          <p:nvPr/>
-        </p:nvSpPr>
-        <p:spPr>
-          <a:xfrm>
-            <a:off x="6016752" y="3364992"/>
-            <a:ext cx="411480" cy="475488"/>
-          </a:xfrm>
-          <a:prstGeom prst="rect">
-            <a:avLst/>
-          </a:prstGeom>
-          <a:noFill/>
-          <a:ln/>
-        </p:spPr>
-        <p:txBody>
-          <a:bodyPr wrap="square" lIns="0" tIns="0" rIns="0" bIns="0" rtlCol="0" anchor="ctr"/>
-          <a:lstStyle/>
-          <a:p>
-            <a:pPr algn="ctr" indent="0" marL="0">
-              <a:buNone/>
-            </a:pPr>
-            <a:r>
-              <a:rPr lang="en-US" sz="1600" b="1" dirty="0">
-                <a:solidFill>
-                  <a:srgbClr val="0D9488"/>
+          <p:cNvPr id="33" name="Shape 31"/>
+          <p:cNvSpPr/>
+          <p:nvPr/>
+        </p:nvSpPr>
+        <p:spPr>
+          <a:xfrm>
+            <a:off x="365760" y="4096512"/>
+            <a:ext cx="1371600" cy="804672"/>
+          </a:xfrm>
+          <a:prstGeom prst="rect">
+            <a:avLst>
+              <a:gd name="adj" fmla="val 6818"/>
+            </a:avLst>
+          </a:prstGeom>
+          <a:solidFill>
+            <a:srgbClr val="E2E8F0"/>
+          </a:solidFill>
+          <a:ln w="12700">
+            <a:solidFill>
+              <a:srgbClr val="E2E8F0"/>
+            </a:solidFill>
+            <a:prstDash val="solid"/>
+          </a:ln>
+        </p:spPr>
+      </p:sp>
+      <p:sp>
+        <p:nvSpPr>
+          <p:cNvPr id="34" name="Text 32"/>
+          <p:cNvSpPr/>
+          <p:nvPr/>
+        </p:nvSpPr>
+        <p:spPr>
+          <a:xfrm>
+            <a:off x="365760" y="4096512"/>
+            <a:ext cx="1371600" cy="804672"/>
+          </a:xfrm>
+          <a:prstGeom prst="rect">
+            <a:avLst/>
+          </a:prstGeom>
+          <a:noFill/>
+          <a:ln/>
+        </p:spPr>
+        <p:txBody>
+          <a:bodyPr wrap="square" lIns="0" tIns="0" rIns="0" bIns="0" rtlCol="0" anchor="ctr"/>
+          <a:lstStyle/>
+          <a:p>
+            <a:pPr algn="ctr" indent="0" marL="0">
+              <a:buNone/>
+            </a:pPr>
+            <a:r>
+              <a:rPr lang="en-US" sz="1100" b="1" dirty="0">
+                <a:solidFill>
+                  <a:srgbClr val="475569"/>
                 </a:solidFill>
                 <a:latin typeface="Trebuchet MS" pitchFamily="34" charset="0"/>
                 <a:ea typeface="Trebuchet MS" pitchFamily="34" charset="-122"/>
                 <a:cs typeface="Trebuchet MS" pitchFamily="34" charset="-120"/>
               </a:rPr>
-              <a:t>·</a:t>
-            </a:r>
-            <a:endParaRPr lang="en-US" sz="1600" dirty="0"/>
-          </a:p>
-        </p:txBody>
-      </p:sp>
-      <p:sp>
-        <p:nvSpPr>
-          <p:cNvPr id="31" name="Shape 29"/>
-          <p:cNvSpPr/>
-          <p:nvPr/>
-        </p:nvSpPr>
-        <p:spPr>
-          <a:xfrm>
-            <a:off x="6428232" y="3364992"/>
-            <a:ext cx="1645920" cy="475488"/>
+              <a:t>Phonemes</a:t>
+            </a:r>
+            <a:endParaRPr lang="en-US" sz="1100" dirty="0"/>
+          </a:p>
+        </p:txBody>
+      </p:sp>
+      <p:sp>
+        <p:nvSpPr>
+          <p:cNvPr id="35" name="Shape 33"/>
+          <p:cNvSpPr/>
+          <p:nvPr/>
+        </p:nvSpPr>
+        <p:spPr>
+          <a:xfrm>
+            <a:off x="1874520" y="4096512"/>
+            <a:ext cx="6903720" cy="658368"/>
           </a:xfrm>
           <a:prstGeom prst="rect">
             <a:avLst>
-              <a:gd name="adj" fmla="val 9615"/>
+              <a:gd name="adj" fmla="val 8333"/>
             </a:avLst>
           </a:prstGeom>
           <a:solidFill>
+            <a:srgbClr val="FCE7F3"/>
+          </a:solidFill>
+          <a:ln w="12700">
+            <a:solidFill>
+              <a:srgbClr val="DB2777"/>
+            </a:solidFill>
+            <a:prstDash val="solid"/>
+          </a:ln>
+        </p:spPr>
+      </p:sp>
+      <p:sp>
+        <p:nvSpPr>
+          <p:cNvPr id="36" name="Shape 34"/>
+          <p:cNvSpPr/>
+          <p:nvPr/>
+        </p:nvSpPr>
+        <p:spPr>
+          <a:xfrm>
+            <a:off x="2427732" y="4169664"/>
+            <a:ext cx="685800" cy="475488"/>
+          </a:xfrm>
+          <a:prstGeom prst="rect">
+            <a:avLst>
+              <a:gd name="adj" fmla="val 7692"/>
+            </a:avLst>
+          </a:prstGeom>
+          <a:solidFill>
             <a:srgbClr val="FFFFFF"/>
           </a:solidFill>
           <a:ln w="12700">
             <a:solidFill>
-              <a:srgbClr val="0D9488"/>
-            </a:solidFill>
-            <a:prstDash val="solid"/>
-          </a:ln>
-        </p:spPr>
-      </p:sp>
-      <p:sp>
-        <p:nvSpPr>
-          <p:cNvPr id="32" name="Text 30"/>
-          <p:cNvSpPr/>
-          <p:nvPr/>
-        </p:nvSpPr>
-        <p:spPr>
-          <a:xfrm>
-            <a:off x="6428232" y="3364992"/>
-            <a:ext cx="1645920" cy="475488"/>
-          </a:xfrm>
-          <a:prstGeom prst="rect">
-            <a:avLst/>
-          </a:prstGeom>
-          <a:noFill/>
-          <a:ln/>
-        </p:spPr>
-        <p:txBody>
-          <a:bodyPr wrap="square" lIns="0" tIns="0" rIns="0" bIns="0" rtlCol="0" anchor="ctr"/>
-          <a:lstStyle/>
-          <a:p>
-            <a:pPr algn="ctr" indent="0" marL="0">
-              <a:buNone/>
-            </a:pPr>
-            <a:r>
-              <a:rPr lang="en-US" sz="1400" b="1" dirty="0">
-                <a:solidFill>
-                  <a:srgbClr val="0D9488"/>
+              <a:srgbClr val="DB2777"/>
+            </a:solidFill>
+            <a:prstDash val="solid"/>
+          </a:ln>
+        </p:spPr>
+      </p:sp>
+      <p:sp>
+        <p:nvSpPr>
+          <p:cNvPr id="37" name="Text 35"/>
+          <p:cNvSpPr/>
+          <p:nvPr/>
+        </p:nvSpPr>
+        <p:spPr>
+          <a:xfrm>
+            <a:off x="2427732" y="4169664"/>
+            <a:ext cx="685800" cy="475488"/>
+          </a:xfrm>
+          <a:prstGeom prst="rect">
+            <a:avLst/>
+          </a:prstGeom>
+          <a:noFill/>
+          <a:ln/>
+        </p:spPr>
+        <p:txBody>
+          <a:bodyPr wrap="square" lIns="0" tIns="0" rIns="0" bIns="0" rtlCol="0" anchor="ctr"/>
+          <a:lstStyle/>
+          <a:p>
+            <a:pPr algn="ctr" indent="0" marL="0">
+              <a:buNone/>
+            </a:pPr>
+            <a:r>
+              <a:rPr lang="en-US" sz="900" b="1" dirty="0">
+                <a:solidFill>
+                  <a:srgbClr val="9D174D"/>
                 </a:solidFill>
                 <a:latin typeface="Trebuchet MS" pitchFamily="34" charset="0"/>
                 <a:ea typeface="Trebuchet MS" pitchFamily="34" charset="-122"/>
                 <a:cs typeface="Trebuchet MS" pitchFamily="34" charset="-120"/>
               </a:rPr>
-              <a:t>er</a:t>
-            </a:r>
-            <a:endParaRPr lang="en-US" sz="1400" dirty="0"/>
-          </a:p>
-        </p:txBody>
-      </p:sp>
-      <p:sp>
-        <p:nvSpPr>
-          <p:cNvPr id="33" name="Shape 31"/>
-          <p:cNvSpPr/>
-          <p:nvPr/>
-        </p:nvSpPr>
-        <p:spPr>
-          <a:xfrm>
-            <a:off x="365760" y="4096512"/>
-            <a:ext cx="1371600" cy="804672"/>
+              <a:t>r</a:t>
+            </a:r>
+            <a:endParaRPr lang="en-US" sz="900" dirty="0"/>
+          </a:p>
+        </p:txBody>
+      </p:sp>
+      <p:sp>
+        <p:nvSpPr>
+          <p:cNvPr id="38" name="Shape 36"/>
+          <p:cNvSpPr/>
+          <p:nvPr/>
+        </p:nvSpPr>
+        <p:spPr>
+          <a:xfrm>
+            <a:off x="3639312" y="4169664"/>
+            <a:ext cx="685800" cy="475488"/>
           </a:xfrm>
           <a:prstGeom prst="rect">
             <a:avLst>
-              <a:gd name="adj" fmla="val 6818"/>
+              <a:gd name="adj" fmla="val 7692"/>
             </a:avLst>
           </a:prstGeom>
           <a:solidFill>
-            <a:srgbClr val="E2E8F0"/>
-          </a:solidFill>
-          <a:ln w="12700">
-            <a:solidFill>
-              <a:srgbClr val="E2E8F0"/>
-            </a:solidFill>
-            <a:prstDash val="solid"/>
-          </a:ln>
-        </p:spPr>
-      </p:sp>
-      <p:sp>
-        <p:nvSpPr>
-          <p:cNvPr id="34" name="Text 32"/>
-          <p:cNvSpPr/>
-          <p:nvPr/>
-        </p:nvSpPr>
-        <p:spPr>
-          <a:xfrm>
-            <a:off x="365760" y="4096512"/>
-            <a:ext cx="1371600" cy="804672"/>
-          </a:xfrm>
-          <a:prstGeom prst="rect">
-            <a:avLst/>
-          </a:prstGeom>
-          <a:noFill/>
-          <a:ln/>
-        </p:spPr>
-        <p:txBody>
-          <a:bodyPr wrap="square" lIns="0" tIns="0" rIns="0" bIns="0" rtlCol="0" anchor="ctr"/>
-          <a:lstStyle/>
-          <a:p>
-            <a:pPr algn="ctr" indent="0" marL="0">
-              <a:buNone/>
-            </a:pPr>
-            <a:r>
-              <a:rPr lang="en-US" sz="1100" b="1" dirty="0">
-                <a:solidFill>
-                  <a:srgbClr val="475569"/>
+            <a:srgbClr val="FFFFFF"/>
+          </a:solidFill>
+          <a:ln w="12700">
+            <a:solidFill>
+              <a:srgbClr val="DB2777"/>
+            </a:solidFill>
+            <a:prstDash val="solid"/>
+          </a:ln>
+        </p:spPr>
+      </p:sp>
+      <p:sp>
+        <p:nvSpPr>
+          <p:cNvPr id="39" name="Text 37"/>
+          <p:cNvSpPr/>
+          <p:nvPr/>
+        </p:nvSpPr>
+        <p:spPr>
+          <a:xfrm>
+            <a:off x="3639312" y="4169664"/>
+            <a:ext cx="685800" cy="475488"/>
+          </a:xfrm>
+          <a:prstGeom prst="rect">
+            <a:avLst/>
+          </a:prstGeom>
+          <a:noFill/>
+          <a:ln/>
+        </p:spPr>
+        <p:txBody>
+          <a:bodyPr wrap="square" lIns="0" tIns="0" rIns="0" bIns="0" rtlCol="0" anchor="ctr"/>
+          <a:lstStyle/>
+          <a:p>
+            <a:pPr algn="ctr" indent="0" marL="0">
+              <a:buNone/>
+            </a:pPr>
+            <a:r>
+              <a:rPr lang="en-US" sz="900" b="1" dirty="0">
+                <a:solidFill>
+                  <a:srgbClr val="9D174D"/>
                 </a:solidFill>
                 <a:latin typeface="Trebuchet MS" pitchFamily="34" charset="0"/>
                 <a:ea typeface="Trebuchet MS" pitchFamily="34" charset="-122"/>
                 <a:cs typeface="Trebuchet MS" pitchFamily="34" charset="-120"/>
               </a:rPr>
-              <a:t>Phonemes</a:t>
-            </a:r>
-            <a:endParaRPr lang="en-US" sz="1100" dirty="0"/>
-          </a:p>
-        </p:txBody>
-      </p:sp>
-      <p:sp>
-        <p:nvSpPr>
-          <p:cNvPr id="35" name="Shape 33"/>
-          <p:cNvSpPr/>
-          <p:nvPr/>
-        </p:nvSpPr>
-        <p:spPr>
-          <a:xfrm>
-            <a:off x="1874520" y="4096512"/>
-            <a:ext cx="6903720" cy="658368"/>
-          </a:xfrm>
-          <a:prstGeom prst="rect">
-            <a:avLst>
-              <a:gd name="adj" fmla="val 8333"/>
-            </a:avLst>
-          </a:prstGeom>
-          <a:solidFill>
-            <a:srgbClr val="FCE7F3"/>
-          </a:solidFill>
-          <a:ln w="12700">
-            <a:solidFill>
-              <a:srgbClr val="DB2777"/>
-            </a:solidFill>
-            <a:prstDash val="solid"/>
-          </a:ln>
-        </p:spPr>
-      </p:sp>
-      <p:sp>
-        <p:nvSpPr>
-          <p:cNvPr id="36" name="Shape 34"/>
-          <p:cNvSpPr/>
-          <p:nvPr/>
-        </p:nvSpPr>
-        <p:spPr>
-          <a:xfrm>
-            <a:off x="2254649" y="4169664"/>
+              <a:t>e</a:t>
+            </a:r>
+            <a:endParaRPr lang="en-US" sz="900" dirty="0"/>
+          </a:p>
+        </p:txBody>
+      </p:sp>
+      <p:sp>
+        <p:nvSpPr>
+          <p:cNvPr id="40" name="Shape 38"/>
+          <p:cNvSpPr/>
+          <p:nvPr/>
+        </p:nvSpPr>
+        <p:spPr>
+          <a:xfrm>
+            <a:off x="4850892" y="4169664"/>
             <a:ext cx="685800" cy="475488"/>
           </a:xfrm>
           <a:prstGeom prst="rect">
@@ -21826,13 +22900,13 @@
       </p:sp>
       <p:sp>
         <p:nvSpPr>
-          <p:cNvPr id="37" name="Text 35"/>
-          <p:cNvSpPr/>
-          <p:nvPr/>
-        </p:nvSpPr>
-        <p:spPr>
-          <a:xfrm>
-            <a:off x="2254649" y="4169664"/>
+          <p:cNvPr id="41" name="Text 39"/>
+          <p:cNvSpPr/>
+          <p:nvPr/>
+        </p:nvSpPr>
+        <p:spPr>
+          <a:xfrm>
+            <a:off x="4850892" y="4169664"/>
             <a:ext cx="685800" cy="475488"/>
           </a:xfrm>
           <a:prstGeom prst="rect">
@@ -21857,7 +22931,7 @@
                 <a:ea typeface="Trebuchet MS" pitchFamily="34" charset="-122"/>
                 <a:cs typeface="Trebuchet MS" pitchFamily="34" charset="-120"/>
               </a:rPr>
-              <a:t>r</a:t>
+              <a:t>v</a:t>
             </a:r>
             <a:endParaRPr lang="en-US" sz="900" dirty="0"/>
           </a:p>
@@ -21865,13 +22939,13 @@
       </p:sp>
       <p:sp>
         <p:nvSpPr>
-          <p:cNvPr id="38" name="Shape 36"/>
-          <p:cNvSpPr/>
-          <p:nvPr/>
-        </p:nvSpPr>
-        <p:spPr>
-          <a:xfrm>
-            <a:off x="3293146" y="4169664"/>
+          <p:cNvPr id="42" name="Shape 40"/>
+          <p:cNvSpPr/>
+          <p:nvPr/>
+        </p:nvSpPr>
+        <p:spPr>
+          <a:xfrm>
+            <a:off x="6062472" y="4169664"/>
             <a:ext cx="685800" cy="475488"/>
           </a:xfrm>
           <a:prstGeom prst="rect">
@@ -21892,13 +22966,13 @@
       </p:sp>
       <p:sp>
         <p:nvSpPr>
-          <p:cNvPr id="39" name="Text 37"/>
-          <p:cNvSpPr/>
-          <p:nvPr/>
-        </p:nvSpPr>
-        <p:spPr>
-          <a:xfrm>
-            <a:off x="3293146" y="4169664"/>
+          <p:cNvPr id="43" name="Text 41"/>
+          <p:cNvSpPr/>
+          <p:nvPr/>
+        </p:nvSpPr>
+        <p:spPr>
+          <a:xfrm>
+            <a:off x="6062472" y="4169664"/>
             <a:ext cx="685800" cy="475488"/>
           </a:xfrm>
           <a:prstGeom prst="rect">
@@ -21923,7 +22997,7 @@
                 <a:ea typeface="Trebuchet MS" pitchFamily="34" charset="-122"/>
                 <a:cs typeface="Trebuchet MS" pitchFamily="34" charset="-120"/>
               </a:rPr>
-              <a:t>e</a:t>
+              <a:t>iew</a:t>
             </a:r>
             <a:endParaRPr lang="en-US" sz="900" dirty="0"/>
           </a:p>
@@ -21931,13 +23005,13 @@
       </p:sp>
       <p:sp>
         <p:nvSpPr>
-          <p:cNvPr id="40" name="Shape 38"/>
-          <p:cNvSpPr/>
-          <p:nvPr/>
-        </p:nvSpPr>
-        <p:spPr>
-          <a:xfrm>
-            <a:off x="4331643" y="4169664"/>
+          <p:cNvPr id="44" name="Shape 42"/>
+          <p:cNvSpPr/>
+          <p:nvPr/>
+        </p:nvSpPr>
+        <p:spPr>
+          <a:xfrm>
+            <a:off x="7274052" y="4169664"/>
             <a:ext cx="685800" cy="475488"/>
           </a:xfrm>
           <a:prstGeom prst="rect">
@@ -21958,13 +23032,13 @@
       </p:sp>
       <p:sp>
         <p:nvSpPr>
-          <p:cNvPr id="41" name="Text 39"/>
-          <p:cNvSpPr/>
-          <p:nvPr/>
-        </p:nvSpPr>
-        <p:spPr>
-          <a:xfrm>
-            <a:off x="4331643" y="4169664"/>
+          <p:cNvPr id="45" name="Text 43"/>
+          <p:cNvSpPr/>
+          <p:nvPr/>
+        </p:nvSpPr>
+        <p:spPr>
+          <a:xfrm>
+            <a:off x="7274052" y="4169664"/>
             <a:ext cx="685800" cy="475488"/>
           </a:xfrm>
           <a:prstGeom prst="rect">
@@ -21989,205 +23063,7 @@
                 <a:ea typeface="Trebuchet MS" pitchFamily="34" charset="-122"/>
                 <a:cs typeface="Trebuchet MS" pitchFamily="34" charset="-120"/>
               </a:rPr>
-              <a:t>v</a:t>
-            </a:r>
-            <a:endParaRPr lang="en-US" sz="900" dirty="0"/>
-          </a:p>
-        </p:txBody>
-      </p:sp>
-      <p:sp>
-        <p:nvSpPr>
-          <p:cNvPr id="42" name="Shape 40"/>
-          <p:cNvSpPr/>
-          <p:nvPr/>
-        </p:nvSpPr>
-        <p:spPr>
-          <a:xfrm>
-            <a:off x="5370141" y="4169664"/>
-            <a:ext cx="685800" cy="475488"/>
-          </a:xfrm>
-          <a:prstGeom prst="rect">
-            <a:avLst>
-              <a:gd name="adj" fmla="val 7692"/>
-            </a:avLst>
-          </a:prstGeom>
-          <a:solidFill>
-            <a:srgbClr val="FFFFFF"/>
-          </a:solidFill>
-          <a:ln w="12700">
-            <a:solidFill>
-              <a:srgbClr val="DB2777"/>
-            </a:solidFill>
-            <a:prstDash val="solid"/>
-          </a:ln>
-        </p:spPr>
-      </p:sp>
-      <p:sp>
-        <p:nvSpPr>
-          <p:cNvPr id="43" name="Text 41"/>
-          <p:cNvSpPr/>
-          <p:nvPr/>
-        </p:nvSpPr>
-        <p:spPr>
-          <a:xfrm>
-            <a:off x="5370141" y="4169664"/>
-            <a:ext cx="685800" cy="475488"/>
-          </a:xfrm>
-          <a:prstGeom prst="rect">
-            <a:avLst/>
-          </a:prstGeom>
-          <a:noFill/>
-          <a:ln/>
-        </p:spPr>
-        <p:txBody>
-          <a:bodyPr wrap="square" lIns="0" tIns="0" rIns="0" bIns="0" rtlCol="0" anchor="ctr"/>
-          <a:lstStyle/>
-          <a:p>
-            <a:pPr algn="ctr" indent="0" marL="0">
-              <a:buNone/>
-            </a:pPr>
-            <a:r>
-              <a:rPr lang="en-US" sz="900" b="1" dirty="0">
-                <a:solidFill>
-                  <a:srgbClr val="9D174D"/>
-                </a:solidFill>
-                <a:latin typeface="Trebuchet MS" pitchFamily="34" charset="0"/>
-                <a:ea typeface="Trebuchet MS" pitchFamily="34" charset="-122"/>
-                <a:cs typeface="Trebuchet MS" pitchFamily="34" charset="-120"/>
-              </a:rPr>
-              <a:t>ie</a:t>
-            </a:r>
-            <a:endParaRPr lang="en-US" sz="900" dirty="0"/>
-          </a:p>
-        </p:txBody>
-      </p:sp>
-      <p:sp>
-        <p:nvSpPr>
-          <p:cNvPr id="44" name="Shape 42"/>
-          <p:cNvSpPr/>
-          <p:nvPr/>
-        </p:nvSpPr>
-        <p:spPr>
-          <a:xfrm>
-            <a:off x="6408638" y="4169664"/>
-            <a:ext cx="685800" cy="475488"/>
-          </a:xfrm>
-          <a:prstGeom prst="rect">
-            <a:avLst>
-              <a:gd name="adj" fmla="val 7692"/>
-            </a:avLst>
-          </a:prstGeom>
-          <a:solidFill>
-            <a:srgbClr val="FFFFFF"/>
-          </a:solidFill>
-          <a:ln w="12700">
-            <a:solidFill>
-              <a:srgbClr val="DB2777"/>
-            </a:solidFill>
-            <a:prstDash val="solid"/>
-          </a:ln>
-        </p:spPr>
-      </p:sp>
-      <p:sp>
-        <p:nvSpPr>
-          <p:cNvPr id="45" name="Text 43"/>
-          <p:cNvSpPr/>
-          <p:nvPr/>
-        </p:nvSpPr>
-        <p:spPr>
-          <a:xfrm>
-            <a:off x="6408638" y="4169664"/>
-            <a:ext cx="685800" cy="475488"/>
-          </a:xfrm>
-          <a:prstGeom prst="rect">
-            <a:avLst/>
-          </a:prstGeom>
-          <a:noFill/>
-          <a:ln/>
-        </p:spPr>
-        <p:txBody>
-          <a:bodyPr wrap="square" lIns="0" tIns="0" rIns="0" bIns="0" rtlCol="0" anchor="ctr"/>
-          <a:lstStyle/>
-          <a:p>
-            <a:pPr algn="ctr" indent="0" marL="0">
-              <a:buNone/>
-            </a:pPr>
-            <a:r>
-              <a:rPr lang="en-US" sz="900" b="1" dirty="0">
-                <a:solidFill>
-                  <a:srgbClr val="9D174D"/>
-                </a:solidFill>
-                <a:latin typeface="Trebuchet MS" pitchFamily="34" charset="0"/>
-                <a:ea typeface="Trebuchet MS" pitchFamily="34" charset="-122"/>
-                <a:cs typeface="Trebuchet MS" pitchFamily="34" charset="-120"/>
-              </a:rPr>
-              <a:t>w</a:t>
-            </a:r>
-            <a:endParaRPr lang="en-US" sz="900" dirty="0"/>
-          </a:p>
-        </p:txBody>
-      </p:sp>
-      <p:sp>
-        <p:nvSpPr>
-          <p:cNvPr id="46" name="Shape 44"/>
-          <p:cNvSpPr/>
-          <p:nvPr/>
-        </p:nvSpPr>
-        <p:spPr>
-          <a:xfrm>
-            <a:off x="7447135" y="4169664"/>
-            <a:ext cx="685800" cy="475488"/>
-          </a:xfrm>
-          <a:prstGeom prst="rect">
-            <a:avLst>
-              <a:gd name="adj" fmla="val 7692"/>
-            </a:avLst>
-          </a:prstGeom>
-          <a:solidFill>
-            <a:srgbClr val="FFFFFF"/>
-          </a:solidFill>
-          <a:ln w="12700">
-            <a:solidFill>
-              <a:srgbClr val="DB2777"/>
-            </a:solidFill>
-            <a:prstDash val="solid"/>
-          </a:ln>
-        </p:spPr>
-      </p:sp>
-      <p:sp>
-        <p:nvSpPr>
-          <p:cNvPr id="47" name="Text 45"/>
-          <p:cNvSpPr/>
-          <p:nvPr/>
-        </p:nvSpPr>
-        <p:spPr>
-          <a:xfrm>
-            <a:off x="7447135" y="4169664"/>
-            <a:ext cx="685800" cy="475488"/>
-          </a:xfrm>
-          <a:prstGeom prst="rect">
-            <a:avLst/>
-          </a:prstGeom>
-          <a:noFill/>
-          <a:ln/>
-        </p:spPr>
-        <p:txBody>
-          <a:bodyPr wrap="square" lIns="0" tIns="0" rIns="0" bIns="0" rtlCol="0" anchor="ctr"/>
-          <a:lstStyle/>
-          <a:p>
-            <a:pPr algn="ctr" indent="0" marL="0">
-              <a:buNone/>
-            </a:pPr>
-            <a:r>
-              <a:rPr lang="en-US" sz="900" b="1" dirty="0">
-                <a:solidFill>
-                  <a:srgbClr val="9D174D"/>
-                </a:solidFill>
-                <a:latin typeface="Trebuchet MS" pitchFamily="34" charset="0"/>
-                <a:ea typeface="Trebuchet MS" pitchFamily="34" charset="-122"/>
-                <a:cs typeface="Trebuchet MS" pitchFamily="34" charset="-120"/>
-              </a:rPr>
-              <a:t>er</a:t>
+              <a:t>ed</a:t>
             </a:r>
             <a:endParaRPr lang="en-US" sz="900" dirty="0"/>
           </a:p>
@@ -22479,7 +23355,7 @@
                 <a:ea typeface="Calibri" pitchFamily="34" charset="-122"/>
                 <a:cs typeface="Calibri" pitchFamily="34" charset="-120"/>
               </a:rPr>
-              <a:t>Word Labs  •  wordlabs.app  •  Root: 'review' = look at again, examine</a:t>
+              <a:t>Word Labs  •  wordlabs.app  •  Root: 'review' = look at again carefully</a:t>
             </a:r>
             <a:endParaRPr lang="en-US" sz="800" dirty="0"/>
           </a:p>
@@ -22618,7 +23494,7 @@
                 <a:ea typeface="Trebuchet MS" pitchFamily="34" charset="-122"/>
                 <a:cs typeface="Trebuchet MS" pitchFamily="34" charset="-120"/>
               </a:rPr>
-              <a:t>reviewing</a:t>
+              <a:t>reviewable</a:t>
             </a:r>
             <a:endParaRPr lang="en-US" sz="2800" dirty="0"/>
           </a:p>
@@ -23306,7 +24182,7 @@
                 <a:ea typeface="Calibri" pitchFamily="34" charset="-122"/>
                 <a:cs typeface="Calibri" pitchFamily="34" charset="-120"/>
               </a:rPr>
-              <a:t>Word Labs  •  wordlabs.app  •  Root: 'review' = look at again, examine</a:t>
+              <a:t>Word Labs  •  wordlabs.app  •  Root: 'review' = look at again carefully</a:t>
             </a:r>
             <a:endParaRPr lang="en-US" sz="800" dirty="0"/>
           </a:p>
@@ -23445,7 +24321,7 @@
                 <a:ea typeface="Trebuchet MS" pitchFamily="34" charset="-122"/>
                 <a:cs typeface="Trebuchet MS" pitchFamily="34" charset="-120"/>
               </a:rPr>
-              <a:t>reviewing</a:t>
+              <a:t>reviewable</a:t>
             </a:r>
             <a:endParaRPr lang="en-US" sz="2800" dirty="0"/>
           </a:p>
@@ -23525,7 +24401,7 @@
         </p:nvSpPr>
         <p:spPr>
           <a:xfrm>
-            <a:off x="2938272" y="2258568"/>
+            <a:off x="2221992" y="2258568"/>
             <a:ext cx="1828800" cy="292608"/>
           </a:xfrm>
           <a:prstGeom prst="rect">
@@ -23534,11 +24410,11 @@
             </a:avLst>
           </a:prstGeom>
           <a:solidFill>
-            <a:srgbClr val="CCFBF1"/>
+            <a:srgbClr val="DDD6FE"/>
           </a:solidFill>
           <a:ln w="19050">
             <a:solidFill>
-              <a:srgbClr val="0D9488"/>
+              <a:srgbClr val="7C3AED"/>
             </a:solidFill>
             <a:prstDash val="solid"/>
           </a:ln>
@@ -23559,7 +24435,7 @@
         </p:nvSpPr>
         <p:spPr>
           <a:xfrm>
-            <a:off x="2938272" y="2258568"/>
+            <a:off x="2221992" y="2258568"/>
             <a:ext cx="1828800" cy="292608"/>
           </a:xfrm>
           <a:prstGeom prst="rect">
@@ -23578,13 +24454,13 @@
             <a:r>
               <a:rPr lang="en-US" sz="1300" b="1" dirty="0">
                 <a:solidFill>
-                  <a:srgbClr val="0F766E"/>
+                  <a:srgbClr val="4C1D95"/>
                 </a:solidFill>
                 <a:latin typeface="Trebuchet MS" pitchFamily="34" charset="0"/>
                 <a:ea typeface="Trebuchet MS" pitchFamily="34" charset="-122"/>
                 <a:cs typeface="Trebuchet MS" pitchFamily="34" charset="-120"/>
               </a:rPr>
-              <a:t>review</a:t>
+              <a:t>re</a:t>
             </a:r>
             <a:endParaRPr lang="en-US" sz="1300" dirty="0"/>
           </a:p>
@@ -23598,7 +24474,7 @@
         </p:nvSpPr>
         <p:spPr>
           <a:xfrm>
-            <a:off x="2938272" y="2569464"/>
+            <a:off x="2221992" y="2569464"/>
             <a:ext cx="1828800" cy="201168"/>
           </a:xfrm>
           <a:prstGeom prst="rect">
@@ -23623,7 +24499,7 @@
                 <a:ea typeface="Calibri" pitchFamily="34" charset="-122"/>
                 <a:cs typeface="Calibri" pitchFamily="34" charset="-120"/>
               </a:rPr>
-              <a:t>look at again</a:t>
+              <a:t>again</a:t>
             </a:r>
             <a:endParaRPr lang="en-US" sz="850" dirty="0"/>
           </a:p>
@@ -23637,7 +24513,7 @@
         </p:nvSpPr>
         <p:spPr>
           <a:xfrm>
-            <a:off x="5803392" y="2258568"/>
+            <a:off x="4370832" y="2258568"/>
             <a:ext cx="1828800" cy="292608"/>
           </a:xfrm>
           <a:prstGeom prst="rect">
@@ -23671,7 +24547,7 @@
         </p:nvSpPr>
         <p:spPr>
           <a:xfrm>
-            <a:off x="5803392" y="2258568"/>
+            <a:off x="4370832" y="2258568"/>
             <a:ext cx="1828800" cy="292608"/>
           </a:xfrm>
           <a:prstGeom prst="rect">
@@ -23696,7 +24572,7 @@
                 <a:ea typeface="Trebuchet MS" pitchFamily="34" charset="-122"/>
                 <a:cs typeface="Trebuchet MS" pitchFamily="34" charset="-120"/>
               </a:rPr>
-              <a:t>ing</a:t>
+              <a:t>view</a:t>
             </a:r>
             <a:endParaRPr lang="en-US" sz="1300" dirty="0"/>
           </a:p>
@@ -23710,7 +24586,7 @@
         </p:nvSpPr>
         <p:spPr>
           <a:xfrm>
-            <a:off x="5803392" y="2569464"/>
+            <a:off x="4370832" y="2569464"/>
             <a:ext cx="1828800" cy="201168"/>
           </a:xfrm>
           <a:prstGeom prst="rect">
@@ -23735,7 +24611,7 @@
                 <a:ea typeface="Calibri" pitchFamily="34" charset="-122"/>
                 <a:cs typeface="Calibri" pitchFamily="34" charset="-120"/>
               </a:rPr>
-              <a:t>action happening now</a:t>
+              <a:t>see or look</a:t>
             </a:r>
             <a:endParaRPr lang="en-US" sz="850" dirty="0"/>
           </a:p>
@@ -23744,6 +24620,118 @@
       <p:sp>
         <p:nvSpPr>
           <p:cNvPr id="22" name="Shape 20"/>
+          <p:cNvSpPr/>
+          <p:nvPr/>
+        </p:nvSpPr>
+        <p:spPr>
+          <a:xfrm>
+            <a:off x="6519672" y="2258568"/>
+            <a:ext cx="1828800" cy="292608"/>
+          </a:xfrm>
+          <a:prstGeom prst="rect">
+            <a:avLst>
+              <a:gd name="adj" fmla="val 25000"/>
+            </a:avLst>
+          </a:prstGeom>
+          <a:solidFill>
+            <a:srgbClr val="FCE7F3"/>
+          </a:solidFill>
+          <a:ln w="19050">
+            <a:solidFill>
+              <a:srgbClr val="DB2777"/>
+            </a:solidFill>
+            <a:prstDash val="solid"/>
+          </a:ln>
+          <a:effectLst>
+            <a:outerShdw sx="100000" sy="100000" kx="0" ky="0" algn="bl" rotWithShape="0" blurRad="101600" dist="38100" dir="8100000">
+              <a:srgbClr val="000000">
+                <a:alpha val="12000"/>
+              </a:srgbClr>
+            </a:outerShdw>
+          </a:effectLst>
+        </p:spPr>
+      </p:sp>
+      <p:sp>
+        <p:nvSpPr>
+          <p:cNvPr id="23" name="Text 21"/>
+          <p:cNvSpPr/>
+          <p:nvPr/>
+        </p:nvSpPr>
+        <p:spPr>
+          <a:xfrm>
+            <a:off x="6519672" y="2258568"/>
+            <a:ext cx="1828800" cy="292608"/>
+          </a:xfrm>
+          <a:prstGeom prst="rect">
+            <a:avLst/>
+          </a:prstGeom>
+          <a:noFill/>
+          <a:ln/>
+        </p:spPr>
+        <p:txBody>
+          <a:bodyPr wrap="square" lIns="0" tIns="0" rIns="0" bIns="0" rtlCol="0" anchor="ctr"/>
+          <a:lstStyle/>
+          <a:p>
+            <a:pPr algn="ctr" indent="0" marL="0">
+              <a:buNone/>
+            </a:pPr>
+            <a:r>
+              <a:rPr lang="en-US" sz="1300" b="1" dirty="0">
+                <a:solidFill>
+                  <a:srgbClr val="9D174D"/>
+                </a:solidFill>
+                <a:latin typeface="Trebuchet MS" pitchFamily="34" charset="0"/>
+                <a:ea typeface="Trebuchet MS" pitchFamily="34" charset="-122"/>
+                <a:cs typeface="Trebuchet MS" pitchFamily="34" charset="-120"/>
+              </a:rPr>
+              <a:t>able</a:t>
+            </a:r>
+            <a:endParaRPr lang="en-US" sz="1300" dirty="0"/>
+          </a:p>
+        </p:txBody>
+      </p:sp>
+      <p:sp>
+        <p:nvSpPr>
+          <p:cNvPr id="24" name="Text 22"/>
+          <p:cNvSpPr/>
+          <p:nvPr/>
+        </p:nvSpPr>
+        <p:spPr>
+          <a:xfrm>
+            <a:off x="6519672" y="2569464"/>
+            <a:ext cx="1828800" cy="201168"/>
+          </a:xfrm>
+          <a:prstGeom prst="rect">
+            <a:avLst/>
+          </a:prstGeom>
+          <a:noFill/>
+          <a:ln/>
+        </p:spPr>
+        <p:txBody>
+          <a:bodyPr wrap="square" lIns="0" tIns="0" rIns="0" bIns="0" rtlCol="0" anchor="t"/>
+          <a:lstStyle/>
+          <a:p>
+            <a:pPr algn="ctr" indent="0" marL="0">
+              <a:buNone/>
+            </a:pPr>
+            <a:r>
+              <a:rPr lang="en-US" sz="850" dirty="0">
+                <a:solidFill>
+                  <a:srgbClr val="475569"/>
+                </a:solidFill>
+                <a:latin typeface="Calibri" pitchFamily="34" charset="0"/>
+                <a:ea typeface="Calibri" pitchFamily="34" charset="-122"/>
+                <a:cs typeface="Calibri" pitchFamily="34" charset="-120"/>
+              </a:rPr>
+              <a:t>able to be</a:t>
+            </a:r>
+            <a:endParaRPr lang="en-US" sz="850" dirty="0"/>
+          </a:p>
+        </p:txBody>
+      </p:sp>
+      <p:sp>
+        <p:nvSpPr>
+          <p:cNvPr id="25" name="Shape 23"/>
           <p:cNvSpPr/>
           <p:nvPr/>
         </p:nvSpPr>
@@ -23770,7 +24758,7 @@
       </p:sp>
       <p:sp>
         <p:nvSpPr>
-          <p:cNvPr id="23" name="Text 21"/>
+          <p:cNvPr id="26" name="Text 24"/>
           <p:cNvSpPr/>
           <p:nvPr/>
         </p:nvSpPr>
@@ -23809,7 +24797,7 @@
       </p:sp>
       <p:sp>
         <p:nvSpPr>
-          <p:cNvPr id="24" name="Shape 22"/>
+          <p:cNvPr id="27" name="Shape 25"/>
           <p:cNvSpPr/>
           <p:nvPr/>
         </p:nvSpPr>
@@ -23836,7 +24824,7 @@
       </p:sp>
       <p:sp>
         <p:nvSpPr>
-          <p:cNvPr id="25" name="Text 23"/>
+          <p:cNvPr id="28" name="Text 26"/>
           <p:cNvSpPr/>
           <p:nvPr/>
         </p:nvSpPr>
@@ -23875,7 +24863,7 @@
       </p:sp>
       <p:sp>
         <p:nvSpPr>
-          <p:cNvPr id="26" name="Shape 24"/>
+          <p:cNvPr id="29" name="Shape 27"/>
           <p:cNvSpPr/>
           <p:nvPr/>
         </p:nvSpPr>
@@ -23902,7 +24890,7 @@
       </p:sp>
       <p:sp>
         <p:nvSpPr>
-          <p:cNvPr id="27" name="Text 25"/>
+          <p:cNvPr id="30" name="Text 28"/>
           <p:cNvSpPr/>
           <p:nvPr/>
         </p:nvSpPr>
@@ -23941,7 +24929,7 @@
       </p:sp>
       <p:sp>
         <p:nvSpPr>
-          <p:cNvPr id="28" name="Shape 26"/>
+          <p:cNvPr id="31" name="Shape 29"/>
           <p:cNvSpPr/>
           <p:nvPr/>
         </p:nvSpPr>
@@ -23968,7 +24956,7 @@
       </p:sp>
       <p:sp>
         <p:nvSpPr>
-          <p:cNvPr id="29" name="Text 27"/>
+          <p:cNvPr id="32" name="Text 30"/>
           <p:cNvSpPr/>
           <p:nvPr/>
         </p:nvSpPr>
@@ -24291,7 +25279,7 @@
                 <a:ea typeface="Calibri" pitchFamily="34" charset="-122"/>
                 <a:cs typeface="Calibri" pitchFamily="34" charset="-120"/>
               </a:rPr>
-              <a:t>Word Labs  •  wordlabs.app  •  Root: 'review' = look at again, examine</a:t>
+              <a:t>Word Labs  •  wordlabs.app  •  Root: 'review' = look at again carefully</a:t>
             </a:r>
             <a:endParaRPr lang="en-US" sz="800" dirty="0"/>
           </a:p>
@@ -24364,7 +25352,7 @@
                 <a:ea typeface="Trebuchet MS" pitchFamily="34" charset="-122"/>
                 <a:cs typeface="Trebuchet MS" pitchFamily="34" charset="-120"/>
               </a:rPr>
-              <a:t>We are learning that the root 'review' means 'look at again, examine'.</a:t>
+              <a:t>We are learning that the root 'review' means 'look at again carefully'.</a:t>
             </a:r>
             <a:endParaRPr lang="en-US" sz="2000" dirty="0"/>
           </a:p>
@@ -25010,7 +25998,7 @@
                 <a:ea typeface="Calibri" pitchFamily="34" charset="-122"/>
                 <a:cs typeface="Calibri" pitchFamily="34" charset="-120"/>
               </a:rPr>
-              <a:t>Word Labs  •  wordlabs.app  •  Root: 'review' = look at again, examine</a:t>
+              <a:t>Word Labs  •  wordlabs.app  •  Root: 'review' = look at again carefully</a:t>
             </a:r>
             <a:endParaRPr lang="en-US" sz="800" dirty="0"/>
           </a:p>
@@ -25149,7 +26137,7 @@
                 <a:ea typeface="Trebuchet MS" pitchFamily="34" charset="-122"/>
                 <a:cs typeface="Trebuchet MS" pitchFamily="34" charset="-120"/>
               </a:rPr>
-              <a:t>reviewing</a:t>
+              <a:t>reviewable</a:t>
             </a:r>
             <a:endParaRPr lang="en-US" sz="2800" dirty="0"/>
           </a:p>
@@ -25229,7 +26217,7 @@
         </p:nvSpPr>
         <p:spPr>
           <a:xfrm>
-            <a:off x="2938272" y="2258568"/>
+            <a:off x="2221992" y="2258568"/>
             <a:ext cx="1828800" cy="292608"/>
           </a:xfrm>
           <a:prstGeom prst="rect">
@@ -25238,11 +26226,11 @@
             </a:avLst>
           </a:prstGeom>
           <a:solidFill>
-            <a:srgbClr val="CCFBF1"/>
+            <a:srgbClr val="DDD6FE"/>
           </a:solidFill>
           <a:ln w="19050">
             <a:solidFill>
-              <a:srgbClr val="0D9488"/>
+              <a:srgbClr val="7C3AED"/>
             </a:solidFill>
             <a:prstDash val="solid"/>
           </a:ln>
@@ -25263,7 +26251,7 @@
         </p:nvSpPr>
         <p:spPr>
           <a:xfrm>
-            <a:off x="2938272" y="2258568"/>
+            <a:off x="2221992" y="2258568"/>
             <a:ext cx="1828800" cy="292608"/>
           </a:xfrm>
           <a:prstGeom prst="rect">
@@ -25282,13 +26270,13 @@
             <a:r>
               <a:rPr lang="en-US" sz="1300" b="1" dirty="0">
                 <a:solidFill>
-                  <a:srgbClr val="0F766E"/>
+                  <a:srgbClr val="4C1D95"/>
                 </a:solidFill>
                 <a:latin typeface="Trebuchet MS" pitchFamily="34" charset="0"/>
                 <a:ea typeface="Trebuchet MS" pitchFamily="34" charset="-122"/>
                 <a:cs typeface="Trebuchet MS" pitchFamily="34" charset="-120"/>
               </a:rPr>
-              <a:t>review</a:t>
+              <a:t>re</a:t>
             </a:r>
             <a:endParaRPr lang="en-US" sz="1300" dirty="0"/>
           </a:p>
@@ -25302,7 +26290,7 @@
         </p:nvSpPr>
         <p:spPr>
           <a:xfrm>
-            <a:off x="2938272" y="2569464"/>
+            <a:off x="2221992" y="2569464"/>
             <a:ext cx="1828800" cy="201168"/>
           </a:xfrm>
           <a:prstGeom prst="rect">
@@ -25327,7 +26315,7 @@
                 <a:ea typeface="Calibri" pitchFamily="34" charset="-122"/>
                 <a:cs typeface="Calibri" pitchFamily="34" charset="-120"/>
               </a:rPr>
-              <a:t>look at again</a:t>
+              <a:t>again</a:t>
             </a:r>
             <a:endParaRPr lang="en-US" sz="850" dirty="0"/>
           </a:p>
@@ -25341,7 +26329,7 @@
         </p:nvSpPr>
         <p:spPr>
           <a:xfrm>
-            <a:off x="5803392" y="2258568"/>
+            <a:off x="4370832" y="2258568"/>
             <a:ext cx="1828800" cy="292608"/>
           </a:xfrm>
           <a:prstGeom prst="rect">
@@ -25375,7 +26363,7 @@
         </p:nvSpPr>
         <p:spPr>
           <a:xfrm>
-            <a:off x="5803392" y="2258568"/>
+            <a:off x="4370832" y="2258568"/>
             <a:ext cx="1828800" cy="292608"/>
           </a:xfrm>
           <a:prstGeom prst="rect">
@@ -25400,7 +26388,7 @@
                 <a:ea typeface="Trebuchet MS" pitchFamily="34" charset="-122"/>
                 <a:cs typeface="Trebuchet MS" pitchFamily="34" charset="-120"/>
               </a:rPr>
-              <a:t>ing</a:t>
+              <a:t>view</a:t>
             </a:r>
             <a:endParaRPr lang="en-US" sz="1300" dirty="0"/>
           </a:p>
@@ -25414,7 +26402,7 @@
         </p:nvSpPr>
         <p:spPr>
           <a:xfrm>
-            <a:off x="5803392" y="2569464"/>
+            <a:off x="4370832" y="2569464"/>
             <a:ext cx="1828800" cy="201168"/>
           </a:xfrm>
           <a:prstGeom prst="rect">
@@ -25439,7 +26427,7 @@
                 <a:ea typeface="Calibri" pitchFamily="34" charset="-122"/>
                 <a:cs typeface="Calibri" pitchFamily="34" charset="-120"/>
               </a:rPr>
-              <a:t>action happening now</a:t>
+              <a:t>see or look</a:t>
             </a:r>
             <a:endParaRPr lang="en-US" sz="850" dirty="0"/>
           </a:p>
@@ -25448,6 +26436,118 @@
       <p:sp>
         <p:nvSpPr>
           <p:cNvPr id="22" name="Shape 20"/>
+          <p:cNvSpPr/>
+          <p:nvPr/>
+        </p:nvSpPr>
+        <p:spPr>
+          <a:xfrm>
+            <a:off x="6519672" y="2258568"/>
+            <a:ext cx="1828800" cy="292608"/>
+          </a:xfrm>
+          <a:prstGeom prst="rect">
+            <a:avLst>
+              <a:gd name="adj" fmla="val 25000"/>
+            </a:avLst>
+          </a:prstGeom>
+          <a:solidFill>
+            <a:srgbClr val="FCE7F3"/>
+          </a:solidFill>
+          <a:ln w="19050">
+            <a:solidFill>
+              <a:srgbClr val="DB2777"/>
+            </a:solidFill>
+            <a:prstDash val="solid"/>
+          </a:ln>
+          <a:effectLst>
+            <a:outerShdw sx="100000" sy="100000" kx="0" ky="0" algn="bl" rotWithShape="0" blurRad="101600" dist="38100" dir="8100000">
+              <a:srgbClr val="000000">
+                <a:alpha val="12000"/>
+              </a:srgbClr>
+            </a:outerShdw>
+          </a:effectLst>
+        </p:spPr>
+      </p:sp>
+      <p:sp>
+        <p:nvSpPr>
+          <p:cNvPr id="23" name="Text 21"/>
+          <p:cNvSpPr/>
+          <p:nvPr/>
+        </p:nvSpPr>
+        <p:spPr>
+          <a:xfrm>
+            <a:off x="6519672" y="2258568"/>
+            <a:ext cx="1828800" cy="292608"/>
+          </a:xfrm>
+          <a:prstGeom prst="rect">
+            <a:avLst/>
+          </a:prstGeom>
+          <a:noFill/>
+          <a:ln/>
+        </p:spPr>
+        <p:txBody>
+          <a:bodyPr wrap="square" lIns="0" tIns="0" rIns="0" bIns="0" rtlCol="0" anchor="ctr"/>
+          <a:lstStyle/>
+          <a:p>
+            <a:pPr algn="ctr" indent="0" marL="0">
+              <a:buNone/>
+            </a:pPr>
+            <a:r>
+              <a:rPr lang="en-US" sz="1300" b="1" dirty="0">
+                <a:solidFill>
+                  <a:srgbClr val="9D174D"/>
+                </a:solidFill>
+                <a:latin typeface="Trebuchet MS" pitchFamily="34" charset="0"/>
+                <a:ea typeface="Trebuchet MS" pitchFamily="34" charset="-122"/>
+                <a:cs typeface="Trebuchet MS" pitchFamily="34" charset="-120"/>
+              </a:rPr>
+              <a:t>able</a:t>
+            </a:r>
+            <a:endParaRPr lang="en-US" sz="1300" dirty="0"/>
+          </a:p>
+        </p:txBody>
+      </p:sp>
+      <p:sp>
+        <p:nvSpPr>
+          <p:cNvPr id="24" name="Text 22"/>
+          <p:cNvSpPr/>
+          <p:nvPr/>
+        </p:nvSpPr>
+        <p:spPr>
+          <a:xfrm>
+            <a:off x="6519672" y="2569464"/>
+            <a:ext cx="1828800" cy="201168"/>
+          </a:xfrm>
+          <a:prstGeom prst="rect">
+            <a:avLst/>
+          </a:prstGeom>
+          <a:noFill/>
+          <a:ln/>
+        </p:spPr>
+        <p:txBody>
+          <a:bodyPr wrap="square" lIns="0" tIns="0" rIns="0" bIns="0" rtlCol="0" anchor="t"/>
+          <a:lstStyle/>
+          <a:p>
+            <a:pPr algn="ctr" indent="0" marL="0">
+              <a:buNone/>
+            </a:pPr>
+            <a:r>
+              <a:rPr lang="en-US" sz="850" dirty="0">
+                <a:solidFill>
+                  <a:srgbClr val="475569"/>
+                </a:solidFill>
+                <a:latin typeface="Calibri" pitchFamily="34" charset="0"/>
+                <a:ea typeface="Calibri" pitchFamily="34" charset="-122"/>
+                <a:cs typeface="Calibri" pitchFamily="34" charset="-120"/>
+              </a:rPr>
+              <a:t>able to be</a:t>
+            </a:r>
+            <a:endParaRPr lang="en-US" sz="850" dirty="0"/>
+          </a:p>
+        </p:txBody>
+      </p:sp>
+      <p:sp>
+        <p:nvSpPr>
+          <p:cNvPr id="25" name="Shape 23"/>
           <p:cNvSpPr/>
           <p:nvPr/>
         </p:nvSpPr>
@@ -25474,7 +26574,7 @@
       </p:sp>
       <p:sp>
         <p:nvSpPr>
-          <p:cNvPr id="23" name="Text 21"/>
+          <p:cNvPr id="26" name="Text 24"/>
           <p:cNvSpPr/>
           <p:nvPr/>
         </p:nvSpPr>
@@ -25513,7 +26613,7 @@
       </p:sp>
       <p:sp>
         <p:nvSpPr>
-          <p:cNvPr id="24" name="Shape 22"/>
+          <p:cNvPr id="27" name="Shape 25"/>
           <p:cNvSpPr/>
           <p:nvPr/>
         </p:nvSpPr>
@@ -25540,14 +26640,14 @@
       </p:sp>
       <p:sp>
         <p:nvSpPr>
-          <p:cNvPr id="25" name="Shape 23"/>
-          <p:cNvSpPr/>
-          <p:nvPr/>
-        </p:nvSpPr>
-        <p:spPr>
-          <a:xfrm>
-            <a:off x="2313432" y="3364992"/>
-            <a:ext cx="1645920" cy="475488"/>
+          <p:cNvPr id="28" name="Shape 26"/>
+          <p:cNvSpPr/>
+          <p:nvPr/>
+        </p:nvSpPr>
+        <p:spPr>
+          <a:xfrm>
+            <a:off x="1975104" y="3364992"/>
+            <a:ext cx="1554480" cy="475488"/>
           </a:xfrm>
           <a:prstGeom prst="rect">
             <a:avLst>
@@ -25567,14 +26667,14 @@
       </p:sp>
       <p:sp>
         <p:nvSpPr>
-          <p:cNvPr id="26" name="Text 24"/>
-          <p:cNvSpPr/>
-          <p:nvPr/>
-        </p:nvSpPr>
-        <p:spPr>
-          <a:xfrm>
-            <a:off x="2313432" y="3364992"/>
-            <a:ext cx="1645920" cy="475488"/>
+          <p:cNvPr id="29" name="Text 27"/>
+          <p:cNvSpPr/>
+          <p:nvPr/>
+        </p:nvSpPr>
+        <p:spPr>
+          <a:xfrm>
+            <a:off x="1975104" y="3364992"/>
+            <a:ext cx="1554480" cy="475488"/>
           </a:xfrm>
           <a:prstGeom prst="rect">
             <a:avLst/>
@@ -25606,14 +26706,14 @@
       </p:sp>
       <p:sp>
         <p:nvSpPr>
-          <p:cNvPr id="27" name="Text 25"/>
-          <p:cNvSpPr/>
-          <p:nvPr/>
-        </p:nvSpPr>
-        <p:spPr>
-          <a:xfrm>
-            <a:off x="3959352" y="3364992"/>
-            <a:ext cx="411480" cy="475488"/>
+          <p:cNvPr id="30" name="Text 28"/>
+          <p:cNvSpPr/>
+          <p:nvPr/>
+        </p:nvSpPr>
+        <p:spPr>
+          <a:xfrm>
+            <a:off x="3529584" y="3364992"/>
+            <a:ext cx="73152" cy="475488"/>
           </a:xfrm>
           <a:prstGeom prst="rect">
             <a:avLst/>
@@ -25645,14 +26745,14 @@
       </p:sp>
       <p:sp>
         <p:nvSpPr>
-          <p:cNvPr id="28" name="Shape 26"/>
-          <p:cNvSpPr/>
-          <p:nvPr/>
-        </p:nvSpPr>
-        <p:spPr>
-          <a:xfrm>
-            <a:off x="4370832" y="3364992"/>
-            <a:ext cx="1645920" cy="475488"/>
+          <p:cNvPr id="31" name="Shape 29"/>
+          <p:cNvSpPr/>
+          <p:nvPr/>
+        </p:nvSpPr>
+        <p:spPr>
+          <a:xfrm>
+            <a:off x="3602736" y="3364992"/>
+            <a:ext cx="1554480" cy="475488"/>
           </a:xfrm>
           <a:prstGeom prst="rect">
             <a:avLst>
@@ -25672,14 +26772,14 @@
       </p:sp>
       <p:sp>
         <p:nvSpPr>
-          <p:cNvPr id="29" name="Text 27"/>
-          <p:cNvSpPr/>
-          <p:nvPr/>
-        </p:nvSpPr>
-        <p:spPr>
-          <a:xfrm>
-            <a:off x="4370832" y="3364992"/>
-            <a:ext cx="1645920" cy="475488"/>
+          <p:cNvPr id="32" name="Text 30"/>
+          <p:cNvSpPr/>
+          <p:nvPr/>
+        </p:nvSpPr>
+        <p:spPr>
+          <a:xfrm>
+            <a:off x="3602736" y="3364992"/>
+            <a:ext cx="1554480" cy="475488"/>
           </a:xfrm>
           <a:prstGeom prst="rect">
             <a:avLst/>
@@ -25711,14 +26811,14 @@
       </p:sp>
       <p:sp>
         <p:nvSpPr>
-          <p:cNvPr id="30" name="Text 28"/>
-          <p:cNvSpPr/>
-          <p:nvPr/>
-        </p:nvSpPr>
-        <p:spPr>
-          <a:xfrm>
-            <a:off x="6016752" y="3364992"/>
-            <a:ext cx="411480" cy="475488"/>
+          <p:cNvPr id="33" name="Text 31"/>
+          <p:cNvSpPr/>
+          <p:nvPr/>
+        </p:nvSpPr>
+        <p:spPr>
+          <a:xfrm>
+            <a:off x="5157216" y="3364992"/>
+            <a:ext cx="73152" cy="475488"/>
           </a:xfrm>
           <a:prstGeom prst="rect">
             <a:avLst/>
@@ -25750,14 +26850,14 @@
       </p:sp>
       <p:sp>
         <p:nvSpPr>
-          <p:cNvPr id="31" name="Shape 29"/>
-          <p:cNvSpPr/>
-          <p:nvPr/>
-        </p:nvSpPr>
-        <p:spPr>
-          <a:xfrm>
-            <a:off x="6428232" y="3364992"/>
-            <a:ext cx="1645920" cy="475488"/>
+          <p:cNvPr id="34" name="Shape 32"/>
+          <p:cNvSpPr/>
+          <p:nvPr/>
+        </p:nvSpPr>
+        <p:spPr>
+          <a:xfrm>
+            <a:off x="5230368" y="3364992"/>
+            <a:ext cx="1554480" cy="475488"/>
           </a:xfrm>
           <a:prstGeom prst="rect">
             <a:avLst>
@@ -25777,14 +26877,14 @@
       </p:sp>
       <p:sp>
         <p:nvSpPr>
-          <p:cNvPr id="32" name="Text 30"/>
-          <p:cNvSpPr/>
-          <p:nvPr/>
-        </p:nvSpPr>
-        <p:spPr>
-          <a:xfrm>
-            <a:off x="6428232" y="3364992"/>
-            <a:ext cx="1645920" cy="475488"/>
+          <p:cNvPr id="35" name="Text 33"/>
+          <p:cNvSpPr/>
+          <p:nvPr/>
+        </p:nvSpPr>
+        <p:spPr>
+          <a:xfrm>
+            <a:off x="5230368" y="3364992"/>
+            <a:ext cx="1554480" cy="475488"/>
           </a:xfrm>
           <a:prstGeom prst="rect">
             <a:avLst/>
@@ -25808,7 +26908,7 @@
                 <a:ea typeface="Trebuchet MS" pitchFamily="34" charset="-122"/>
                 <a:cs typeface="Trebuchet MS" pitchFamily="34" charset="-120"/>
               </a:rPr>
-              <a:t>ing</a:t>
+              <a:t>a</a:t>
             </a:r>
             <a:endParaRPr lang="en-US" sz="1400" dirty="0"/>
           </a:p>
@@ -25816,7 +26916,112 @@
       </p:sp>
       <p:sp>
         <p:nvSpPr>
-          <p:cNvPr id="33" name="Shape 31"/>
+          <p:cNvPr id="36" name="Text 34"/>
+          <p:cNvSpPr/>
+          <p:nvPr/>
+        </p:nvSpPr>
+        <p:spPr>
+          <a:xfrm>
+            <a:off x="6784848" y="3364992"/>
+            <a:ext cx="73152" cy="475488"/>
+          </a:xfrm>
+          <a:prstGeom prst="rect">
+            <a:avLst/>
+          </a:prstGeom>
+          <a:noFill/>
+          <a:ln/>
+        </p:spPr>
+        <p:txBody>
+          <a:bodyPr wrap="square" lIns="0" tIns="0" rIns="0" bIns="0" rtlCol="0" anchor="ctr"/>
+          <a:lstStyle/>
+          <a:p>
+            <a:pPr algn="ctr" indent="0" marL="0">
+              <a:buNone/>
+            </a:pPr>
+            <a:r>
+              <a:rPr lang="en-US" sz="1600" b="1" dirty="0">
+                <a:solidFill>
+                  <a:srgbClr val="0D9488"/>
+                </a:solidFill>
+                <a:latin typeface="Trebuchet MS" pitchFamily="34" charset="0"/>
+                <a:ea typeface="Trebuchet MS" pitchFamily="34" charset="-122"/>
+                <a:cs typeface="Trebuchet MS" pitchFamily="34" charset="-120"/>
+              </a:rPr>
+              <a:t>·</a:t>
+            </a:r>
+            <a:endParaRPr lang="en-US" sz="1600" dirty="0"/>
+          </a:p>
+        </p:txBody>
+      </p:sp>
+      <p:sp>
+        <p:nvSpPr>
+          <p:cNvPr id="37" name="Shape 35"/>
+          <p:cNvSpPr/>
+          <p:nvPr/>
+        </p:nvSpPr>
+        <p:spPr>
+          <a:xfrm>
+            <a:off x="6858000" y="3364992"/>
+            <a:ext cx="1554480" cy="475488"/>
+          </a:xfrm>
+          <a:prstGeom prst="rect">
+            <a:avLst>
+              <a:gd name="adj" fmla="val 9615"/>
+            </a:avLst>
+          </a:prstGeom>
+          <a:solidFill>
+            <a:srgbClr val="FFFFFF"/>
+          </a:solidFill>
+          <a:ln w="12700">
+            <a:solidFill>
+              <a:srgbClr val="0D9488"/>
+            </a:solidFill>
+            <a:prstDash val="solid"/>
+          </a:ln>
+        </p:spPr>
+      </p:sp>
+      <p:sp>
+        <p:nvSpPr>
+          <p:cNvPr id="38" name="Text 36"/>
+          <p:cNvSpPr/>
+          <p:nvPr/>
+        </p:nvSpPr>
+        <p:spPr>
+          <a:xfrm>
+            <a:off x="6858000" y="3364992"/>
+            <a:ext cx="1554480" cy="475488"/>
+          </a:xfrm>
+          <a:prstGeom prst="rect">
+            <a:avLst/>
+          </a:prstGeom>
+          <a:noFill/>
+          <a:ln/>
+        </p:spPr>
+        <p:txBody>
+          <a:bodyPr wrap="square" lIns="0" tIns="0" rIns="0" bIns="0" rtlCol="0" anchor="ctr"/>
+          <a:lstStyle/>
+          <a:p>
+            <a:pPr algn="ctr" indent="0" marL="0">
+              <a:buNone/>
+            </a:pPr>
+            <a:r>
+              <a:rPr lang="en-US" sz="1400" b="1" dirty="0">
+                <a:solidFill>
+                  <a:srgbClr val="0D9488"/>
+                </a:solidFill>
+                <a:latin typeface="Trebuchet MS" pitchFamily="34" charset="0"/>
+                <a:ea typeface="Trebuchet MS" pitchFamily="34" charset="-122"/>
+                <a:cs typeface="Trebuchet MS" pitchFamily="34" charset="-120"/>
+              </a:rPr>
+              <a:t>ble</a:t>
+            </a:r>
+            <a:endParaRPr lang="en-US" sz="1400" dirty="0"/>
+          </a:p>
+        </p:txBody>
+      </p:sp>
+      <p:sp>
+        <p:nvSpPr>
+          <p:cNvPr id="39" name="Shape 37"/>
           <p:cNvSpPr/>
           <p:nvPr/>
         </p:nvSpPr>
@@ -25843,7 +27048,7 @@
       </p:sp>
       <p:sp>
         <p:nvSpPr>
-          <p:cNvPr id="34" name="Text 32"/>
+          <p:cNvPr id="40" name="Text 38"/>
           <p:cNvSpPr/>
           <p:nvPr/>
         </p:nvSpPr>
@@ -25882,7 +27087,7 @@
       </p:sp>
       <p:sp>
         <p:nvSpPr>
-          <p:cNvPr id="35" name="Shape 33"/>
+          <p:cNvPr id="41" name="Shape 39"/>
           <p:cNvSpPr/>
           <p:nvPr/>
         </p:nvSpPr>
@@ -25909,7 +27114,7 @@
       </p:sp>
       <p:sp>
         <p:nvSpPr>
-          <p:cNvPr id="36" name="Text 34"/>
+          <p:cNvPr id="42" name="Text 40"/>
           <p:cNvSpPr/>
           <p:nvPr/>
         </p:nvSpPr>
@@ -26232,7 +27437,7 @@
                 <a:ea typeface="Calibri" pitchFamily="34" charset="-122"/>
                 <a:cs typeface="Calibri" pitchFamily="34" charset="-120"/>
               </a:rPr>
-              <a:t>Word Labs  •  wordlabs.app  •  Root: 'review' = look at again, examine</a:t>
+              <a:t>Word Labs  •  wordlabs.app  •  Root: 'review' = look at again carefully</a:t>
             </a:r>
             <a:endParaRPr lang="en-US" sz="800" dirty="0"/>
           </a:p>
@@ -26371,7 +27576,7 @@
                 <a:ea typeface="Trebuchet MS" pitchFamily="34" charset="-122"/>
                 <a:cs typeface="Trebuchet MS" pitchFamily="34" charset="-120"/>
               </a:rPr>
-              <a:t>reviewing</a:t>
+              <a:t>reviewable</a:t>
             </a:r>
             <a:endParaRPr lang="en-US" sz="2800" dirty="0"/>
           </a:p>
@@ -26451,7 +27656,7 @@
         </p:nvSpPr>
         <p:spPr>
           <a:xfrm>
-            <a:off x="2938272" y="2258568"/>
+            <a:off x="2221992" y="2258568"/>
             <a:ext cx="1828800" cy="292608"/>
           </a:xfrm>
           <a:prstGeom prst="rect">
@@ -26460,11 +27665,11 @@
             </a:avLst>
           </a:prstGeom>
           <a:solidFill>
-            <a:srgbClr val="CCFBF1"/>
+            <a:srgbClr val="DDD6FE"/>
           </a:solidFill>
           <a:ln w="19050">
             <a:solidFill>
-              <a:srgbClr val="0D9488"/>
+              <a:srgbClr val="7C3AED"/>
             </a:solidFill>
             <a:prstDash val="solid"/>
           </a:ln>
@@ -26485,7 +27690,7 @@
         </p:nvSpPr>
         <p:spPr>
           <a:xfrm>
-            <a:off x="2938272" y="2258568"/>
+            <a:off x="2221992" y="2258568"/>
             <a:ext cx="1828800" cy="292608"/>
           </a:xfrm>
           <a:prstGeom prst="rect">
@@ -26504,13 +27709,13 @@
             <a:r>
               <a:rPr lang="en-US" sz="1300" b="1" dirty="0">
                 <a:solidFill>
-                  <a:srgbClr val="0F766E"/>
+                  <a:srgbClr val="4C1D95"/>
                 </a:solidFill>
                 <a:latin typeface="Trebuchet MS" pitchFamily="34" charset="0"/>
                 <a:ea typeface="Trebuchet MS" pitchFamily="34" charset="-122"/>
                 <a:cs typeface="Trebuchet MS" pitchFamily="34" charset="-120"/>
               </a:rPr>
-              <a:t>review</a:t>
+              <a:t>re</a:t>
             </a:r>
             <a:endParaRPr lang="en-US" sz="1300" dirty="0"/>
           </a:p>
@@ -26524,7 +27729,7 @@
         </p:nvSpPr>
         <p:spPr>
           <a:xfrm>
-            <a:off x="2938272" y="2569464"/>
+            <a:off x="2221992" y="2569464"/>
             <a:ext cx="1828800" cy="201168"/>
           </a:xfrm>
           <a:prstGeom prst="rect">
@@ -26549,7 +27754,7 @@
                 <a:ea typeface="Calibri" pitchFamily="34" charset="-122"/>
                 <a:cs typeface="Calibri" pitchFamily="34" charset="-120"/>
               </a:rPr>
-              <a:t>look at again</a:t>
+              <a:t>again</a:t>
             </a:r>
             <a:endParaRPr lang="en-US" sz="850" dirty="0"/>
           </a:p>
@@ -26563,7 +27768,7 @@
         </p:nvSpPr>
         <p:spPr>
           <a:xfrm>
-            <a:off x="5803392" y="2258568"/>
+            <a:off x="4370832" y="2258568"/>
             <a:ext cx="1828800" cy="292608"/>
           </a:xfrm>
           <a:prstGeom prst="rect">
@@ -26597,7 +27802,7 @@
         </p:nvSpPr>
         <p:spPr>
           <a:xfrm>
-            <a:off x="5803392" y="2258568"/>
+            <a:off x="4370832" y="2258568"/>
             <a:ext cx="1828800" cy="292608"/>
           </a:xfrm>
           <a:prstGeom prst="rect">
@@ -26622,7 +27827,7 @@
                 <a:ea typeface="Trebuchet MS" pitchFamily="34" charset="-122"/>
                 <a:cs typeface="Trebuchet MS" pitchFamily="34" charset="-120"/>
               </a:rPr>
-              <a:t>ing</a:t>
+              <a:t>view</a:t>
             </a:r>
             <a:endParaRPr lang="en-US" sz="1300" dirty="0"/>
           </a:p>
@@ -26636,7 +27841,7 @@
         </p:nvSpPr>
         <p:spPr>
           <a:xfrm>
-            <a:off x="5803392" y="2569464"/>
+            <a:off x="4370832" y="2569464"/>
             <a:ext cx="1828800" cy="201168"/>
           </a:xfrm>
           <a:prstGeom prst="rect">
@@ -26661,7 +27866,7 @@
                 <a:ea typeface="Calibri" pitchFamily="34" charset="-122"/>
                 <a:cs typeface="Calibri" pitchFamily="34" charset="-120"/>
               </a:rPr>
-              <a:t>action happening now</a:t>
+              <a:t>see or look</a:t>
             </a:r>
             <a:endParaRPr lang="en-US" sz="850" dirty="0"/>
           </a:p>
@@ -26670,6 +27875,118 @@
       <p:sp>
         <p:nvSpPr>
           <p:cNvPr id="22" name="Shape 20"/>
+          <p:cNvSpPr/>
+          <p:nvPr/>
+        </p:nvSpPr>
+        <p:spPr>
+          <a:xfrm>
+            <a:off x="6519672" y="2258568"/>
+            <a:ext cx="1828800" cy="292608"/>
+          </a:xfrm>
+          <a:prstGeom prst="rect">
+            <a:avLst>
+              <a:gd name="adj" fmla="val 25000"/>
+            </a:avLst>
+          </a:prstGeom>
+          <a:solidFill>
+            <a:srgbClr val="FCE7F3"/>
+          </a:solidFill>
+          <a:ln w="19050">
+            <a:solidFill>
+              <a:srgbClr val="DB2777"/>
+            </a:solidFill>
+            <a:prstDash val="solid"/>
+          </a:ln>
+          <a:effectLst>
+            <a:outerShdw sx="100000" sy="100000" kx="0" ky="0" algn="bl" rotWithShape="0" blurRad="101600" dist="38100" dir="8100000">
+              <a:srgbClr val="000000">
+                <a:alpha val="12000"/>
+              </a:srgbClr>
+            </a:outerShdw>
+          </a:effectLst>
+        </p:spPr>
+      </p:sp>
+      <p:sp>
+        <p:nvSpPr>
+          <p:cNvPr id="23" name="Text 21"/>
+          <p:cNvSpPr/>
+          <p:nvPr/>
+        </p:nvSpPr>
+        <p:spPr>
+          <a:xfrm>
+            <a:off x="6519672" y="2258568"/>
+            <a:ext cx="1828800" cy="292608"/>
+          </a:xfrm>
+          <a:prstGeom prst="rect">
+            <a:avLst/>
+          </a:prstGeom>
+          <a:noFill/>
+          <a:ln/>
+        </p:spPr>
+        <p:txBody>
+          <a:bodyPr wrap="square" lIns="0" tIns="0" rIns="0" bIns="0" rtlCol="0" anchor="ctr"/>
+          <a:lstStyle/>
+          <a:p>
+            <a:pPr algn="ctr" indent="0" marL="0">
+              <a:buNone/>
+            </a:pPr>
+            <a:r>
+              <a:rPr lang="en-US" sz="1300" b="1" dirty="0">
+                <a:solidFill>
+                  <a:srgbClr val="9D174D"/>
+                </a:solidFill>
+                <a:latin typeface="Trebuchet MS" pitchFamily="34" charset="0"/>
+                <a:ea typeface="Trebuchet MS" pitchFamily="34" charset="-122"/>
+                <a:cs typeface="Trebuchet MS" pitchFamily="34" charset="-120"/>
+              </a:rPr>
+              <a:t>able</a:t>
+            </a:r>
+            <a:endParaRPr lang="en-US" sz="1300" dirty="0"/>
+          </a:p>
+        </p:txBody>
+      </p:sp>
+      <p:sp>
+        <p:nvSpPr>
+          <p:cNvPr id="24" name="Text 22"/>
+          <p:cNvSpPr/>
+          <p:nvPr/>
+        </p:nvSpPr>
+        <p:spPr>
+          <a:xfrm>
+            <a:off x="6519672" y="2569464"/>
+            <a:ext cx="1828800" cy="201168"/>
+          </a:xfrm>
+          <a:prstGeom prst="rect">
+            <a:avLst/>
+          </a:prstGeom>
+          <a:noFill/>
+          <a:ln/>
+        </p:spPr>
+        <p:txBody>
+          <a:bodyPr wrap="square" lIns="0" tIns="0" rIns="0" bIns="0" rtlCol="0" anchor="t"/>
+          <a:lstStyle/>
+          <a:p>
+            <a:pPr algn="ctr" indent="0" marL="0">
+              <a:buNone/>
+            </a:pPr>
+            <a:r>
+              <a:rPr lang="en-US" sz="850" dirty="0">
+                <a:solidFill>
+                  <a:srgbClr val="475569"/>
+                </a:solidFill>
+                <a:latin typeface="Calibri" pitchFamily="34" charset="0"/>
+                <a:ea typeface="Calibri" pitchFamily="34" charset="-122"/>
+                <a:cs typeface="Calibri" pitchFamily="34" charset="-120"/>
+              </a:rPr>
+              <a:t>able to be</a:t>
+            </a:r>
+            <a:endParaRPr lang="en-US" sz="850" dirty="0"/>
+          </a:p>
+        </p:txBody>
+      </p:sp>
+      <p:sp>
+        <p:nvSpPr>
+          <p:cNvPr id="25" name="Shape 23"/>
           <p:cNvSpPr/>
           <p:nvPr/>
         </p:nvSpPr>
@@ -26696,7 +28013,7 @@
       </p:sp>
       <p:sp>
         <p:nvSpPr>
-          <p:cNvPr id="23" name="Text 21"/>
+          <p:cNvPr id="26" name="Text 24"/>
           <p:cNvSpPr/>
           <p:nvPr/>
         </p:nvSpPr>
@@ -26735,7 +28052,7 @@
       </p:sp>
       <p:sp>
         <p:nvSpPr>
-          <p:cNvPr id="24" name="Shape 22"/>
+          <p:cNvPr id="27" name="Shape 25"/>
           <p:cNvSpPr/>
           <p:nvPr/>
         </p:nvSpPr>
@@ -26762,14 +28079,14 @@
       </p:sp>
       <p:sp>
         <p:nvSpPr>
-          <p:cNvPr id="25" name="Shape 23"/>
-          <p:cNvSpPr/>
-          <p:nvPr/>
-        </p:nvSpPr>
-        <p:spPr>
-          <a:xfrm>
-            <a:off x="2313432" y="3364992"/>
-            <a:ext cx="1645920" cy="475488"/>
+          <p:cNvPr id="28" name="Shape 26"/>
+          <p:cNvSpPr/>
+          <p:nvPr/>
+        </p:nvSpPr>
+        <p:spPr>
+          <a:xfrm>
+            <a:off x="1975104" y="3364992"/>
+            <a:ext cx="1554480" cy="475488"/>
           </a:xfrm>
           <a:prstGeom prst="rect">
             <a:avLst>
@@ -26789,14 +28106,14 @@
       </p:sp>
       <p:sp>
         <p:nvSpPr>
-          <p:cNvPr id="26" name="Text 24"/>
-          <p:cNvSpPr/>
-          <p:nvPr/>
-        </p:nvSpPr>
-        <p:spPr>
-          <a:xfrm>
-            <a:off x="2313432" y="3364992"/>
-            <a:ext cx="1645920" cy="475488"/>
+          <p:cNvPr id="29" name="Text 27"/>
+          <p:cNvSpPr/>
+          <p:nvPr/>
+        </p:nvSpPr>
+        <p:spPr>
+          <a:xfrm>
+            <a:off x="1975104" y="3364992"/>
+            <a:ext cx="1554480" cy="475488"/>
           </a:xfrm>
           <a:prstGeom prst="rect">
             <a:avLst/>
@@ -26828,14 +28145,14 @@
       </p:sp>
       <p:sp>
         <p:nvSpPr>
-          <p:cNvPr id="27" name="Text 25"/>
-          <p:cNvSpPr/>
-          <p:nvPr/>
-        </p:nvSpPr>
-        <p:spPr>
-          <a:xfrm>
-            <a:off x="3959352" y="3364992"/>
-            <a:ext cx="411480" cy="475488"/>
+          <p:cNvPr id="30" name="Text 28"/>
+          <p:cNvSpPr/>
+          <p:nvPr/>
+        </p:nvSpPr>
+        <p:spPr>
+          <a:xfrm>
+            <a:off x="3529584" y="3364992"/>
+            <a:ext cx="73152" cy="475488"/>
           </a:xfrm>
           <a:prstGeom prst="rect">
             <a:avLst/>
@@ -26867,14 +28184,14 @@
       </p:sp>
       <p:sp>
         <p:nvSpPr>
-          <p:cNvPr id="28" name="Shape 26"/>
-          <p:cNvSpPr/>
-          <p:nvPr/>
-        </p:nvSpPr>
-        <p:spPr>
-          <a:xfrm>
-            <a:off x="4370832" y="3364992"/>
-            <a:ext cx="1645920" cy="475488"/>
+          <p:cNvPr id="31" name="Shape 29"/>
+          <p:cNvSpPr/>
+          <p:nvPr/>
+        </p:nvSpPr>
+        <p:spPr>
+          <a:xfrm>
+            <a:off x="3602736" y="3364992"/>
+            <a:ext cx="1554480" cy="475488"/>
           </a:xfrm>
           <a:prstGeom prst="rect">
             <a:avLst>
@@ -26894,14 +28211,14 @@
       </p:sp>
       <p:sp>
         <p:nvSpPr>
-          <p:cNvPr id="29" name="Text 27"/>
-          <p:cNvSpPr/>
-          <p:nvPr/>
-        </p:nvSpPr>
-        <p:spPr>
-          <a:xfrm>
-            <a:off x="4370832" y="3364992"/>
-            <a:ext cx="1645920" cy="475488"/>
+          <p:cNvPr id="32" name="Text 30"/>
+          <p:cNvSpPr/>
+          <p:nvPr/>
+        </p:nvSpPr>
+        <p:spPr>
+          <a:xfrm>
+            <a:off x="3602736" y="3364992"/>
+            <a:ext cx="1554480" cy="475488"/>
           </a:xfrm>
           <a:prstGeom prst="rect">
             <a:avLst/>
@@ -26933,14 +28250,14 @@
       </p:sp>
       <p:sp>
         <p:nvSpPr>
-          <p:cNvPr id="30" name="Text 28"/>
-          <p:cNvSpPr/>
-          <p:nvPr/>
-        </p:nvSpPr>
-        <p:spPr>
-          <a:xfrm>
-            <a:off x="6016752" y="3364992"/>
-            <a:ext cx="411480" cy="475488"/>
+          <p:cNvPr id="33" name="Text 31"/>
+          <p:cNvSpPr/>
+          <p:nvPr/>
+        </p:nvSpPr>
+        <p:spPr>
+          <a:xfrm>
+            <a:off x="5157216" y="3364992"/>
+            <a:ext cx="73152" cy="475488"/>
           </a:xfrm>
           <a:prstGeom prst="rect">
             <a:avLst/>
@@ -26972,14 +28289,14 @@
       </p:sp>
       <p:sp>
         <p:nvSpPr>
-          <p:cNvPr id="31" name="Shape 29"/>
-          <p:cNvSpPr/>
-          <p:nvPr/>
-        </p:nvSpPr>
-        <p:spPr>
-          <a:xfrm>
-            <a:off x="6428232" y="3364992"/>
-            <a:ext cx="1645920" cy="475488"/>
+          <p:cNvPr id="34" name="Shape 32"/>
+          <p:cNvSpPr/>
+          <p:nvPr/>
+        </p:nvSpPr>
+        <p:spPr>
+          <a:xfrm>
+            <a:off x="5230368" y="3364992"/>
+            <a:ext cx="1554480" cy="475488"/>
           </a:xfrm>
           <a:prstGeom prst="rect">
             <a:avLst>
@@ -26999,14 +28316,14 @@
       </p:sp>
       <p:sp>
         <p:nvSpPr>
-          <p:cNvPr id="32" name="Text 30"/>
-          <p:cNvSpPr/>
-          <p:nvPr/>
-        </p:nvSpPr>
-        <p:spPr>
-          <a:xfrm>
-            <a:off x="6428232" y="3364992"/>
-            <a:ext cx="1645920" cy="475488"/>
+          <p:cNvPr id="35" name="Text 33"/>
+          <p:cNvSpPr/>
+          <p:nvPr/>
+        </p:nvSpPr>
+        <p:spPr>
+          <a:xfrm>
+            <a:off x="5230368" y="3364992"/>
+            <a:ext cx="1554480" cy="475488"/>
           </a:xfrm>
           <a:prstGeom prst="rect">
             <a:avLst/>
@@ -27030,7 +28347,7 @@
                 <a:ea typeface="Trebuchet MS" pitchFamily="34" charset="-122"/>
                 <a:cs typeface="Trebuchet MS" pitchFamily="34" charset="-120"/>
               </a:rPr>
-              <a:t>ing</a:t>
+              <a:t>a</a:t>
             </a:r>
             <a:endParaRPr lang="en-US" sz="1400" dirty="0"/>
           </a:p>
@@ -27038,7 +28355,112 @@
       </p:sp>
       <p:sp>
         <p:nvSpPr>
-          <p:cNvPr id="33" name="Shape 31"/>
+          <p:cNvPr id="36" name="Text 34"/>
+          <p:cNvSpPr/>
+          <p:nvPr/>
+        </p:nvSpPr>
+        <p:spPr>
+          <a:xfrm>
+            <a:off x="6784848" y="3364992"/>
+            <a:ext cx="73152" cy="475488"/>
+          </a:xfrm>
+          <a:prstGeom prst="rect">
+            <a:avLst/>
+          </a:prstGeom>
+          <a:noFill/>
+          <a:ln/>
+        </p:spPr>
+        <p:txBody>
+          <a:bodyPr wrap="square" lIns="0" tIns="0" rIns="0" bIns="0" rtlCol="0" anchor="ctr"/>
+          <a:lstStyle/>
+          <a:p>
+            <a:pPr algn="ctr" indent="0" marL="0">
+              <a:buNone/>
+            </a:pPr>
+            <a:r>
+              <a:rPr lang="en-US" sz="1600" b="1" dirty="0">
+                <a:solidFill>
+                  <a:srgbClr val="0D9488"/>
+                </a:solidFill>
+                <a:latin typeface="Trebuchet MS" pitchFamily="34" charset="0"/>
+                <a:ea typeface="Trebuchet MS" pitchFamily="34" charset="-122"/>
+                <a:cs typeface="Trebuchet MS" pitchFamily="34" charset="-120"/>
+              </a:rPr>
+              <a:t>·</a:t>
+            </a:r>
+            <a:endParaRPr lang="en-US" sz="1600" dirty="0"/>
+          </a:p>
+        </p:txBody>
+      </p:sp>
+      <p:sp>
+        <p:nvSpPr>
+          <p:cNvPr id="37" name="Shape 35"/>
+          <p:cNvSpPr/>
+          <p:nvPr/>
+        </p:nvSpPr>
+        <p:spPr>
+          <a:xfrm>
+            <a:off x="6858000" y="3364992"/>
+            <a:ext cx="1554480" cy="475488"/>
+          </a:xfrm>
+          <a:prstGeom prst="rect">
+            <a:avLst>
+              <a:gd name="adj" fmla="val 9615"/>
+            </a:avLst>
+          </a:prstGeom>
+          <a:solidFill>
+            <a:srgbClr val="FFFFFF"/>
+          </a:solidFill>
+          <a:ln w="12700">
+            <a:solidFill>
+              <a:srgbClr val="0D9488"/>
+            </a:solidFill>
+            <a:prstDash val="solid"/>
+          </a:ln>
+        </p:spPr>
+      </p:sp>
+      <p:sp>
+        <p:nvSpPr>
+          <p:cNvPr id="38" name="Text 36"/>
+          <p:cNvSpPr/>
+          <p:nvPr/>
+        </p:nvSpPr>
+        <p:spPr>
+          <a:xfrm>
+            <a:off x="6858000" y="3364992"/>
+            <a:ext cx="1554480" cy="475488"/>
+          </a:xfrm>
+          <a:prstGeom prst="rect">
+            <a:avLst/>
+          </a:prstGeom>
+          <a:noFill/>
+          <a:ln/>
+        </p:spPr>
+        <p:txBody>
+          <a:bodyPr wrap="square" lIns="0" tIns="0" rIns="0" bIns="0" rtlCol="0" anchor="ctr"/>
+          <a:lstStyle/>
+          <a:p>
+            <a:pPr algn="ctr" indent="0" marL="0">
+              <a:buNone/>
+            </a:pPr>
+            <a:r>
+              <a:rPr lang="en-US" sz="1400" b="1" dirty="0">
+                <a:solidFill>
+                  <a:srgbClr val="0D9488"/>
+                </a:solidFill>
+                <a:latin typeface="Trebuchet MS" pitchFamily="34" charset="0"/>
+                <a:ea typeface="Trebuchet MS" pitchFamily="34" charset="-122"/>
+                <a:cs typeface="Trebuchet MS" pitchFamily="34" charset="-120"/>
+              </a:rPr>
+              <a:t>ble</a:t>
+            </a:r>
+            <a:endParaRPr lang="en-US" sz="1400" dirty="0"/>
+          </a:p>
+        </p:txBody>
+      </p:sp>
+      <p:sp>
+        <p:nvSpPr>
+          <p:cNvPr id="39" name="Shape 37"/>
           <p:cNvSpPr/>
           <p:nvPr/>
         </p:nvSpPr>
@@ -27065,7 +28487,7 @@
       </p:sp>
       <p:sp>
         <p:nvSpPr>
-          <p:cNvPr id="34" name="Text 32"/>
+          <p:cNvPr id="40" name="Text 38"/>
           <p:cNvSpPr/>
           <p:nvPr/>
         </p:nvSpPr>
@@ -27104,7 +28526,7 @@
       </p:sp>
       <p:sp>
         <p:nvSpPr>
-          <p:cNvPr id="35" name="Shape 33"/>
+          <p:cNvPr id="41" name="Shape 39"/>
           <p:cNvSpPr/>
           <p:nvPr/>
         </p:nvSpPr>
@@ -27131,13 +28553,13 @@
       </p:sp>
       <p:sp>
         <p:nvSpPr>
-          <p:cNvPr id="36" name="Shape 34"/>
-          <p:cNvSpPr/>
-          <p:nvPr/>
-        </p:nvSpPr>
-        <p:spPr>
-          <a:xfrm>
-            <a:off x="2254649" y="4169664"/>
+          <p:cNvPr id="42" name="Shape 40"/>
+          <p:cNvSpPr/>
+          <p:nvPr/>
+        </p:nvSpPr>
+        <p:spPr>
+          <a:xfrm>
+            <a:off x="2124837" y="4169664"/>
             <a:ext cx="685800" cy="475488"/>
           </a:xfrm>
           <a:prstGeom prst="rect">
@@ -27158,13 +28580,13 @@
       </p:sp>
       <p:sp>
         <p:nvSpPr>
-          <p:cNvPr id="37" name="Text 35"/>
-          <p:cNvSpPr/>
-          <p:nvPr/>
-        </p:nvSpPr>
-        <p:spPr>
-          <a:xfrm>
-            <a:off x="2254649" y="4169664"/>
+          <p:cNvPr id="43" name="Text 41"/>
+          <p:cNvSpPr/>
+          <p:nvPr/>
+        </p:nvSpPr>
+        <p:spPr>
+          <a:xfrm>
+            <a:off x="2124837" y="4169664"/>
             <a:ext cx="685800" cy="475488"/>
           </a:xfrm>
           <a:prstGeom prst="rect">
@@ -27197,13 +28619,13 @@
       </p:sp>
       <p:sp>
         <p:nvSpPr>
-          <p:cNvPr id="38" name="Shape 36"/>
-          <p:cNvSpPr/>
-          <p:nvPr/>
-        </p:nvSpPr>
-        <p:spPr>
-          <a:xfrm>
-            <a:off x="3293146" y="4169664"/>
+          <p:cNvPr id="44" name="Shape 42"/>
+          <p:cNvSpPr/>
+          <p:nvPr/>
+        </p:nvSpPr>
+        <p:spPr>
+          <a:xfrm>
+            <a:off x="3033522" y="4169664"/>
             <a:ext cx="685800" cy="475488"/>
           </a:xfrm>
           <a:prstGeom prst="rect">
@@ -27224,13 +28646,13 @@
       </p:sp>
       <p:sp>
         <p:nvSpPr>
-          <p:cNvPr id="39" name="Text 37"/>
-          <p:cNvSpPr/>
-          <p:nvPr/>
-        </p:nvSpPr>
-        <p:spPr>
-          <a:xfrm>
-            <a:off x="3293146" y="4169664"/>
+          <p:cNvPr id="45" name="Text 43"/>
+          <p:cNvSpPr/>
+          <p:nvPr/>
+        </p:nvSpPr>
+        <p:spPr>
+          <a:xfrm>
+            <a:off x="3033522" y="4169664"/>
             <a:ext cx="685800" cy="475488"/>
           </a:xfrm>
           <a:prstGeom prst="rect">
@@ -27263,13 +28685,13 @@
       </p:sp>
       <p:sp>
         <p:nvSpPr>
-          <p:cNvPr id="40" name="Shape 38"/>
-          <p:cNvSpPr/>
-          <p:nvPr/>
-        </p:nvSpPr>
-        <p:spPr>
-          <a:xfrm>
-            <a:off x="4331643" y="4169664"/>
+          <p:cNvPr id="46" name="Shape 44"/>
+          <p:cNvSpPr/>
+          <p:nvPr/>
+        </p:nvSpPr>
+        <p:spPr>
+          <a:xfrm>
+            <a:off x="3942207" y="4169664"/>
             <a:ext cx="685800" cy="475488"/>
           </a:xfrm>
           <a:prstGeom prst="rect">
@@ -27290,13 +28712,13 @@
       </p:sp>
       <p:sp>
         <p:nvSpPr>
-          <p:cNvPr id="41" name="Text 39"/>
-          <p:cNvSpPr/>
-          <p:nvPr/>
-        </p:nvSpPr>
-        <p:spPr>
-          <a:xfrm>
-            <a:off x="4331643" y="4169664"/>
+          <p:cNvPr id="47" name="Text 45"/>
+          <p:cNvSpPr/>
+          <p:nvPr/>
+        </p:nvSpPr>
+        <p:spPr>
+          <a:xfrm>
+            <a:off x="3942207" y="4169664"/>
             <a:ext cx="685800" cy="475488"/>
           </a:xfrm>
           <a:prstGeom prst="rect">
@@ -27329,13 +28751,13 @@
       </p:sp>
       <p:sp>
         <p:nvSpPr>
-          <p:cNvPr id="42" name="Shape 40"/>
-          <p:cNvSpPr/>
-          <p:nvPr/>
-        </p:nvSpPr>
-        <p:spPr>
-          <a:xfrm>
-            <a:off x="5370141" y="4169664"/>
+          <p:cNvPr id="48" name="Shape 46"/>
+          <p:cNvSpPr/>
+          <p:nvPr/>
+        </p:nvSpPr>
+        <p:spPr>
+          <a:xfrm>
+            <a:off x="4850892" y="4169664"/>
             <a:ext cx="685800" cy="475488"/>
           </a:xfrm>
           <a:prstGeom prst="rect">
@@ -27356,13 +28778,13 @@
       </p:sp>
       <p:sp>
         <p:nvSpPr>
-          <p:cNvPr id="43" name="Text 41"/>
-          <p:cNvSpPr/>
-          <p:nvPr/>
-        </p:nvSpPr>
-        <p:spPr>
-          <a:xfrm>
-            <a:off x="5370141" y="4169664"/>
+          <p:cNvPr id="49" name="Text 47"/>
+          <p:cNvSpPr/>
+          <p:nvPr/>
+        </p:nvSpPr>
+        <p:spPr>
+          <a:xfrm>
+            <a:off x="4850892" y="4169664"/>
             <a:ext cx="685800" cy="475488"/>
           </a:xfrm>
           <a:prstGeom prst="rect">
@@ -27387,7 +28809,7 @@
                 <a:ea typeface="Trebuchet MS" pitchFamily="34" charset="-122"/>
                 <a:cs typeface="Trebuchet MS" pitchFamily="34" charset="-120"/>
               </a:rPr>
-              <a:t>ie</a:t>
+              <a:t>iew</a:t>
             </a:r>
             <a:endParaRPr lang="en-US" sz="900" dirty="0"/>
           </a:p>
@@ -27395,13 +28817,13 @@
       </p:sp>
       <p:sp>
         <p:nvSpPr>
-          <p:cNvPr id="44" name="Shape 42"/>
-          <p:cNvSpPr/>
-          <p:nvPr/>
-        </p:nvSpPr>
-        <p:spPr>
-          <a:xfrm>
-            <a:off x="6408638" y="4169664"/>
+          <p:cNvPr id="50" name="Shape 48"/>
+          <p:cNvSpPr/>
+          <p:nvPr/>
+        </p:nvSpPr>
+        <p:spPr>
+          <a:xfrm>
+            <a:off x="5759577" y="4169664"/>
             <a:ext cx="685800" cy="475488"/>
           </a:xfrm>
           <a:prstGeom prst="rect">
@@ -27422,13 +28844,13 @@
       </p:sp>
       <p:sp>
         <p:nvSpPr>
-          <p:cNvPr id="45" name="Text 43"/>
-          <p:cNvSpPr/>
-          <p:nvPr/>
-        </p:nvSpPr>
-        <p:spPr>
-          <a:xfrm>
-            <a:off x="6408638" y="4169664"/>
+          <p:cNvPr id="51" name="Text 49"/>
+          <p:cNvSpPr/>
+          <p:nvPr/>
+        </p:nvSpPr>
+        <p:spPr>
+          <a:xfrm>
+            <a:off x="5759577" y="4169664"/>
             <a:ext cx="685800" cy="475488"/>
           </a:xfrm>
           <a:prstGeom prst="rect">
@@ -27453,7 +28875,7 @@
                 <a:ea typeface="Trebuchet MS" pitchFamily="34" charset="-122"/>
                 <a:cs typeface="Trebuchet MS" pitchFamily="34" charset="-120"/>
               </a:rPr>
-              <a:t>w</a:t>
+              <a:t>a</a:t>
             </a:r>
             <a:endParaRPr lang="en-US" sz="900" dirty="0"/>
           </a:p>
@@ -27461,13 +28883,13 @@
       </p:sp>
       <p:sp>
         <p:nvSpPr>
-          <p:cNvPr id="46" name="Shape 44"/>
-          <p:cNvSpPr/>
-          <p:nvPr/>
-        </p:nvSpPr>
-        <p:spPr>
-          <a:xfrm>
-            <a:off x="7447135" y="4169664"/>
+          <p:cNvPr id="52" name="Shape 50"/>
+          <p:cNvSpPr/>
+          <p:nvPr/>
+        </p:nvSpPr>
+        <p:spPr>
+          <a:xfrm>
+            <a:off x="6668262" y="4169664"/>
             <a:ext cx="685800" cy="475488"/>
           </a:xfrm>
           <a:prstGeom prst="rect">
@@ -27488,13 +28910,13 @@
       </p:sp>
       <p:sp>
         <p:nvSpPr>
-          <p:cNvPr id="47" name="Text 45"/>
-          <p:cNvSpPr/>
-          <p:nvPr/>
-        </p:nvSpPr>
-        <p:spPr>
-          <a:xfrm>
-            <a:off x="7447135" y="4169664"/>
+          <p:cNvPr id="53" name="Text 51"/>
+          <p:cNvSpPr/>
+          <p:nvPr/>
+        </p:nvSpPr>
+        <p:spPr>
+          <a:xfrm>
+            <a:off x="6668262" y="4169664"/>
             <a:ext cx="685800" cy="475488"/>
           </a:xfrm>
           <a:prstGeom prst="rect">
@@ -27519,7 +28941,73 @@
                 <a:ea typeface="Trebuchet MS" pitchFamily="34" charset="-122"/>
                 <a:cs typeface="Trebuchet MS" pitchFamily="34" charset="-120"/>
               </a:rPr>
-              <a:t>ing</a:t>
+              <a:t>b</a:t>
+            </a:r>
+            <a:endParaRPr lang="en-US" sz="900" dirty="0"/>
+          </a:p>
+        </p:txBody>
+      </p:sp>
+      <p:sp>
+        <p:nvSpPr>
+          <p:cNvPr id="54" name="Shape 52"/>
+          <p:cNvSpPr/>
+          <p:nvPr/>
+        </p:nvSpPr>
+        <p:spPr>
+          <a:xfrm>
+            <a:off x="7576947" y="4169664"/>
+            <a:ext cx="685800" cy="475488"/>
+          </a:xfrm>
+          <a:prstGeom prst="rect">
+            <a:avLst>
+              <a:gd name="adj" fmla="val 7692"/>
+            </a:avLst>
+          </a:prstGeom>
+          <a:solidFill>
+            <a:srgbClr val="FFFFFF"/>
+          </a:solidFill>
+          <a:ln w="12700">
+            <a:solidFill>
+              <a:srgbClr val="DB2777"/>
+            </a:solidFill>
+            <a:prstDash val="solid"/>
+          </a:ln>
+        </p:spPr>
+      </p:sp>
+      <p:sp>
+        <p:nvSpPr>
+          <p:cNvPr id="55" name="Text 53"/>
+          <p:cNvSpPr/>
+          <p:nvPr/>
+        </p:nvSpPr>
+        <p:spPr>
+          <a:xfrm>
+            <a:off x="7576947" y="4169664"/>
+            <a:ext cx="685800" cy="475488"/>
+          </a:xfrm>
+          <a:prstGeom prst="rect">
+            <a:avLst/>
+          </a:prstGeom>
+          <a:noFill/>
+          <a:ln/>
+        </p:spPr>
+        <p:txBody>
+          <a:bodyPr wrap="square" lIns="0" tIns="0" rIns="0" bIns="0" rtlCol="0" anchor="ctr"/>
+          <a:lstStyle/>
+          <a:p>
+            <a:pPr algn="ctr" indent="0" marL="0">
+              <a:buNone/>
+            </a:pPr>
+            <a:r>
+              <a:rPr lang="en-US" sz="900" b="1" dirty="0">
+                <a:solidFill>
+                  <a:srgbClr val="9D174D"/>
+                </a:solidFill>
+                <a:latin typeface="Trebuchet MS" pitchFamily="34" charset="0"/>
+                <a:ea typeface="Trebuchet MS" pitchFamily="34" charset="-122"/>
+                <a:cs typeface="Trebuchet MS" pitchFamily="34" charset="-120"/>
+              </a:rPr>
+              <a:t>le</a:t>
             </a:r>
             <a:endParaRPr lang="en-US" sz="900" dirty="0"/>
           </a:p>
@@ -27811,7 +29299,7 @@
                 <a:ea typeface="Calibri" pitchFamily="34" charset="-122"/>
                 <a:cs typeface="Calibri" pitchFamily="34" charset="-120"/>
               </a:rPr>
-              <a:t>Word Labs  •  wordlabs.app  •  Root: 'review' = look at again, examine</a:t>
+              <a:t>Word Labs  •  wordlabs.app  •  Root: 'review' = look at again carefully</a:t>
             </a:r>
             <a:endParaRPr lang="en-US" sz="800" dirty="0"/>
           </a:p>
@@ -27950,7 +29438,7 @@
                 <a:ea typeface="Trebuchet MS" pitchFamily="34" charset="-122"/>
                 <a:cs typeface="Trebuchet MS" pitchFamily="34" charset="-120"/>
               </a:rPr>
-              <a:t>review</a:t>
+              <a:t>self-review</a:t>
             </a:r>
             <a:endParaRPr lang="en-US" sz="2800" dirty="0"/>
           </a:p>
@@ -28638,7 +30126,7 @@
                 <a:ea typeface="Calibri" pitchFamily="34" charset="-122"/>
                 <a:cs typeface="Calibri" pitchFamily="34" charset="-120"/>
               </a:rPr>
-              <a:t>Word Labs  •  wordlabs.app  •  Root: 'review' = look at again, examine</a:t>
+              <a:t>Word Labs  •  wordlabs.app  •  Root: 'review' = look at again carefully</a:t>
             </a:r>
             <a:endParaRPr lang="en-US" sz="800" dirty="0"/>
           </a:p>
@@ -28777,7 +30265,7 @@
                 <a:ea typeface="Trebuchet MS" pitchFamily="34" charset="-122"/>
                 <a:cs typeface="Trebuchet MS" pitchFamily="34" charset="-120"/>
               </a:rPr>
-              <a:t>review</a:t>
+              <a:t>self-review</a:t>
             </a:r>
             <a:endParaRPr lang="en-US" sz="2800" dirty="0"/>
           </a:p>
@@ -28916,7 +30404,7 @@
                 <a:ea typeface="Trebuchet MS" pitchFamily="34" charset="-122"/>
                 <a:cs typeface="Trebuchet MS" pitchFamily="34" charset="-120"/>
               </a:rPr>
-              <a:t>re</a:t>
+              <a:t>self</a:t>
             </a:r>
             <a:endParaRPr lang="en-US" sz="1300" dirty="0"/>
           </a:p>
@@ -28955,7 +30443,7 @@
                 <a:ea typeface="Calibri" pitchFamily="34" charset="-122"/>
                 <a:cs typeface="Calibri" pitchFamily="34" charset="-120"/>
               </a:rPr>
-              <a:t>again</a:t>
+              <a:t>by oneself</a:t>
             </a:r>
             <a:endParaRPr lang="en-US" sz="850" dirty="0"/>
           </a:p>
@@ -28978,11 +30466,11 @@
             </a:avLst>
           </a:prstGeom>
           <a:solidFill>
-            <a:srgbClr val="FCE7F3"/>
+            <a:srgbClr val="CCFBF1"/>
           </a:solidFill>
           <a:ln w="19050">
             <a:solidFill>
-              <a:srgbClr val="DB2777"/>
+              <a:srgbClr val="0D9488"/>
             </a:solidFill>
             <a:prstDash val="solid"/>
           </a:ln>
@@ -29022,13 +30510,13 @@
             <a:r>
               <a:rPr lang="en-US" sz="1300" b="1" dirty="0">
                 <a:solidFill>
-                  <a:srgbClr val="9D174D"/>
+                  <a:srgbClr val="0F766E"/>
                 </a:solidFill>
                 <a:latin typeface="Trebuchet MS" pitchFamily="34" charset="0"/>
                 <a:ea typeface="Trebuchet MS" pitchFamily="34" charset="-122"/>
                 <a:cs typeface="Trebuchet MS" pitchFamily="34" charset="-120"/>
               </a:rPr>
-              <a:t>view</a:t>
+              <a:t>review</a:t>
             </a:r>
             <a:endParaRPr lang="en-US" sz="1300" dirty="0"/>
           </a:p>
@@ -29067,7 +30555,7 @@
                 <a:ea typeface="Calibri" pitchFamily="34" charset="-122"/>
                 <a:cs typeface="Calibri" pitchFamily="34" charset="-120"/>
               </a:rPr>
-              <a:t>to look or see</a:t>
+              <a:t>look at again carefully</a:t>
             </a:r>
             <a:endParaRPr lang="en-US" sz="850" dirty="0"/>
           </a:p>
@@ -29623,7 +31111,7 @@
                 <a:ea typeface="Calibri" pitchFamily="34" charset="-122"/>
                 <a:cs typeface="Calibri" pitchFamily="34" charset="-120"/>
               </a:rPr>
-              <a:t>Word Labs  •  wordlabs.app  •  Root: 'review' = look at again, examine</a:t>
+              <a:t>Word Labs  •  wordlabs.app  •  Root: 'review' = look at again carefully</a:t>
             </a:r>
             <a:endParaRPr lang="en-US" sz="800" dirty="0"/>
           </a:p>
@@ -29762,7 +31250,7 @@
                 <a:ea typeface="Trebuchet MS" pitchFamily="34" charset="-122"/>
                 <a:cs typeface="Trebuchet MS" pitchFamily="34" charset="-120"/>
               </a:rPr>
-              <a:t>review</a:t>
+              <a:t>self-review</a:t>
             </a:r>
             <a:endParaRPr lang="en-US" sz="2800" dirty="0"/>
           </a:p>
@@ -29901,7 +31389,7 @@
                 <a:ea typeface="Trebuchet MS" pitchFamily="34" charset="-122"/>
                 <a:cs typeface="Trebuchet MS" pitchFamily="34" charset="-120"/>
               </a:rPr>
-              <a:t>re</a:t>
+              <a:t>self</a:t>
             </a:r>
             <a:endParaRPr lang="en-US" sz="1300" dirty="0"/>
           </a:p>
@@ -29940,7 +31428,7 @@
                 <a:ea typeface="Calibri" pitchFamily="34" charset="-122"/>
                 <a:cs typeface="Calibri" pitchFamily="34" charset="-120"/>
               </a:rPr>
-              <a:t>again</a:t>
+              <a:t>by oneself</a:t>
             </a:r>
             <a:endParaRPr lang="en-US" sz="850" dirty="0"/>
           </a:p>
@@ -29963,11 +31451,11 @@
             </a:avLst>
           </a:prstGeom>
           <a:solidFill>
-            <a:srgbClr val="FCE7F3"/>
+            <a:srgbClr val="CCFBF1"/>
           </a:solidFill>
           <a:ln w="19050">
             <a:solidFill>
-              <a:srgbClr val="DB2777"/>
+              <a:srgbClr val="0D9488"/>
             </a:solidFill>
             <a:prstDash val="solid"/>
           </a:ln>
@@ -30007,13 +31495,13 @@
             <a:r>
               <a:rPr lang="en-US" sz="1300" b="1" dirty="0">
                 <a:solidFill>
-                  <a:srgbClr val="9D174D"/>
+                  <a:srgbClr val="0F766E"/>
                 </a:solidFill>
                 <a:latin typeface="Trebuchet MS" pitchFamily="34" charset="0"/>
                 <a:ea typeface="Trebuchet MS" pitchFamily="34" charset="-122"/>
                 <a:cs typeface="Trebuchet MS" pitchFamily="34" charset="-120"/>
               </a:rPr>
-              <a:t>view</a:t>
+              <a:t>review</a:t>
             </a:r>
             <a:endParaRPr lang="en-US" sz="1300" dirty="0"/>
           </a:p>
@@ -30052,7 +31540,7 @@
                 <a:ea typeface="Calibri" pitchFamily="34" charset="-122"/>
                 <a:cs typeface="Calibri" pitchFamily="34" charset="-120"/>
               </a:rPr>
-              <a:t>to look or see</a:t>
+              <a:t>look at again carefully</a:t>
             </a:r>
             <a:endParaRPr lang="en-US" sz="850" dirty="0"/>
           </a:p>
@@ -30211,7 +31699,7 @@
                 <a:ea typeface="Trebuchet MS" pitchFamily="34" charset="-122"/>
                 <a:cs typeface="Trebuchet MS" pitchFamily="34" charset="-120"/>
               </a:rPr>
-              <a:t>re</a:t>
+              <a:t>self-re</a:t>
             </a:r>
             <a:endParaRPr lang="en-US" sz="1400" dirty="0"/>
           </a:p>
@@ -30740,7 +32228,7 @@
                 <a:ea typeface="Calibri" pitchFamily="34" charset="-122"/>
                 <a:cs typeface="Calibri" pitchFamily="34" charset="-120"/>
               </a:rPr>
-              <a:t>Word Labs  •  wordlabs.app  •  Root: 'review' = look at again, examine</a:t>
+              <a:t>Word Labs  •  wordlabs.app  •  Root: 'review' = look at again carefully</a:t>
             </a:r>
             <a:endParaRPr lang="en-US" sz="800" dirty="0"/>
           </a:p>
@@ -30879,7 +32367,7 @@
                 <a:ea typeface="Trebuchet MS" pitchFamily="34" charset="-122"/>
                 <a:cs typeface="Trebuchet MS" pitchFamily="34" charset="-120"/>
               </a:rPr>
-              <a:t>review</a:t>
+              <a:t>self-review</a:t>
             </a:r>
             <a:endParaRPr lang="en-US" sz="2800" dirty="0"/>
           </a:p>
@@ -31018,7 +32506,7 @@
                 <a:ea typeface="Trebuchet MS" pitchFamily="34" charset="-122"/>
                 <a:cs typeface="Trebuchet MS" pitchFamily="34" charset="-120"/>
               </a:rPr>
-              <a:t>re</a:t>
+              <a:t>self</a:t>
             </a:r>
             <a:endParaRPr lang="en-US" sz="1300" dirty="0"/>
           </a:p>
@@ -31057,7 +32545,7 @@
                 <a:ea typeface="Calibri" pitchFamily="34" charset="-122"/>
                 <a:cs typeface="Calibri" pitchFamily="34" charset="-120"/>
               </a:rPr>
-              <a:t>again</a:t>
+              <a:t>by oneself</a:t>
             </a:r>
             <a:endParaRPr lang="en-US" sz="850" dirty="0"/>
           </a:p>
@@ -31080,11 +32568,11 @@
             </a:avLst>
           </a:prstGeom>
           <a:solidFill>
-            <a:srgbClr val="FCE7F3"/>
+            <a:srgbClr val="CCFBF1"/>
           </a:solidFill>
           <a:ln w="19050">
             <a:solidFill>
-              <a:srgbClr val="DB2777"/>
+              <a:srgbClr val="0D9488"/>
             </a:solidFill>
             <a:prstDash val="solid"/>
           </a:ln>
@@ -31124,13 +32612,13 @@
             <a:r>
               <a:rPr lang="en-US" sz="1300" b="1" dirty="0">
                 <a:solidFill>
-                  <a:srgbClr val="9D174D"/>
+                  <a:srgbClr val="0F766E"/>
                 </a:solidFill>
                 <a:latin typeface="Trebuchet MS" pitchFamily="34" charset="0"/>
                 <a:ea typeface="Trebuchet MS" pitchFamily="34" charset="-122"/>
                 <a:cs typeface="Trebuchet MS" pitchFamily="34" charset="-120"/>
               </a:rPr>
-              <a:t>view</a:t>
+              <a:t>review</a:t>
             </a:r>
             <a:endParaRPr lang="en-US" sz="1300" dirty="0"/>
           </a:p>
@@ -31169,7 +32657,7 @@
                 <a:ea typeface="Calibri" pitchFamily="34" charset="-122"/>
                 <a:cs typeface="Calibri" pitchFamily="34" charset="-120"/>
               </a:rPr>
-              <a:t>to look or see</a:t>
+              <a:t>look at again carefully</a:t>
             </a:r>
             <a:endParaRPr lang="en-US" sz="850" dirty="0"/>
           </a:p>
@@ -31328,7 +32816,7 @@
                 <a:ea typeface="Trebuchet MS" pitchFamily="34" charset="-122"/>
                 <a:cs typeface="Trebuchet MS" pitchFamily="34" charset="-120"/>
               </a:rPr>
-              <a:t>re</a:t>
+              <a:t>self-re</a:t>
             </a:r>
             <a:endParaRPr lang="en-US" sz="1400" dirty="0"/>
           </a:p>
@@ -31540,8 +33028,8 @@
         </p:nvSpPr>
         <p:spPr>
           <a:xfrm>
-            <a:off x="2427732" y="4169664"/>
-            <a:ext cx="685800" cy="475488"/>
+            <a:off x="1951330" y="4169664"/>
+            <a:ext cx="676656" cy="475488"/>
           </a:xfrm>
           <a:prstGeom prst="rect">
             <a:avLst>
@@ -31567,8 +33055,8 @@
         </p:nvSpPr>
         <p:spPr>
           <a:xfrm>
-            <a:off x="2427732" y="4169664"/>
-            <a:ext cx="685800" cy="475488"/>
+            <a:off x="1951330" y="4169664"/>
+            <a:ext cx="676656" cy="475488"/>
           </a:xfrm>
           <a:prstGeom prst="rect">
             <a:avLst/>
@@ -31592,7 +33080,7 @@
                 <a:ea typeface="Trebuchet MS" pitchFamily="34" charset="-122"/>
                 <a:cs typeface="Trebuchet MS" pitchFamily="34" charset="-120"/>
               </a:rPr>
-              <a:t>r</a:t>
+              <a:t>s</a:t>
             </a:r>
             <a:endParaRPr lang="en-US" sz="900" dirty="0"/>
           </a:p>
@@ -31606,8 +33094,8 @@
         </p:nvSpPr>
         <p:spPr>
           <a:xfrm>
-            <a:off x="3639312" y="4169664"/>
-            <a:ext cx="685800" cy="475488"/>
+            <a:off x="2677363" y="4169664"/>
+            <a:ext cx="676656" cy="475488"/>
           </a:xfrm>
           <a:prstGeom prst="rect">
             <a:avLst>
@@ -31633,8 +33121,8 @@
         </p:nvSpPr>
         <p:spPr>
           <a:xfrm>
-            <a:off x="3639312" y="4169664"/>
-            <a:ext cx="685800" cy="475488"/>
+            <a:off x="2677363" y="4169664"/>
+            <a:ext cx="676656" cy="475488"/>
           </a:xfrm>
           <a:prstGeom prst="rect">
             <a:avLst/>
@@ -31672,8 +33160,8 @@
         </p:nvSpPr>
         <p:spPr>
           <a:xfrm>
-            <a:off x="4850892" y="4169664"/>
-            <a:ext cx="685800" cy="475488"/>
+            <a:off x="3403397" y="4169664"/>
+            <a:ext cx="676656" cy="475488"/>
           </a:xfrm>
           <a:prstGeom prst="rect">
             <a:avLst>
@@ -31699,8 +33187,8 @@
         </p:nvSpPr>
         <p:spPr>
           <a:xfrm>
-            <a:off x="4850892" y="4169664"/>
-            <a:ext cx="685800" cy="475488"/>
+            <a:off x="3403397" y="4169664"/>
+            <a:ext cx="676656" cy="475488"/>
           </a:xfrm>
           <a:prstGeom prst="rect">
             <a:avLst/>
@@ -31724,7 +33212,7 @@
                 <a:ea typeface="Trebuchet MS" pitchFamily="34" charset="-122"/>
                 <a:cs typeface="Trebuchet MS" pitchFamily="34" charset="-120"/>
               </a:rPr>
-              <a:t>v</a:t>
+              <a:t>l</a:t>
             </a:r>
             <a:endParaRPr lang="en-US" sz="900" dirty="0"/>
           </a:p>
@@ -31738,8 +33226,8 @@
         </p:nvSpPr>
         <p:spPr>
           <a:xfrm>
-            <a:off x="6062472" y="4169664"/>
-            <a:ext cx="685800" cy="475488"/>
+            <a:off x="4129430" y="4169664"/>
+            <a:ext cx="676656" cy="475488"/>
           </a:xfrm>
           <a:prstGeom prst="rect">
             <a:avLst>
@@ -31765,8 +33253,8 @@
         </p:nvSpPr>
         <p:spPr>
           <a:xfrm>
-            <a:off x="6062472" y="4169664"/>
-            <a:ext cx="685800" cy="475488"/>
+            <a:off x="4129430" y="4169664"/>
+            <a:ext cx="676656" cy="475488"/>
           </a:xfrm>
           <a:prstGeom prst="rect">
             <a:avLst/>
@@ -31790,7 +33278,7 @@
                 <a:ea typeface="Trebuchet MS" pitchFamily="34" charset="-122"/>
                 <a:cs typeface="Trebuchet MS" pitchFamily="34" charset="-120"/>
               </a:rPr>
-              <a:t>ie</a:t>
+              <a:t>f</a:t>
             </a:r>
             <a:endParaRPr lang="en-US" sz="900" dirty="0"/>
           </a:p>
@@ -31804,8 +33292,8 @@
         </p:nvSpPr>
         <p:spPr>
           <a:xfrm>
-            <a:off x="7274052" y="4169664"/>
-            <a:ext cx="685800" cy="475488"/>
+            <a:off x="4855464" y="4169664"/>
+            <a:ext cx="676656" cy="475488"/>
           </a:xfrm>
           <a:prstGeom prst="rect">
             <a:avLst>
@@ -31831,8 +33319,8 @@
         </p:nvSpPr>
         <p:spPr>
           <a:xfrm>
-            <a:off x="7274052" y="4169664"/>
-            <a:ext cx="685800" cy="475488"/>
+            <a:off x="4855464" y="4169664"/>
+            <a:ext cx="676656" cy="475488"/>
           </a:xfrm>
           <a:prstGeom prst="rect">
             <a:avLst/>
@@ -31856,7 +33344,271 @@
                 <a:ea typeface="Trebuchet MS" pitchFamily="34" charset="-122"/>
                 <a:cs typeface="Trebuchet MS" pitchFamily="34" charset="-120"/>
               </a:rPr>
-              <a:t>w</a:t>
+              <a:t>-</a:t>
+            </a:r>
+            <a:endParaRPr lang="en-US" sz="900" dirty="0"/>
+          </a:p>
+        </p:txBody>
+      </p:sp>
+      <p:sp>
+        <p:nvSpPr>
+          <p:cNvPr id="43" name="Shape 41"/>
+          <p:cNvSpPr/>
+          <p:nvPr/>
+        </p:nvSpPr>
+        <p:spPr>
+          <a:xfrm>
+            <a:off x="5581498" y="4169664"/>
+            <a:ext cx="676656" cy="475488"/>
+          </a:xfrm>
+          <a:prstGeom prst="rect">
+            <a:avLst>
+              <a:gd name="adj" fmla="val 7692"/>
+            </a:avLst>
+          </a:prstGeom>
+          <a:solidFill>
+            <a:srgbClr val="FFFFFF"/>
+          </a:solidFill>
+          <a:ln w="12700">
+            <a:solidFill>
+              <a:srgbClr val="DB2777"/>
+            </a:solidFill>
+            <a:prstDash val="solid"/>
+          </a:ln>
+        </p:spPr>
+      </p:sp>
+      <p:sp>
+        <p:nvSpPr>
+          <p:cNvPr id="44" name="Text 42"/>
+          <p:cNvSpPr/>
+          <p:nvPr/>
+        </p:nvSpPr>
+        <p:spPr>
+          <a:xfrm>
+            <a:off x="5581498" y="4169664"/>
+            <a:ext cx="676656" cy="475488"/>
+          </a:xfrm>
+          <a:prstGeom prst="rect">
+            <a:avLst/>
+          </a:prstGeom>
+          <a:noFill/>
+          <a:ln/>
+        </p:spPr>
+        <p:txBody>
+          <a:bodyPr wrap="square" lIns="0" tIns="0" rIns="0" bIns="0" rtlCol="0" anchor="ctr"/>
+          <a:lstStyle/>
+          <a:p>
+            <a:pPr algn="ctr" indent="0" marL="0">
+              <a:buNone/>
+            </a:pPr>
+            <a:r>
+              <a:rPr lang="en-US" sz="900" b="1" dirty="0">
+                <a:solidFill>
+                  <a:srgbClr val="9D174D"/>
+                </a:solidFill>
+                <a:latin typeface="Trebuchet MS" pitchFamily="34" charset="0"/>
+                <a:ea typeface="Trebuchet MS" pitchFamily="34" charset="-122"/>
+                <a:cs typeface="Trebuchet MS" pitchFamily="34" charset="-120"/>
+              </a:rPr>
+              <a:t>r</a:t>
+            </a:r>
+            <a:endParaRPr lang="en-US" sz="900" dirty="0"/>
+          </a:p>
+        </p:txBody>
+      </p:sp>
+      <p:sp>
+        <p:nvSpPr>
+          <p:cNvPr id="45" name="Shape 43"/>
+          <p:cNvSpPr/>
+          <p:nvPr/>
+        </p:nvSpPr>
+        <p:spPr>
+          <a:xfrm>
+            <a:off x="6307531" y="4169664"/>
+            <a:ext cx="676656" cy="475488"/>
+          </a:xfrm>
+          <a:prstGeom prst="rect">
+            <a:avLst>
+              <a:gd name="adj" fmla="val 7692"/>
+            </a:avLst>
+          </a:prstGeom>
+          <a:solidFill>
+            <a:srgbClr val="FFFFFF"/>
+          </a:solidFill>
+          <a:ln w="12700">
+            <a:solidFill>
+              <a:srgbClr val="DB2777"/>
+            </a:solidFill>
+            <a:prstDash val="solid"/>
+          </a:ln>
+        </p:spPr>
+      </p:sp>
+      <p:sp>
+        <p:nvSpPr>
+          <p:cNvPr id="46" name="Text 44"/>
+          <p:cNvSpPr/>
+          <p:nvPr/>
+        </p:nvSpPr>
+        <p:spPr>
+          <a:xfrm>
+            <a:off x="6307531" y="4169664"/>
+            <a:ext cx="676656" cy="475488"/>
+          </a:xfrm>
+          <a:prstGeom prst="rect">
+            <a:avLst/>
+          </a:prstGeom>
+          <a:noFill/>
+          <a:ln/>
+        </p:spPr>
+        <p:txBody>
+          <a:bodyPr wrap="square" lIns="0" tIns="0" rIns="0" bIns="0" rtlCol="0" anchor="ctr"/>
+          <a:lstStyle/>
+          <a:p>
+            <a:pPr algn="ctr" indent="0" marL="0">
+              <a:buNone/>
+            </a:pPr>
+            <a:r>
+              <a:rPr lang="en-US" sz="900" b="1" dirty="0">
+                <a:solidFill>
+                  <a:srgbClr val="9D174D"/>
+                </a:solidFill>
+                <a:latin typeface="Trebuchet MS" pitchFamily="34" charset="0"/>
+                <a:ea typeface="Trebuchet MS" pitchFamily="34" charset="-122"/>
+                <a:cs typeface="Trebuchet MS" pitchFamily="34" charset="-120"/>
+              </a:rPr>
+              <a:t>e</a:t>
+            </a:r>
+            <a:endParaRPr lang="en-US" sz="900" dirty="0"/>
+          </a:p>
+        </p:txBody>
+      </p:sp>
+      <p:sp>
+        <p:nvSpPr>
+          <p:cNvPr id="47" name="Shape 45"/>
+          <p:cNvSpPr/>
+          <p:nvPr/>
+        </p:nvSpPr>
+        <p:spPr>
+          <a:xfrm>
+            <a:off x="7033565" y="4169664"/>
+            <a:ext cx="676656" cy="475488"/>
+          </a:xfrm>
+          <a:prstGeom prst="rect">
+            <a:avLst>
+              <a:gd name="adj" fmla="val 7692"/>
+            </a:avLst>
+          </a:prstGeom>
+          <a:solidFill>
+            <a:srgbClr val="FFFFFF"/>
+          </a:solidFill>
+          <a:ln w="12700">
+            <a:solidFill>
+              <a:srgbClr val="DB2777"/>
+            </a:solidFill>
+            <a:prstDash val="solid"/>
+          </a:ln>
+        </p:spPr>
+      </p:sp>
+      <p:sp>
+        <p:nvSpPr>
+          <p:cNvPr id="48" name="Text 46"/>
+          <p:cNvSpPr/>
+          <p:nvPr/>
+        </p:nvSpPr>
+        <p:spPr>
+          <a:xfrm>
+            <a:off x="7033565" y="4169664"/>
+            <a:ext cx="676656" cy="475488"/>
+          </a:xfrm>
+          <a:prstGeom prst="rect">
+            <a:avLst/>
+          </a:prstGeom>
+          <a:noFill/>
+          <a:ln/>
+        </p:spPr>
+        <p:txBody>
+          <a:bodyPr wrap="square" lIns="0" tIns="0" rIns="0" bIns="0" rtlCol="0" anchor="ctr"/>
+          <a:lstStyle/>
+          <a:p>
+            <a:pPr algn="ctr" indent="0" marL="0">
+              <a:buNone/>
+            </a:pPr>
+            <a:r>
+              <a:rPr lang="en-US" sz="900" b="1" dirty="0">
+                <a:solidFill>
+                  <a:srgbClr val="9D174D"/>
+                </a:solidFill>
+                <a:latin typeface="Trebuchet MS" pitchFamily="34" charset="0"/>
+                <a:ea typeface="Trebuchet MS" pitchFamily="34" charset="-122"/>
+                <a:cs typeface="Trebuchet MS" pitchFamily="34" charset="-120"/>
+              </a:rPr>
+              <a:t>v</a:t>
+            </a:r>
+            <a:endParaRPr lang="en-US" sz="900" dirty="0"/>
+          </a:p>
+        </p:txBody>
+      </p:sp>
+      <p:sp>
+        <p:nvSpPr>
+          <p:cNvPr id="49" name="Shape 47"/>
+          <p:cNvSpPr/>
+          <p:nvPr/>
+        </p:nvSpPr>
+        <p:spPr>
+          <a:xfrm>
+            <a:off x="7759598" y="4169664"/>
+            <a:ext cx="676656" cy="475488"/>
+          </a:xfrm>
+          <a:prstGeom prst="rect">
+            <a:avLst>
+              <a:gd name="adj" fmla="val 7692"/>
+            </a:avLst>
+          </a:prstGeom>
+          <a:solidFill>
+            <a:srgbClr val="FFFFFF"/>
+          </a:solidFill>
+          <a:ln w="12700">
+            <a:solidFill>
+              <a:srgbClr val="DB2777"/>
+            </a:solidFill>
+            <a:prstDash val="solid"/>
+          </a:ln>
+        </p:spPr>
+      </p:sp>
+      <p:sp>
+        <p:nvSpPr>
+          <p:cNvPr id="50" name="Text 48"/>
+          <p:cNvSpPr/>
+          <p:nvPr/>
+        </p:nvSpPr>
+        <p:spPr>
+          <a:xfrm>
+            <a:off x="7759598" y="4169664"/>
+            <a:ext cx="676656" cy="475488"/>
+          </a:xfrm>
+          <a:prstGeom prst="rect">
+            <a:avLst/>
+          </a:prstGeom>
+          <a:noFill/>
+          <a:ln/>
+        </p:spPr>
+        <p:txBody>
+          <a:bodyPr wrap="square" lIns="0" tIns="0" rIns="0" bIns="0" rtlCol="0" anchor="ctr"/>
+          <a:lstStyle/>
+          <a:p>
+            <a:pPr algn="ctr" indent="0" marL="0">
+              <a:buNone/>
+            </a:pPr>
+            <a:r>
+              <a:rPr lang="en-US" sz="900" b="1" dirty="0">
+                <a:solidFill>
+                  <a:srgbClr val="9D174D"/>
+                </a:solidFill>
+                <a:latin typeface="Trebuchet MS" pitchFamily="34" charset="0"/>
+                <a:ea typeface="Trebuchet MS" pitchFamily="34" charset="-122"/>
+                <a:cs typeface="Trebuchet MS" pitchFamily="34" charset="-120"/>
+              </a:rPr>
+              <a:t>iew</a:t>
             </a:r>
             <a:endParaRPr lang="en-US" sz="900" dirty="0"/>
           </a:p>
@@ -32148,7 +33900,7 @@
                 <a:ea typeface="Calibri" pitchFamily="34" charset="-122"/>
                 <a:cs typeface="Calibri" pitchFamily="34" charset="-120"/>
               </a:rPr>
-              <a:t>Word Labs  •  wordlabs.app  •  Root: 'review' = look at again, examine</a:t>
+              <a:t>Word Labs  •  wordlabs.app  •  Root: 'review' = look at again carefully</a:t>
             </a:r>
             <a:endParaRPr lang="en-US" sz="800" dirty="0"/>
           </a:p>
@@ -33317,7 +35069,7 @@
                 <a:ea typeface="Calibri" pitchFamily="34" charset="-122"/>
                 <a:cs typeface="Calibri" pitchFamily="34" charset="-120"/>
               </a:rPr>
-              <a:t>Word Labs  •  wordlabs.app  •  Root: 'review' = look at again, examine</a:t>
+              <a:t>Word Labs  •  wordlabs.app  •  Root: 'review' = look at again carefully</a:t>
             </a:r>
             <a:endParaRPr lang="en-US" sz="800" dirty="0"/>
           </a:p>
@@ -34859,7 +36611,7 @@
                 <a:ea typeface="Trebuchet MS" pitchFamily="34" charset="-122"/>
                 <a:cs typeface="Trebuchet MS" pitchFamily="34" charset="-120"/>
               </a:rPr>
-              <a:t>self-review</a:t>
+              <a:t>reviewable</a:t>
             </a:r>
             <a:endParaRPr lang="en-US" sz="1200" dirty="0"/>
           </a:p>
@@ -34925,7 +36677,7 @@
                 <a:ea typeface="Trebuchet MS" pitchFamily="34" charset="-122"/>
                 <a:cs typeface="Trebuchet MS" pitchFamily="34" charset="-120"/>
               </a:rPr>
-              <a:t>peer review</a:t>
+              <a:t>self-review</a:t>
             </a:r>
             <a:endParaRPr lang="en-US" sz="1200" dirty="0"/>
           </a:p>
@@ -35217,7 +36969,7 @@
                 <a:ea typeface="Calibri" pitchFamily="34" charset="-122"/>
                 <a:cs typeface="Calibri" pitchFamily="34" charset="-120"/>
               </a:rPr>
-              <a:t>Word Labs  •  wordlabs.app  •  Root: 'review' = look at again, examine</a:t>
+              <a:t>Word Labs  •  wordlabs.app  •  Root: 'review' = look at again carefully</a:t>
             </a:r>
             <a:endParaRPr lang="en-US" sz="800" dirty="0"/>
           </a:p>
@@ -35381,7 +37133,7 @@
                 <a:ea typeface="Calibri" pitchFamily="34" charset="-122"/>
                 <a:cs typeface="Calibri" pitchFamily="34" charset="-120"/>
               </a:rPr>
-              <a:t>The core part of a word carrying its basic meaning. For example, 'review' means 'look at again, examine'.</a:t>
+              <a:t>The core part of a word carrying its basic meaning. For example, 'review' means 'look at again carefully'.</a:t>
             </a:r>
             <a:endParaRPr lang="en-US" sz="1350" dirty="0"/>
           </a:p>
@@ -36001,7 +37753,7 @@
                 <a:ea typeface="Calibri" pitchFamily="34" charset="-122"/>
                 <a:cs typeface="Calibri" pitchFamily="34" charset="-120"/>
               </a:rPr>
-              <a:t>Word Labs  •  wordlabs.app  •  Root: 'review' = look at again, examine</a:t>
+              <a:t>Word Labs  •  wordlabs.app  •  Root: 'review' = look at again carefully</a:t>
             </a:r>
             <a:endParaRPr lang="en-US" sz="800" dirty="0"/>
           </a:p>
@@ -36113,7 +37865,7 @@
                 <a:ea typeface="Calibri" pitchFamily="34" charset="-122"/>
                 <a:cs typeface="Calibri" pitchFamily="34" charset="-120"/>
               </a:rPr>
-              <a:t>1.  The word 'review' comes from a Latin word meaning to look or see again.</a:t>
+              <a:t>1.  The word 'reviewer' contains the root 'review' plus the suffix '-er', meaning a person who reviews.</a:t>
             </a:r>
             <a:endParaRPr lang="en-US" sz="1300" dirty="0"/>
           </a:p>
@@ -36252,7 +38004,7 @@
                 <a:ea typeface="Calibri" pitchFamily="34" charset="-122"/>
                 <a:cs typeface="Calibri" pitchFamily="34" charset="-120"/>
               </a:rPr>
-              <a:t>2.  A reviewer is a person who destroys books and films.</a:t>
+              <a:t>2.  The root 'review' means to forget something completely.</a:t>
             </a:r>
             <a:endParaRPr lang="en-US" sz="1300" dirty="0"/>
           </a:p>
@@ -36391,7 +38143,7 @@
                 <a:ea typeface="Calibri" pitchFamily="34" charset="-122"/>
                 <a:cs typeface="Calibri" pitchFamily="34" charset="-120"/>
               </a:rPr>
-              <a:t>3.  The word 'reviewed' is the past tense of 'review'.</a:t>
+              <a:t>3.  The prefix 're-' in 'review' means again or back.</a:t>
             </a:r>
             <a:endParaRPr lang="en-US" sz="1300" dirty="0"/>
           </a:p>
@@ -36530,7 +38282,7 @@
                 <a:ea typeface="Calibri" pitchFamily="34" charset="-122"/>
                 <a:cs typeface="Calibri" pitchFamily="34" charset="-120"/>
               </a:rPr>
-              <a:t>4.  A self-review is when you examine your own work carefully.</a:t>
+              <a:t>4.  The word 'reviewing' is formed by adding the suffix '-ing' to the root 'review'.</a:t>
             </a:r>
             <a:endParaRPr lang="en-US" sz="1300" dirty="0"/>
           </a:p>
@@ -36669,7 +38421,7 @@
                 <a:ea typeface="Calibri" pitchFamily="34" charset="-122"/>
                 <a:cs typeface="Calibri" pitchFamily="34" charset="-120"/>
               </a:rPr>
-              <a:t>5.  The suffix '-ing' in 'reviewing' means the action is finished.</a:t>
+              <a:t>5.  The root 'review' comes from ancient Greek.</a:t>
             </a:r>
             <a:endParaRPr lang="en-US" sz="1300" dirty="0"/>
           </a:p>
@@ -37027,7 +38779,7 @@
                 <a:ea typeface="Calibri" pitchFamily="34" charset="-122"/>
                 <a:cs typeface="Calibri" pitchFamily="34" charset="-120"/>
               </a:rPr>
-              <a:t>Word Labs  •  wordlabs.app  •  Root: 'review' = look at again, examine</a:t>
+              <a:t>Word Labs  •  wordlabs.app  •  Root: 'review' = look at again carefully</a:t>
             </a:r>
             <a:endParaRPr lang="en-US" sz="800" dirty="0"/>
           </a:p>
@@ -37164,7 +38916,7 @@
                 <a:ea typeface="Trebuchet MS" pitchFamily="34" charset="-122"/>
                 <a:cs typeface="Trebuchet MS" pitchFamily="34" charset="-120"/>
               </a:rPr>
-              <a:t>look at again, examine</a:t>
+              <a:t>look at again carefully</a:t>
             </a:r>
             <a:endParaRPr lang="en-US" sz="2000" dirty="0"/>
           </a:p>
@@ -37704,7 +39456,7 @@
                 <a:ea typeface="Trebuchet MS" pitchFamily="34" charset="-122"/>
                 <a:cs typeface="Trebuchet MS" pitchFamily="34" charset="-120"/>
               </a:rPr>
-              <a:t>self-review</a:t>
+              <a:t>reviewable</a:t>
             </a:r>
             <a:endParaRPr lang="en-US" sz="1300" dirty="0"/>
           </a:p>
@@ -37996,7 +39748,7 @@
                 <a:ea typeface="Calibri" pitchFamily="34" charset="-122"/>
                 <a:cs typeface="Calibri" pitchFamily="34" charset="-120"/>
               </a:rPr>
-              <a:t>Word Labs  •  wordlabs.app  •  Root: 'review' = look at again, examine</a:t>
+              <a:t>Word Labs  •  wordlabs.app  •  Root: 'review' = look at again carefully</a:t>
             </a:r>
             <a:endParaRPr lang="en-US" sz="800" dirty="0"/>
           </a:p>
@@ -39770,7 +41522,7 @@
                 <a:ea typeface="Calibri" pitchFamily="34" charset="-122"/>
                 <a:cs typeface="Calibri" pitchFamily="34" charset="-120"/>
               </a:rPr>
-              <a:t>Word Labs  •  wordlabs.app  •  Root: 'review' = look at again, examine</a:t>
+              <a:t>Word Labs  •  wordlabs.app  •  Root: 'review' = look at again carefully</a:t>
             </a:r>
             <a:endParaRPr lang="en-US" sz="800" dirty="0"/>
           </a:p>
@@ -39948,7 +41700,7 @@
                 <a:ea typeface="Calibri" pitchFamily="34" charset="-122"/>
                 <a:cs typeface="Calibri" pitchFamily="34" charset="-120"/>
               </a:rPr>
-              <a:t>More than one opinion written about a book, film, game or restaurant.</a:t>
+              <a:t>More than one opinion piece about a book, film or show, or the act of checking things more than once.</a:t>
             </a:r>
             <a:endParaRPr lang="en-US" sz="1200" dirty="0"/>
           </a:p>
@@ -40226,7 +41978,7 @@
                 <a:ea typeface="Calibri" pitchFamily="34" charset="-122"/>
                 <a:cs typeface="Calibri" pitchFamily="34" charset="-120"/>
               </a:rPr>
-              <a:t>The act of looking at something carefully right now to check or give an opinion.</a:t>
+              <a:t>Currently looking at something again to check it or decide what you think.</a:t>
             </a:r>
             <a:endParaRPr lang="en-US" sz="1200" dirty="0"/>
           </a:p>
@@ -40365,7 +42117,7 @@
                 <a:ea typeface="Calibri" pitchFamily="34" charset="-122"/>
                 <a:cs typeface="Calibri" pitchFamily="34" charset="-120"/>
               </a:rPr>
-              <a:t>When you look carefully at your own work and think about how well you did.</a:t>
+              <a:t>Able to be looked at again or checked over at a later time.</a:t>
             </a:r>
             <a:endParaRPr lang="en-US" sz="1200" dirty="0"/>
           </a:p>
@@ -40504,7 +42256,7 @@
                 <a:ea typeface="Calibri" pitchFamily="34" charset="-122"/>
                 <a:cs typeface="Calibri" pitchFamily="34" charset="-120"/>
               </a:rPr>
-              <a:t>To look carefully at something again, or to give your opinion about a book, film or game.</a:t>
+              <a:t>To look at something carefully again, or to write about whether you liked a book, film or show.</a:t>
             </a:r>
             <a:endParaRPr lang="en-US" sz="1200" dirty="0"/>
           </a:p>
@@ -40643,7 +42395,7 @@
                 <a:ea typeface="Calibri" pitchFamily="34" charset="-122"/>
                 <a:cs typeface="Calibri" pitchFamily="34" charset="-120"/>
               </a:rPr>
-              <a:t>A check done before the main review to get ready for it.</a:t>
+              <a:t>A look at something before the main review or assessment takes place.</a:t>
             </a:r>
             <a:endParaRPr lang="en-US" sz="1200" dirty="0"/>
           </a:p>
@@ -40716,7 +42468,7 @@
                 <a:ea typeface="Trebuchet MS" pitchFamily="34" charset="-122"/>
                 <a:cs typeface="Trebuchet MS" pitchFamily="34" charset="-120"/>
               </a:rPr>
-              <a:t>self-review</a:t>
+              <a:t>reviewable</a:t>
             </a:r>
             <a:endParaRPr lang="en-US" sz="1200" dirty="0"/>
           </a:p>
@@ -40782,7 +42534,7 @@
                 <a:ea typeface="Calibri" pitchFamily="34" charset="-122"/>
                 <a:cs typeface="Calibri" pitchFamily="34" charset="-120"/>
               </a:rPr>
-              <a:t>When something has already been looked at carefully and an opinion was given.</a:t>
+              <a:t>Already looked at something again carefully to check or give an opinion on it.</a:t>
             </a:r>
             <a:endParaRPr lang="en-US" sz="1200" dirty="0"/>
           </a:p>
@@ -41074,7 +42826,7 @@
                 <a:ea typeface="Calibri" pitchFamily="34" charset="-122"/>
                 <a:cs typeface="Calibri" pitchFamily="34" charset="-120"/>
               </a:rPr>
-              <a:t>Word Labs  •  wordlabs.app  •  Root: 'review' = look at again, examine</a:t>
+              <a:t>Word Labs  •  wordlabs.app  •  Root: 'review' = look at again carefully</a:t>
             </a:r>
             <a:endParaRPr lang="en-US" sz="800" dirty="0"/>
           </a:p>
@@ -41605,7 +43357,7 @@
                 <a:ea typeface="Calibri" pitchFamily="34" charset="-122"/>
                 <a:cs typeface="Calibri" pitchFamily="34" charset="-120"/>
               </a:rPr>
-              <a:t>We spent Friday afternoon reviewing our maths work to fix any mistakes.</a:t>
+              <a:t>We spent Friday afternoon reviewing the science experiment to make sure our results were correct.</a:t>
             </a:r>
             <a:endParaRPr lang="en-US" sz="1500" dirty="0"/>
           </a:p>
